--- a/slides/Presentation_for_Anthropic_Healthcare_filled.pptx
+++ b/slides/Presentation_for_Anthropic_Healthcare_filled.pptx
@@ -841,8 +841,8 @@
         </p:blipFill>
         <p:spPr>
           <a:xfrm>
-            <a:off x="320040" y="1298448"/>
-            <a:ext cx="1444752" cy="1444752"/>
+            <a:off x="859536" y="1298448"/>
+            <a:ext cx="932688" cy="932688"/>
           </a:xfrm>
           <a:prstGeom prst="rect">
             <a:avLst/>
@@ -857,8 +857,8 @@
         </p:nvSpPr>
         <p:spPr>
           <a:xfrm>
-            <a:off x="320040" y="2798064"/>
-            <a:ext cx="1691640" cy="137160"/>
+            <a:off x="320040" y="2304288"/>
+            <a:ext cx="2011680" cy="128016"/>
           </a:xfrm>
           <a:prstGeom prst="rect">
             <a:avLst/>
@@ -880,6 +880,15 @@
               </a:rPr>
               <a:t>RACE</a:t>
             </a:r>
+            <a:r>
+              <a:rPr sz="700" b="1" i="0">
+                <a:solidFill>
+                  <a:srgbClr val="B4483D"/>
+                </a:solidFill>
+                <a:latin typeface="Century Schoolbook"/>
+              </a:rPr>
+              <a:t/>
+            </a:r>
           </a:p>
         </p:txBody>
       </p:sp>
@@ -891,8 +900,8 @@
         </p:nvSpPr>
         <p:spPr>
           <a:xfrm>
-            <a:off x="320040" y="2926080"/>
-            <a:ext cx="1691640" cy="310896"/>
+            <a:off x="320040" y="2432304"/>
+            <a:ext cx="2011680" cy="146304"/>
           </a:xfrm>
           <a:prstGeom prst="rect">
             <a:avLst/>
@@ -905,13 +914,8 @@
           </a:bodyPr>
           <a:lstStyle/>
           <a:p>
-            <a:pPr>
-              <a:lnSpc>
-                <a:spcPct val="92000"/>
-              </a:lnSpc>
-            </a:pPr>
-            <a:r>
-              <a:rPr sz="1000" b="1" i="0">
+            <a:r>
+              <a:rPr sz="950" b="1" i="0">
                 <a:solidFill>
                   <a:srgbClr val="15803D"/>
                 </a:solidFill>
@@ -920,20 +924,654 @@
               <a:t>57.0%</a:t>
             </a:r>
             <a:r>
-              <a:rPr sz="700" b="0" i="0">
+              <a:rPr sz="650" b="0" i="0">
                 <a:solidFill>
                   <a:srgbClr val="6D6C66"/>
                 </a:solidFill>
                 <a:latin typeface="Century Schoolbook"/>
               </a:rPr>
-              <a:t> of trials report it. White is 64.2% of participants with known race — the dominant slice.</a:t>
+              <a:t>  of trials report it</a:t>
+            </a:r>
+          </a:p>
+        </p:txBody>
+      </p:sp>
+      <p:sp>
+        <p:nvSpPr>
+          <p:cNvPr id="9" name="Rectangle 8"/>
+          <p:cNvSpPr/>
+          <p:nvPr/>
+        </p:nvSpPr>
+        <p:spPr>
+          <a:xfrm>
+            <a:off x="320040" y="2653588"/>
+            <a:ext cx="53340" cy="53340"/>
+          </a:xfrm>
+          <a:prstGeom prst="rect">
+            <a:avLst/>
+          </a:prstGeom>
+          <a:solidFill>
+            <a:srgbClr val="8B5CF6"/>
+          </a:solidFill>
+          <a:ln>
+            <a:noFill/>
+          </a:ln>
+          <a:effectLst/>
+        </p:spPr>
+        <p:style>
+          <a:lnRef idx="1">
+            <a:schemeClr val="accent1"/>
+          </a:lnRef>
+          <a:fillRef idx="3">
+            <a:schemeClr val="accent1"/>
+          </a:fillRef>
+          <a:effectRef idx="2">
+            <a:schemeClr val="accent1"/>
+          </a:effectRef>
+          <a:fontRef idx="minor">
+            <a:schemeClr val="lt1"/>
+          </a:fontRef>
+        </p:style>
+        <p:txBody>
+          <a:bodyPr rtlCol="0" anchor="ctr"/>
+          <a:lstStyle/>
+          <a:p>
+            <a:pPr algn="ctr"/>
+          </a:p>
+        </p:txBody>
+      </p:sp>
+      <p:sp>
+        <p:nvSpPr>
+          <p:cNvPr id="10" name="TextBox 9"/>
+          <p:cNvSpPr txBox="1"/>
+          <p:nvPr/>
+        </p:nvSpPr>
+        <p:spPr>
+          <a:xfrm>
+            <a:off x="411479" y="2633472"/>
+            <a:ext cx="1508760" cy="118872"/>
+          </a:xfrm>
+          <a:prstGeom prst="rect">
+            <a:avLst/>
+          </a:prstGeom>
+          <a:noFill/>
+        </p:spPr>
+        <p:txBody>
+          <a:bodyPr wrap="square" lIns="0" rIns="0" tIns="0" bIns="0">
+            <a:spAutoFit/>
+          </a:bodyPr>
+          <a:lstStyle/>
+          <a:p>
+            <a:r>
+              <a:rPr sz="630" b="0" i="0">
+                <a:solidFill>
+                  <a:srgbClr val="111827"/>
+                </a:solidFill>
+                <a:latin typeface="Century Schoolbook"/>
+              </a:rPr>
+              <a:t>White</a:t>
+            </a:r>
+          </a:p>
+        </p:txBody>
+      </p:sp>
+      <p:sp>
+        <p:nvSpPr>
+          <p:cNvPr id="11" name="TextBox 10"/>
+          <p:cNvSpPr txBox="1"/>
+          <p:nvPr/>
+        </p:nvSpPr>
+        <p:spPr>
+          <a:xfrm>
+            <a:off x="1892808" y="2633472"/>
+            <a:ext cx="438912" cy="118872"/>
+          </a:xfrm>
+          <a:prstGeom prst="rect">
+            <a:avLst/>
+          </a:prstGeom>
+          <a:noFill/>
+        </p:spPr>
+        <p:txBody>
+          <a:bodyPr wrap="square" lIns="0" rIns="0" tIns="0" bIns="0">
+            <a:spAutoFit/>
+          </a:bodyPr>
+          <a:lstStyle/>
+          <a:p>
+            <a:pPr algn="r"/>
+            <a:r>
+              <a:rPr sz="630" b="1" i="0">
+                <a:solidFill>
+                  <a:srgbClr val="111827"/>
+                </a:solidFill>
+                <a:latin typeface="Century Schoolbook"/>
+              </a:rPr>
+              <a:t>54.6%</a:t>
+            </a:r>
+          </a:p>
+        </p:txBody>
+      </p:sp>
+      <p:sp>
+        <p:nvSpPr>
+          <p:cNvPr id="12" name="Rectangle 11"/>
+          <p:cNvSpPr/>
+          <p:nvPr/>
+        </p:nvSpPr>
+        <p:spPr>
+          <a:xfrm>
+            <a:off x="320040" y="2760573"/>
+            <a:ext cx="53340" cy="53340"/>
+          </a:xfrm>
+          <a:prstGeom prst="rect">
+            <a:avLst/>
+          </a:prstGeom>
+          <a:solidFill>
+            <a:srgbClr val="6B7280"/>
+          </a:solidFill>
+          <a:ln>
+            <a:noFill/>
+          </a:ln>
+          <a:effectLst/>
+        </p:spPr>
+        <p:style>
+          <a:lnRef idx="1">
+            <a:schemeClr val="accent1"/>
+          </a:lnRef>
+          <a:fillRef idx="3">
+            <a:schemeClr val="accent1"/>
+          </a:fillRef>
+          <a:effectRef idx="2">
+            <a:schemeClr val="accent1"/>
+          </a:effectRef>
+          <a:fontRef idx="minor">
+            <a:schemeClr val="lt1"/>
+          </a:fontRef>
+        </p:style>
+        <p:txBody>
+          <a:bodyPr rtlCol="0" anchor="ctr"/>
+          <a:lstStyle/>
+          <a:p>
+            <a:pPr algn="ctr"/>
+          </a:p>
+        </p:txBody>
+      </p:sp>
+      <p:sp>
+        <p:nvSpPr>
+          <p:cNvPr id="13" name="TextBox 12"/>
+          <p:cNvSpPr txBox="1"/>
+          <p:nvPr/>
+        </p:nvSpPr>
+        <p:spPr>
+          <a:xfrm>
+            <a:off x="411479" y="2740456"/>
+            <a:ext cx="1508760" cy="118872"/>
+          </a:xfrm>
+          <a:prstGeom prst="rect">
+            <a:avLst/>
+          </a:prstGeom>
+          <a:noFill/>
+        </p:spPr>
+        <p:txBody>
+          <a:bodyPr wrap="square" lIns="0" rIns="0" tIns="0" bIns="0">
+            <a:spAutoFit/>
+          </a:bodyPr>
+          <a:lstStyle/>
+          <a:p>
+            <a:r>
+              <a:rPr sz="630" b="0" i="0">
+                <a:solidFill>
+                  <a:srgbClr val="111827"/>
+                </a:solidFill>
+                <a:latin typeface="Century Schoolbook"/>
+              </a:rPr>
+              <a:t>Unknown</a:t>
+            </a:r>
+          </a:p>
+        </p:txBody>
+      </p:sp>
+      <p:sp>
+        <p:nvSpPr>
+          <p:cNvPr id="14" name="TextBox 13"/>
+          <p:cNvSpPr txBox="1"/>
+          <p:nvPr/>
+        </p:nvSpPr>
+        <p:spPr>
+          <a:xfrm>
+            <a:off x="1892808" y="2740456"/>
+            <a:ext cx="438912" cy="118872"/>
+          </a:xfrm>
+          <a:prstGeom prst="rect">
+            <a:avLst/>
+          </a:prstGeom>
+          <a:noFill/>
+        </p:spPr>
+        <p:txBody>
+          <a:bodyPr wrap="square" lIns="0" rIns="0" tIns="0" bIns="0">
+            <a:spAutoFit/>
+          </a:bodyPr>
+          <a:lstStyle/>
+          <a:p>
+            <a:pPr algn="r"/>
+            <a:r>
+              <a:rPr sz="630" b="1" i="0">
+                <a:solidFill>
+                  <a:srgbClr val="111827"/>
+                </a:solidFill>
+                <a:latin typeface="Century Schoolbook"/>
+              </a:rPr>
+              <a:t>15.0%</a:t>
+            </a:r>
+          </a:p>
+        </p:txBody>
+      </p:sp>
+      <p:sp>
+        <p:nvSpPr>
+          <p:cNvPr id="15" name="Rectangle 14"/>
+          <p:cNvSpPr/>
+          <p:nvPr/>
+        </p:nvSpPr>
+        <p:spPr>
+          <a:xfrm>
+            <a:off x="320040" y="2867558"/>
+            <a:ext cx="53340" cy="53340"/>
+          </a:xfrm>
+          <a:prstGeom prst="rect">
+            <a:avLst/>
+          </a:prstGeom>
+          <a:solidFill>
+            <a:srgbClr val="10B981"/>
+          </a:solidFill>
+          <a:ln>
+            <a:noFill/>
+          </a:ln>
+          <a:effectLst/>
+        </p:spPr>
+        <p:style>
+          <a:lnRef idx="1">
+            <a:schemeClr val="accent1"/>
+          </a:lnRef>
+          <a:fillRef idx="3">
+            <a:schemeClr val="accent1"/>
+          </a:fillRef>
+          <a:effectRef idx="2">
+            <a:schemeClr val="accent1"/>
+          </a:effectRef>
+          <a:fontRef idx="minor">
+            <a:schemeClr val="lt1"/>
+          </a:fontRef>
+        </p:style>
+        <p:txBody>
+          <a:bodyPr rtlCol="0" anchor="ctr"/>
+          <a:lstStyle/>
+          <a:p>
+            <a:pPr algn="ctr"/>
+          </a:p>
+        </p:txBody>
+      </p:sp>
+      <p:sp>
+        <p:nvSpPr>
+          <p:cNvPr id="16" name="TextBox 15"/>
+          <p:cNvSpPr txBox="1"/>
+          <p:nvPr/>
+        </p:nvSpPr>
+        <p:spPr>
+          <a:xfrm>
+            <a:off x="411479" y="2847441"/>
+            <a:ext cx="1508760" cy="118872"/>
+          </a:xfrm>
+          <a:prstGeom prst="rect">
+            <a:avLst/>
+          </a:prstGeom>
+          <a:noFill/>
+        </p:spPr>
+        <p:txBody>
+          <a:bodyPr wrap="square" lIns="0" rIns="0" tIns="0" bIns="0">
+            <a:spAutoFit/>
+          </a:bodyPr>
+          <a:lstStyle/>
+          <a:p>
+            <a:r>
+              <a:rPr sz="630" b="0" i="0">
+                <a:solidFill>
+                  <a:srgbClr val="111827"/>
+                </a:solidFill>
+                <a:latin typeface="Century Schoolbook"/>
+              </a:rPr>
+              <a:t>Black/African American</a:t>
+            </a:r>
+          </a:p>
+        </p:txBody>
+      </p:sp>
+      <p:sp>
+        <p:nvSpPr>
+          <p:cNvPr id="17" name="TextBox 16"/>
+          <p:cNvSpPr txBox="1"/>
+          <p:nvPr/>
+        </p:nvSpPr>
+        <p:spPr>
+          <a:xfrm>
+            <a:off x="1892808" y="2847441"/>
+            <a:ext cx="438912" cy="118872"/>
+          </a:xfrm>
+          <a:prstGeom prst="rect">
+            <a:avLst/>
+          </a:prstGeom>
+          <a:noFill/>
+        </p:spPr>
+        <p:txBody>
+          <a:bodyPr wrap="square" lIns="0" rIns="0" tIns="0" bIns="0">
+            <a:spAutoFit/>
+          </a:bodyPr>
+          <a:lstStyle/>
+          <a:p>
+            <a:pPr algn="r"/>
+            <a:r>
+              <a:rPr sz="630" b="1" i="0">
+                <a:solidFill>
+                  <a:srgbClr val="111827"/>
+                </a:solidFill>
+                <a:latin typeface="Century Schoolbook"/>
+              </a:rPr>
+              <a:t>14.6%</a:t>
+            </a:r>
+          </a:p>
+        </p:txBody>
+      </p:sp>
+      <p:sp>
+        <p:nvSpPr>
+          <p:cNvPr id="18" name="Rectangle 17"/>
+          <p:cNvSpPr/>
+          <p:nvPr/>
+        </p:nvSpPr>
+        <p:spPr>
+          <a:xfrm>
+            <a:off x="320040" y="2974543"/>
+            <a:ext cx="53340" cy="53340"/>
+          </a:xfrm>
+          <a:prstGeom prst="rect">
+            <a:avLst/>
+          </a:prstGeom>
+          <a:solidFill>
+            <a:srgbClr val="1D1D1D"/>
+          </a:solidFill>
+          <a:ln>
+            <a:noFill/>
+          </a:ln>
+          <a:effectLst/>
+        </p:spPr>
+        <p:style>
+          <a:lnRef idx="1">
+            <a:schemeClr val="accent1"/>
+          </a:lnRef>
+          <a:fillRef idx="3">
+            <a:schemeClr val="accent1"/>
+          </a:fillRef>
+          <a:effectRef idx="2">
+            <a:schemeClr val="accent1"/>
+          </a:effectRef>
+          <a:fontRef idx="minor">
+            <a:schemeClr val="lt1"/>
+          </a:fontRef>
+        </p:style>
+        <p:txBody>
+          <a:bodyPr rtlCol="0" anchor="ctr"/>
+          <a:lstStyle/>
+          <a:p>
+            <a:pPr algn="ctr"/>
+          </a:p>
+        </p:txBody>
+      </p:sp>
+      <p:sp>
+        <p:nvSpPr>
+          <p:cNvPr id="19" name="TextBox 18"/>
+          <p:cNvSpPr txBox="1"/>
+          <p:nvPr/>
+        </p:nvSpPr>
+        <p:spPr>
+          <a:xfrm>
+            <a:off x="411479" y="2954426"/>
+            <a:ext cx="1508760" cy="118872"/>
+          </a:xfrm>
+          <a:prstGeom prst="rect">
+            <a:avLst/>
+          </a:prstGeom>
+          <a:noFill/>
+        </p:spPr>
+        <p:txBody>
+          <a:bodyPr wrap="square" lIns="0" rIns="0" tIns="0" bIns="0">
+            <a:spAutoFit/>
+          </a:bodyPr>
+          <a:lstStyle/>
+          <a:p>
+            <a:r>
+              <a:rPr sz="630" b="0" i="0">
+                <a:solidFill>
+                  <a:srgbClr val="111827"/>
+                </a:solidFill>
+                <a:latin typeface="Century Schoolbook"/>
+              </a:rPr>
+              <a:t>Other</a:t>
+            </a:r>
+          </a:p>
+        </p:txBody>
+      </p:sp>
+      <p:sp>
+        <p:nvSpPr>
+          <p:cNvPr id="20" name="TextBox 19"/>
+          <p:cNvSpPr txBox="1"/>
+          <p:nvPr/>
+        </p:nvSpPr>
+        <p:spPr>
+          <a:xfrm>
+            <a:off x="1892808" y="2954426"/>
+            <a:ext cx="438912" cy="118872"/>
+          </a:xfrm>
+          <a:prstGeom prst="rect">
+            <a:avLst/>
+          </a:prstGeom>
+          <a:noFill/>
+        </p:spPr>
+        <p:txBody>
+          <a:bodyPr wrap="square" lIns="0" rIns="0" tIns="0" bIns="0">
+            <a:spAutoFit/>
+          </a:bodyPr>
+          <a:lstStyle/>
+          <a:p>
+            <a:pPr algn="r"/>
+            <a:r>
+              <a:rPr sz="630" b="1" i="0">
+                <a:solidFill>
+                  <a:srgbClr val="111827"/>
+                </a:solidFill>
+                <a:latin typeface="Century Schoolbook"/>
+              </a:rPr>
+              <a:t>7.7%</a:t>
+            </a:r>
+          </a:p>
+        </p:txBody>
+      </p:sp>
+      <p:sp>
+        <p:nvSpPr>
+          <p:cNvPr id="21" name="Rectangle 20"/>
+          <p:cNvSpPr/>
+          <p:nvPr/>
+        </p:nvSpPr>
+        <p:spPr>
+          <a:xfrm>
+            <a:off x="320040" y="3081527"/>
+            <a:ext cx="53340" cy="53340"/>
+          </a:xfrm>
+          <a:prstGeom prst="rect">
+            <a:avLst/>
+          </a:prstGeom>
+          <a:solidFill>
+            <a:srgbClr val="F59E0B"/>
+          </a:solidFill>
+          <a:ln>
+            <a:noFill/>
+          </a:ln>
+          <a:effectLst/>
+        </p:spPr>
+        <p:style>
+          <a:lnRef idx="1">
+            <a:schemeClr val="accent1"/>
+          </a:lnRef>
+          <a:fillRef idx="3">
+            <a:schemeClr val="accent1"/>
+          </a:fillRef>
+          <a:effectRef idx="2">
+            <a:schemeClr val="accent1"/>
+          </a:effectRef>
+          <a:fontRef idx="minor">
+            <a:schemeClr val="lt1"/>
+          </a:fontRef>
+        </p:style>
+        <p:txBody>
+          <a:bodyPr rtlCol="0" anchor="ctr"/>
+          <a:lstStyle/>
+          <a:p>
+            <a:pPr algn="ctr"/>
+          </a:p>
+        </p:txBody>
+      </p:sp>
+      <p:sp>
+        <p:nvSpPr>
+          <p:cNvPr id="22" name="TextBox 21"/>
+          <p:cNvSpPr txBox="1"/>
+          <p:nvPr/>
+        </p:nvSpPr>
+        <p:spPr>
+          <a:xfrm>
+            <a:off x="411479" y="3061411"/>
+            <a:ext cx="1508760" cy="118872"/>
+          </a:xfrm>
+          <a:prstGeom prst="rect">
+            <a:avLst/>
+          </a:prstGeom>
+          <a:noFill/>
+        </p:spPr>
+        <p:txBody>
+          <a:bodyPr wrap="square" lIns="0" rIns="0" tIns="0" bIns="0">
+            <a:spAutoFit/>
+          </a:bodyPr>
+          <a:lstStyle/>
+          <a:p>
+            <a:r>
+              <a:rPr sz="630" b="0" i="0">
+                <a:solidFill>
+                  <a:srgbClr val="111827"/>
+                </a:solidFill>
+                <a:latin typeface="Century Schoolbook"/>
+              </a:rPr>
+              <a:t>Asian</a:t>
+            </a:r>
+          </a:p>
+        </p:txBody>
+      </p:sp>
+      <p:sp>
+        <p:nvSpPr>
+          <p:cNvPr id="23" name="TextBox 22"/>
+          <p:cNvSpPr txBox="1"/>
+          <p:nvPr/>
+        </p:nvSpPr>
+        <p:spPr>
+          <a:xfrm>
+            <a:off x="1892808" y="3061411"/>
+            <a:ext cx="438912" cy="118872"/>
+          </a:xfrm>
+          <a:prstGeom prst="rect">
+            <a:avLst/>
+          </a:prstGeom>
+          <a:noFill/>
+        </p:spPr>
+        <p:txBody>
+          <a:bodyPr wrap="square" lIns="0" rIns="0" tIns="0" bIns="0">
+            <a:spAutoFit/>
+          </a:bodyPr>
+          <a:lstStyle/>
+          <a:p>
+            <a:pPr algn="r"/>
+            <a:r>
+              <a:rPr sz="630" b="1" i="0">
+                <a:solidFill>
+                  <a:srgbClr val="111827"/>
+                </a:solidFill>
+                <a:latin typeface="Century Schoolbook"/>
+              </a:rPr>
+              <a:t>6.6%</a:t>
+            </a:r>
+          </a:p>
+        </p:txBody>
+      </p:sp>
+      <p:sp>
+        <p:nvSpPr>
+          <p:cNvPr id="24" name="TextBox 23"/>
+          <p:cNvSpPr txBox="1"/>
+          <p:nvPr/>
+        </p:nvSpPr>
+        <p:spPr>
+          <a:xfrm>
+            <a:off x="320040" y="3168396"/>
+            <a:ext cx="1508760" cy="118872"/>
+          </a:xfrm>
+          <a:prstGeom prst="rect">
+            <a:avLst/>
+          </a:prstGeom>
+          <a:noFill/>
+        </p:spPr>
+        <p:txBody>
+          <a:bodyPr wrap="square" lIns="0" rIns="0" tIns="0" bIns="0">
+            <a:spAutoFit/>
+          </a:bodyPr>
+          <a:lstStyle/>
+          <a:p>
+            <a:r>
+              <a:rPr sz="630" b="0" i="0">
+                <a:solidFill>
+                  <a:srgbClr val="111827"/>
+                </a:solidFill>
+                <a:latin typeface="Century Schoolbook"/>
+              </a:rPr>
+              <a:t>All remaining categories</a:t>
+            </a:r>
+          </a:p>
+        </p:txBody>
+      </p:sp>
+      <p:sp>
+        <p:nvSpPr>
+          <p:cNvPr id="25" name="TextBox 24"/>
+          <p:cNvSpPr txBox="1"/>
+          <p:nvPr/>
+        </p:nvSpPr>
+        <p:spPr>
+          <a:xfrm>
+            <a:off x="1892808" y="3168396"/>
+            <a:ext cx="438912" cy="118872"/>
+          </a:xfrm>
+          <a:prstGeom prst="rect">
+            <a:avLst/>
+          </a:prstGeom>
+          <a:noFill/>
+        </p:spPr>
+        <p:txBody>
+          <a:bodyPr wrap="square" lIns="0" rIns="0" tIns="0" bIns="0">
+            <a:spAutoFit/>
+          </a:bodyPr>
+          <a:lstStyle/>
+          <a:p>
+            <a:pPr algn="r"/>
+            <a:r>
+              <a:rPr sz="630" b="1" i="0">
+                <a:solidFill>
+                  <a:srgbClr val="111827"/>
+                </a:solidFill>
+                <a:latin typeface="Century Schoolbook"/>
+              </a:rPr>
+              <a:t>1.4%</a:t>
             </a:r>
           </a:p>
         </p:txBody>
       </p:sp>
       <p:pic>
         <p:nvPicPr>
-          <p:cNvPr id="9" name="Picture 8" descr="crop-ethnicity.png"/>
+          <p:cNvPr id="26" name="Picture 25" descr="crop-ethnicity.png"/>
           <p:cNvPicPr>
             <a:picLocks noChangeAspect="1"/>
           </p:cNvPicPr>
@@ -947,8 +1585,8 @@
         </p:blipFill>
         <p:spPr>
           <a:xfrm>
-            <a:off x="2379957" y="1298448"/>
-            <a:ext cx="1444752" cy="1444752"/>
+            <a:off x="3023616" y="1298448"/>
+            <a:ext cx="932688" cy="932688"/>
           </a:xfrm>
           <a:prstGeom prst="rect">
             <a:avLst/>
@@ -957,14 +1595,14 @@
       </p:pic>
       <p:sp>
         <p:nvSpPr>
-          <p:cNvPr id="10" name="TextBox 9"/>
-          <p:cNvSpPr txBox="1"/>
-          <p:nvPr/>
-        </p:nvSpPr>
-        <p:spPr>
-          <a:xfrm>
-            <a:off x="2379957" y="2798064"/>
-            <a:ext cx="1691640" cy="137160"/>
+          <p:cNvPr id="27" name="TextBox 26"/>
+          <p:cNvSpPr txBox="1"/>
+          <p:nvPr/>
+        </p:nvSpPr>
+        <p:spPr>
+          <a:xfrm>
+            <a:off x="2484120" y="2304288"/>
+            <a:ext cx="2011680" cy="128016"/>
           </a:xfrm>
           <a:prstGeom prst="rect">
             <a:avLst/>
@@ -986,19 +1624,28 @@
               </a:rPr>
               <a:t>ETHNICITY</a:t>
             </a:r>
-          </a:p>
-        </p:txBody>
-      </p:sp>
-      <p:sp>
-        <p:nvSpPr>
-          <p:cNvPr id="11" name="TextBox 10"/>
-          <p:cNvSpPr txBox="1"/>
-          <p:nvPr/>
-        </p:nvSpPr>
-        <p:spPr>
-          <a:xfrm>
-            <a:off x="2379957" y="2926080"/>
-            <a:ext cx="1691640" cy="310896"/>
+            <a:r>
+              <a:rPr sz="700" b="1" i="0">
+                <a:solidFill>
+                  <a:srgbClr val="B4483D"/>
+                </a:solidFill>
+                <a:latin typeface="Century Schoolbook"/>
+              </a:rPr>
+              <a:t/>
+            </a:r>
+          </a:p>
+        </p:txBody>
+      </p:sp>
+      <p:sp>
+        <p:nvSpPr>
+          <p:cNvPr id="28" name="TextBox 27"/>
+          <p:cNvSpPr txBox="1"/>
+          <p:nvPr/>
+        </p:nvSpPr>
+        <p:spPr>
+          <a:xfrm>
+            <a:off x="2484120" y="2432304"/>
+            <a:ext cx="2011680" cy="146304"/>
           </a:xfrm>
           <a:prstGeom prst="rect">
             <a:avLst/>
@@ -1011,13 +1658,8 @@
           </a:bodyPr>
           <a:lstStyle/>
           <a:p>
-            <a:pPr>
-              <a:lnSpc>
-                <a:spcPct val="92000"/>
-              </a:lnSpc>
-            </a:pPr>
-            <a:r>
-              <a:rPr sz="1000" b="1" i="0">
+            <a:r>
+              <a:rPr sz="950" b="1" i="0">
                 <a:solidFill>
                   <a:srgbClr val="15803D"/>
                 </a:solidFill>
@@ -1026,20 +1668,359 @@
               <a:t>39.1%</a:t>
             </a:r>
             <a:r>
-              <a:rPr sz="700" b="0" i="0">
+              <a:rPr sz="650" b="0" i="0">
                 <a:solidFill>
                   <a:srgbClr val="6D6C66"/>
                 </a:solidFill>
                 <a:latin typeface="Century Schoolbook"/>
               </a:rPr>
-              <a:t> of trials report it. The largest slice is “unknown”: 52.4% of all participants.</a:t>
+              <a:t>  of trials report it</a:t>
+            </a:r>
+          </a:p>
+        </p:txBody>
+      </p:sp>
+      <p:sp>
+        <p:nvSpPr>
+          <p:cNvPr id="29" name="Rectangle 28"/>
+          <p:cNvSpPr/>
+          <p:nvPr/>
+        </p:nvSpPr>
+        <p:spPr>
+          <a:xfrm>
+            <a:off x="2484120" y="2653588"/>
+            <a:ext cx="53340" cy="53340"/>
+          </a:xfrm>
+          <a:prstGeom prst="rect">
+            <a:avLst/>
+          </a:prstGeom>
+          <a:solidFill>
+            <a:srgbClr val="6B7280"/>
+          </a:solidFill>
+          <a:ln>
+            <a:noFill/>
+          </a:ln>
+          <a:effectLst/>
+        </p:spPr>
+        <p:style>
+          <a:lnRef idx="1">
+            <a:schemeClr val="accent1"/>
+          </a:lnRef>
+          <a:fillRef idx="3">
+            <a:schemeClr val="accent1"/>
+          </a:fillRef>
+          <a:effectRef idx="2">
+            <a:schemeClr val="accent1"/>
+          </a:effectRef>
+          <a:fontRef idx="minor">
+            <a:schemeClr val="lt1"/>
+          </a:fontRef>
+        </p:style>
+        <p:txBody>
+          <a:bodyPr rtlCol="0" anchor="ctr"/>
+          <a:lstStyle/>
+          <a:p>
+            <a:pPr algn="ctr"/>
+          </a:p>
+        </p:txBody>
+      </p:sp>
+      <p:sp>
+        <p:nvSpPr>
+          <p:cNvPr id="30" name="TextBox 29"/>
+          <p:cNvSpPr txBox="1"/>
+          <p:nvPr/>
+        </p:nvSpPr>
+        <p:spPr>
+          <a:xfrm>
+            <a:off x="2575560" y="2633472"/>
+            <a:ext cx="1508760" cy="118872"/>
+          </a:xfrm>
+          <a:prstGeom prst="rect">
+            <a:avLst/>
+          </a:prstGeom>
+          <a:noFill/>
+        </p:spPr>
+        <p:txBody>
+          <a:bodyPr wrap="square" lIns="0" rIns="0" tIns="0" bIns="0">
+            <a:spAutoFit/>
+          </a:bodyPr>
+          <a:lstStyle/>
+          <a:p>
+            <a:r>
+              <a:rPr sz="630" b="0" i="0">
+                <a:solidFill>
+                  <a:srgbClr val="111827"/>
+                </a:solidFill>
+                <a:latin typeface="Century Schoolbook"/>
+              </a:rPr>
+              <a:t>Unknown</a:t>
+            </a:r>
+          </a:p>
+        </p:txBody>
+      </p:sp>
+      <p:sp>
+        <p:nvSpPr>
+          <p:cNvPr id="31" name="TextBox 30"/>
+          <p:cNvSpPr txBox="1"/>
+          <p:nvPr/>
+        </p:nvSpPr>
+        <p:spPr>
+          <a:xfrm>
+            <a:off x="4056888" y="2633472"/>
+            <a:ext cx="438912" cy="118872"/>
+          </a:xfrm>
+          <a:prstGeom prst="rect">
+            <a:avLst/>
+          </a:prstGeom>
+          <a:noFill/>
+        </p:spPr>
+        <p:txBody>
+          <a:bodyPr wrap="square" lIns="0" rIns="0" tIns="0" bIns="0">
+            <a:spAutoFit/>
+          </a:bodyPr>
+          <a:lstStyle/>
+          <a:p>
+            <a:pPr algn="r"/>
+            <a:r>
+              <a:rPr sz="630" b="1" i="0">
+                <a:solidFill>
+                  <a:srgbClr val="111827"/>
+                </a:solidFill>
+                <a:latin typeface="Century Schoolbook"/>
+              </a:rPr>
+              <a:t>52.4%</a:t>
+            </a:r>
+          </a:p>
+        </p:txBody>
+      </p:sp>
+      <p:sp>
+        <p:nvSpPr>
+          <p:cNvPr id="32" name="Rectangle 31"/>
+          <p:cNvSpPr/>
+          <p:nvPr/>
+        </p:nvSpPr>
+        <p:spPr>
+          <a:xfrm>
+            <a:off x="2484120" y="2760573"/>
+            <a:ext cx="53340" cy="53340"/>
+          </a:xfrm>
+          <a:prstGeom prst="rect">
+            <a:avLst/>
+          </a:prstGeom>
+          <a:solidFill>
+            <a:srgbClr val="3B82F6"/>
+          </a:solidFill>
+          <a:ln>
+            <a:noFill/>
+          </a:ln>
+          <a:effectLst/>
+        </p:spPr>
+        <p:style>
+          <a:lnRef idx="1">
+            <a:schemeClr val="accent1"/>
+          </a:lnRef>
+          <a:fillRef idx="3">
+            <a:schemeClr val="accent1"/>
+          </a:fillRef>
+          <a:effectRef idx="2">
+            <a:schemeClr val="accent1"/>
+          </a:effectRef>
+          <a:fontRef idx="minor">
+            <a:schemeClr val="lt1"/>
+          </a:fontRef>
+        </p:style>
+        <p:txBody>
+          <a:bodyPr rtlCol="0" anchor="ctr"/>
+          <a:lstStyle/>
+          <a:p>
+            <a:pPr algn="ctr"/>
+          </a:p>
+        </p:txBody>
+      </p:sp>
+      <p:sp>
+        <p:nvSpPr>
+          <p:cNvPr id="33" name="TextBox 32"/>
+          <p:cNvSpPr txBox="1"/>
+          <p:nvPr/>
+        </p:nvSpPr>
+        <p:spPr>
+          <a:xfrm>
+            <a:off x="2575560" y="2740456"/>
+            <a:ext cx="1508760" cy="118872"/>
+          </a:xfrm>
+          <a:prstGeom prst="rect">
+            <a:avLst/>
+          </a:prstGeom>
+          <a:noFill/>
+        </p:spPr>
+        <p:txBody>
+          <a:bodyPr wrap="square" lIns="0" rIns="0" tIns="0" bIns="0">
+            <a:spAutoFit/>
+          </a:bodyPr>
+          <a:lstStyle/>
+          <a:p>
+            <a:r>
+              <a:rPr sz="630" b="0" i="0">
+                <a:solidFill>
+                  <a:srgbClr val="111827"/>
+                </a:solidFill>
+                <a:latin typeface="Century Schoolbook"/>
+              </a:rPr>
+              <a:t>Not Hispanic/Latino</a:t>
+            </a:r>
+          </a:p>
+        </p:txBody>
+      </p:sp>
+      <p:sp>
+        <p:nvSpPr>
+          <p:cNvPr id="34" name="TextBox 33"/>
+          <p:cNvSpPr txBox="1"/>
+          <p:nvPr/>
+        </p:nvSpPr>
+        <p:spPr>
+          <a:xfrm>
+            <a:off x="4056888" y="2740456"/>
+            <a:ext cx="438912" cy="118872"/>
+          </a:xfrm>
+          <a:prstGeom prst="rect">
+            <a:avLst/>
+          </a:prstGeom>
+          <a:noFill/>
+        </p:spPr>
+        <p:txBody>
+          <a:bodyPr wrap="square" lIns="0" rIns="0" tIns="0" bIns="0">
+            <a:spAutoFit/>
+          </a:bodyPr>
+          <a:lstStyle/>
+          <a:p>
+            <a:pPr algn="r"/>
+            <a:r>
+              <a:rPr sz="630" b="1" i="0">
+                <a:solidFill>
+                  <a:srgbClr val="111827"/>
+                </a:solidFill>
+                <a:latin typeface="Century Schoolbook"/>
+              </a:rPr>
+              <a:t>37.6%</a:t>
+            </a:r>
+          </a:p>
+        </p:txBody>
+      </p:sp>
+      <p:sp>
+        <p:nvSpPr>
+          <p:cNvPr id="35" name="Rectangle 34"/>
+          <p:cNvSpPr/>
+          <p:nvPr/>
+        </p:nvSpPr>
+        <p:spPr>
+          <a:xfrm>
+            <a:off x="2484120" y="2867558"/>
+            <a:ext cx="53340" cy="53340"/>
+          </a:xfrm>
+          <a:prstGeom prst="rect">
+            <a:avLst/>
+          </a:prstGeom>
+          <a:solidFill>
+            <a:srgbClr val="F59E0B"/>
+          </a:solidFill>
+          <a:ln>
+            <a:noFill/>
+          </a:ln>
+          <a:effectLst/>
+        </p:spPr>
+        <p:style>
+          <a:lnRef idx="1">
+            <a:schemeClr val="accent1"/>
+          </a:lnRef>
+          <a:fillRef idx="3">
+            <a:schemeClr val="accent1"/>
+          </a:fillRef>
+          <a:effectRef idx="2">
+            <a:schemeClr val="accent1"/>
+          </a:effectRef>
+          <a:fontRef idx="minor">
+            <a:schemeClr val="lt1"/>
+          </a:fontRef>
+        </p:style>
+        <p:txBody>
+          <a:bodyPr rtlCol="0" anchor="ctr"/>
+          <a:lstStyle/>
+          <a:p>
+            <a:pPr algn="ctr"/>
+          </a:p>
+        </p:txBody>
+      </p:sp>
+      <p:sp>
+        <p:nvSpPr>
+          <p:cNvPr id="36" name="TextBox 35"/>
+          <p:cNvSpPr txBox="1"/>
+          <p:nvPr/>
+        </p:nvSpPr>
+        <p:spPr>
+          <a:xfrm>
+            <a:off x="2575560" y="2847441"/>
+            <a:ext cx="1508760" cy="118872"/>
+          </a:xfrm>
+          <a:prstGeom prst="rect">
+            <a:avLst/>
+          </a:prstGeom>
+          <a:noFill/>
+        </p:spPr>
+        <p:txBody>
+          <a:bodyPr wrap="square" lIns="0" rIns="0" tIns="0" bIns="0">
+            <a:spAutoFit/>
+          </a:bodyPr>
+          <a:lstStyle/>
+          <a:p>
+            <a:r>
+              <a:rPr sz="630" b="0" i="0">
+                <a:solidFill>
+                  <a:srgbClr val="111827"/>
+                </a:solidFill>
+                <a:latin typeface="Century Schoolbook"/>
+              </a:rPr>
+              <a:t>Hispanic/Latino</a:t>
+            </a:r>
+          </a:p>
+        </p:txBody>
+      </p:sp>
+      <p:sp>
+        <p:nvSpPr>
+          <p:cNvPr id="37" name="TextBox 36"/>
+          <p:cNvSpPr txBox="1"/>
+          <p:nvPr/>
+        </p:nvSpPr>
+        <p:spPr>
+          <a:xfrm>
+            <a:off x="4056888" y="2847441"/>
+            <a:ext cx="438912" cy="118872"/>
+          </a:xfrm>
+          <a:prstGeom prst="rect">
+            <a:avLst/>
+          </a:prstGeom>
+          <a:noFill/>
+        </p:spPr>
+        <p:txBody>
+          <a:bodyPr wrap="square" lIns="0" rIns="0" tIns="0" bIns="0">
+            <a:spAutoFit/>
+          </a:bodyPr>
+          <a:lstStyle/>
+          <a:p>
+            <a:pPr algn="r"/>
+            <a:r>
+              <a:rPr sz="630" b="1" i="0">
+                <a:solidFill>
+                  <a:srgbClr val="111827"/>
+                </a:solidFill>
+                <a:latin typeface="Century Schoolbook"/>
+              </a:rPr>
+              <a:t>10.0%</a:t>
             </a:r>
           </a:p>
         </p:txBody>
       </p:sp>
       <p:pic>
         <p:nvPicPr>
-          <p:cNvPr id="12" name="Picture 11" descr="crop-sex.png"/>
+          <p:cNvPr id="38" name="Picture 37" descr="crop-sex.png"/>
           <p:cNvPicPr>
             <a:picLocks noChangeAspect="1"/>
           </p:cNvPicPr>
@@ -1053,8 +2034,8 @@
         </p:blipFill>
         <p:spPr>
           <a:xfrm>
-            <a:off x="4439875" y="1298448"/>
-            <a:ext cx="1444752" cy="1444752"/>
+            <a:off x="5187696" y="1298448"/>
+            <a:ext cx="932688" cy="932688"/>
           </a:xfrm>
           <a:prstGeom prst="rect">
             <a:avLst/>
@@ -1063,14 +2044,14 @@
       </p:pic>
       <p:sp>
         <p:nvSpPr>
-          <p:cNvPr id="13" name="TextBox 12"/>
-          <p:cNvSpPr txBox="1"/>
-          <p:nvPr/>
-        </p:nvSpPr>
-        <p:spPr>
-          <a:xfrm>
-            <a:off x="4439875" y="2798064"/>
-            <a:ext cx="1691640" cy="137160"/>
+          <p:cNvPr id="39" name="TextBox 38"/>
+          <p:cNvSpPr txBox="1"/>
+          <p:nvPr/>
+        </p:nvSpPr>
+        <p:spPr>
+          <a:xfrm>
+            <a:off x="4648200" y="2304288"/>
+            <a:ext cx="2011680" cy="128016"/>
           </a:xfrm>
           <a:prstGeom prst="rect">
             <a:avLst/>
@@ -1092,19 +2073,28 @@
               </a:rPr>
               <a:t>SEX</a:t>
             </a:r>
-          </a:p>
-        </p:txBody>
-      </p:sp>
-      <p:sp>
-        <p:nvSpPr>
-          <p:cNvPr id="14" name="TextBox 13"/>
-          <p:cNvSpPr txBox="1"/>
-          <p:nvPr/>
-        </p:nvSpPr>
-        <p:spPr>
-          <a:xfrm>
-            <a:off x="4439875" y="2926080"/>
-            <a:ext cx="1691640" cy="310896"/>
+            <a:r>
+              <a:rPr sz="700" b="1" i="0">
+                <a:solidFill>
+                  <a:srgbClr val="B4483D"/>
+                </a:solidFill>
+                <a:latin typeface="Century Schoolbook"/>
+              </a:rPr>
+              <a:t>*</a:t>
+            </a:r>
+          </a:p>
+        </p:txBody>
+      </p:sp>
+      <p:sp>
+        <p:nvSpPr>
+          <p:cNvPr id="40" name="TextBox 39"/>
+          <p:cNvSpPr txBox="1"/>
+          <p:nvPr/>
+        </p:nvSpPr>
+        <p:spPr>
+          <a:xfrm>
+            <a:off x="4648200" y="2432304"/>
+            <a:ext cx="2011680" cy="146304"/>
           </a:xfrm>
           <a:prstGeom prst="rect">
             <a:avLst/>
@@ -1117,13 +2107,8 @@
           </a:bodyPr>
           <a:lstStyle/>
           <a:p>
-            <a:pPr>
-              <a:lnSpc>
-                <a:spcPct val="92000"/>
-              </a:lnSpc>
-            </a:pPr>
-            <a:r>
-              <a:rPr sz="1000" b="1" i="0">
+            <a:r>
+              <a:rPr sz="950" b="1" i="0">
                 <a:solidFill>
                   <a:srgbClr val="15803D"/>
                 </a:solidFill>
@@ -1132,20 +2117,359 @@
               <a:t>97.3%</a:t>
             </a:r>
             <a:r>
-              <a:rPr sz="700" b="0" i="0">
+              <a:rPr sz="650" b="0" i="0">
                 <a:solidFill>
                   <a:srgbClr val="6D6C66"/>
                 </a:solidFill>
                 <a:latin typeface="Century Schoolbook"/>
               </a:rPr>
-              <a:t> of trials report it — the one dimension that is near-complete. Female 51.5%.</a:t>
+              <a:t>  of trials report it</a:t>
+            </a:r>
+          </a:p>
+        </p:txBody>
+      </p:sp>
+      <p:sp>
+        <p:nvSpPr>
+          <p:cNvPr id="41" name="Rectangle 40"/>
+          <p:cNvSpPr/>
+          <p:nvPr/>
+        </p:nvSpPr>
+        <p:spPr>
+          <a:xfrm>
+            <a:off x="4648200" y="2653588"/>
+            <a:ext cx="53340" cy="53340"/>
+          </a:xfrm>
+          <a:prstGeom prst="rect">
+            <a:avLst/>
+          </a:prstGeom>
+          <a:solidFill>
+            <a:srgbClr val="EC4899"/>
+          </a:solidFill>
+          <a:ln>
+            <a:noFill/>
+          </a:ln>
+          <a:effectLst/>
+        </p:spPr>
+        <p:style>
+          <a:lnRef idx="1">
+            <a:schemeClr val="accent1"/>
+          </a:lnRef>
+          <a:fillRef idx="3">
+            <a:schemeClr val="accent1"/>
+          </a:fillRef>
+          <a:effectRef idx="2">
+            <a:schemeClr val="accent1"/>
+          </a:effectRef>
+          <a:fontRef idx="minor">
+            <a:schemeClr val="lt1"/>
+          </a:fontRef>
+        </p:style>
+        <p:txBody>
+          <a:bodyPr rtlCol="0" anchor="ctr"/>
+          <a:lstStyle/>
+          <a:p>
+            <a:pPr algn="ctr"/>
+          </a:p>
+        </p:txBody>
+      </p:sp>
+      <p:sp>
+        <p:nvSpPr>
+          <p:cNvPr id="42" name="TextBox 41"/>
+          <p:cNvSpPr txBox="1"/>
+          <p:nvPr/>
+        </p:nvSpPr>
+        <p:spPr>
+          <a:xfrm>
+            <a:off x="4739639" y="2633472"/>
+            <a:ext cx="1508760" cy="118872"/>
+          </a:xfrm>
+          <a:prstGeom prst="rect">
+            <a:avLst/>
+          </a:prstGeom>
+          <a:noFill/>
+        </p:spPr>
+        <p:txBody>
+          <a:bodyPr wrap="square" lIns="0" rIns="0" tIns="0" bIns="0">
+            <a:spAutoFit/>
+          </a:bodyPr>
+          <a:lstStyle/>
+          <a:p>
+            <a:r>
+              <a:rPr sz="630" b="0" i="0">
+                <a:solidFill>
+                  <a:srgbClr val="111827"/>
+                </a:solidFill>
+                <a:latin typeface="Century Schoolbook"/>
+              </a:rPr>
+              <a:t>Female</a:t>
+            </a:r>
+          </a:p>
+        </p:txBody>
+      </p:sp>
+      <p:sp>
+        <p:nvSpPr>
+          <p:cNvPr id="43" name="TextBox 42"/>
+          <p:cNvSpPr txBox="1"/>
+          <p:nvPr/>
+        </p:nvSpPr>
+        <p:spPr>
+          <a:xfrm>
+            <a:off x="6220967" y="2633472"/>
+            <a:ext cx="438912" cy="118872"/>
+          </a:xfrm>
+          <a:prstGeom prst="rect">
+            <a:avLst/>
+          </a:prstGeom>
+          <a:noFill/>
+        </p:spPr>
+        <p:txBody>
+          <a:bodyPr wrap="square" lIns="0" rIns="0" tIns="0" bIns="0">
+            <a:spAutoFit/>
+          </a:bodyPr>
+          <a:lstStyle/>
+          <a:p>
+            <a:pPr algn="r"/>
+            <a:r>
+              <a:rPr sz="630" b="1" i="0">
+                <a:solidFill>
+                  <a:srgbClr val="111827"/>
+                </a:solidFill>
+                <a:latin typeface="Century Schoolbook"/>
+              </a:rPr>
+              <a:t>51.5%</a:t>
+            </a:r>
+          </a:p>
+        </p:txBody>
+      </p:sp>
+      <p:sp>
+        <p:nvSpPr>
+          <p:cNvPr id="44" name="Rectangle 43"/>
+          <p:cNvSpPr/>
+          <p:nvPr/>
+        </p:nvSpPr>
+        <p:spPr>
+          <a:xfrm>
+            <a:off x="4648200" y="2760573"/>
+            <a:ext cx="53340" cy="53340"/>
+          </a:xfrm>
+          <a:prstGeom prst="rect">
+            <a:avLst/>
+          </a:prstGeom>
+          <a:solidFill>
+            <a:srgbClr val="3B82F6"/>
+          </a:solidFill>
+          <a:ln>
+            <a:noFill/>
+          </a:ln>
+          <a:effectLst/>
+        </p:spPr>
+        <p:style>
+          <a:lnRef idx="1">
+            <a:schemeClr val="accent1"/>
+          </a:lnRef>
+          <a:fillRef idx="3">
+            <a:schemeClr val="accent1"/>
+          </a:fillRef>
+          <a:effectRef idx="2">
+            <a:schemeClr val="accent1"/>
+          </a:effectRef>
+          <a:fontRef idx="minor">
+            <a:schemeClr val="lt1"/>
+          </a:fontRef>
+        </p:style>
+        <p:txBody>
+          <a:bodyPr rtlCol="0" anchor="ctr"/>
+          <a:lstStyle/>
+          <a:p>
+            <a:pPr algn="ctr"/>
+          </a:p>
+        </p:txBody>
+      </p:sp>
+      <p:sp>
+        <p:nvSpPr>
+          <p:cNvPr id="45" name="TextBox 44"/>
+          <p:cNvSpPr txBox="1"/>
+          <p:nvPr/>
+        </p:nvSpPr>
+        <p:spPr>
+          <a:xfrm>
+            <a:off x="4739639" y="2740456"/>
+            <a:ext cx="1508760" cy="118872"/>
+          </a:xfrm>
+          <a:prstGeom prst="rect">
+            <a:avLst/>
+          </a:prstGeom>
+          <a:noFill/>
+        </p:spPr>
+        <p:txBody>
+          <a:bodyPr wrap="square" lIns="0" rIns="0" tIns="0" bIns="0">
+            <a:spAutoFit/>
+          </a:bodyPr>
+          <a:lstStyle/>
+          <a:p>
+            <a:r>
+              <a:rPr sz="630" b="0" i="0">
+                <a:solidFill>
+                  <a:srgbClr val="111827"/>
+                </a:solidFill>
+                <a:latin typeface="Century Schoolbook"/>
+              </a:rPr>
+              <a:t>Male</a:t>
+            </a:r>
+          </a:p>
+        </p:txBody>
+      </p:sp>
+      <p:sp>
+        <p:nvSpPr>
+          <p:cNvPr id="46" name="TextBox 45"/>
+          <p:cNvSpPr txBox="1"/>
+          <p:nvPr/>
+        </p:nvSpPr>
+        <p:spPr>
+          <a:xfrm>
+            <a:off x="6220967" y="2740456"/>
+            <a:ext cx="438912" cy="118872"/>
+          </a:xfrm>
+          <a:prstGeom prst="rect">
+            <a:avLst/>
+          </a:prstGeom>
+          <a:noFill/>
+        </p:spPr>
+        <p:txBody>
+          <a:bodyPr wrap="square" lIns="0" rIns="0" tIns="0" bIns="0">
+            <a:spAutoFit/>
+          </a:bodyPr>
+          <a:lstStyle/>
+          <a:p>
+            <a:pPr algn="r"/>
+            <a:r>
+              <a:rPr sz="630" b="1" i="0">
+                <a:solidFill>
+                  <a:srgbClr val="111827"/>
+                </a:solidFill>
+                <a:latin typeface="Century Schoolbook"/>
+              </a:rPr>
+              <a:t>45.0%</a:t>
+            </a:r>
+          </a:p>
+        </p:txBody>
+      </p:sp>
+      <p:sp>
+        <p:nvSpPr>
+          <p:cNvPr id="47" name="Rectangle 46"/>
+          <p:cNvSpPr/>
+          <p:nvPr/>
+        </p:nvSpPr>
+        <p:spPr>
+          <a:xfrm>
+            <a:off x="4648200" y="2867558"/>
+            <a:ext cx="53340" cy="53340"/>
+          </a:xfrm>
+          <a:prstGeom prst="rect">
+            <a:avLst/>
+          </a:prstGeom>
+          <a:solidFill>
+            <a:srgbClr val="6B7280"/>
+          </a:solidFill>
+          <a:ln>
+            <a:noFill/>
+          </a:ln>
+          <a:effectLst/>
+        </p:spPr>
+        <p:style>
+          <a:lnRef idx="1">
+            <a:schemeClr val="accent1"/>
+          </a:lnRef>
+          <a:fillRef idx="3">
+            <a:schemeClr val="accent1"/>
+          </a:fillRef>
+          <a:effectRef idx="2">
+            <a:schemeClr val="accent1"/>
+          </a:effectRef>
+          <a:fontRef idx="minor">
+            <a:schemeClr val="lt1"/>
+          </a:fontRef>
+        </p:style>
+        <p:txBody>
+          <a:bodyPr rtlCol="0" anchor="ctr"/>
+          <a:lstStyle/>
+          <a:p>
+            <a:pPr algn="ctr"/>
+          </a:p>
+        </p:txBody>
+      </p:sp>
+      <p:sp>
+        <p:nvSpPr>
+          <p:cNvPr id="48" name="TextBox 47"/>
+          <p:cNvSpPr txBox="1"/>
+          <p:nvPr/>
+        </p:nvSpPr>
+        <p:spPr>
+          <a:xfrm>
+            <a:off x="4739639" y="2847441"/>
+            <a:ext cx="1508760" cy="118872"/>
+          </a:xfrm>
+          <a:prstGeom prst="rect">
+            <a:avLst/>
+          </a:prstGeom>
+          <a:noFill/>
+        </p:spPr>
+        <p:txBody>
+          <a:bodyPr wrap="square" lIns="0" rIns="0" tIns="0" bIns="0">
+            <a:spAutoFit/>
+          </a:bodyPr>
+          <a:lstStyle/>
+          <a:p>
+            <a:r>
+              <a:rPr sz="630" b="0" i="0">
+                <a:solidFill>
+                  <a:srgbClr val="111827"/>
+                </a:solidFill>
+                <a:latin typeface="Century Schoolbook"/>
+              </a:rPr>
+              <a:t>Unknown</a:t>
+            </a:r>
+          </a:p>
+        </p:txBody>
+      </p:sp>
+      <p:sp>
+        <p:nvSpPr>
+          <p:cNvPr id="49" name="TextBox 48"/>
+          <p:cNvSpPr txBox="1"/>
+          <p:nvPr/>
+        </p:nvSpPr>
+        <p:spPr>
+          <a:xfrm>
+            <a:off x="6220967" y="2847441"/>
+            <a:ext cx="438912" cy="118872"/>
+          </a:xfrm>
+          <a:prstGeom prst="rect">
+            <a:avLst/>
+          </a:prstGeom>
+          <a:noFill/>
+        </p:spPr>
+        <p:txBody>
+          <a:bodyPr wrap="square" lIns="0" rIns="0" tIns="0" bIns="0">
+            <a:spAutoFit/>
+          </a:bodyPr>
+          <a:lstStyle/>
+          <a:p>
+            <a:pPr algn="r"/>
+            <a:r>
+              <a:rPr sz="630" b="1" i="0">
+                <a:solidFill>
+                  <a:srgbClr val="111827"/>
+                </a:solidFill>
+                <a:latin typeface="Century Schoolbook"/>
+              </a:rPr>
+              <a:t>3.5%</a:t>
             </a:r>
           </a:p>
         </p:txBody>
       </p:sp>
       <p:pic>
         <p:nvPicPr>
-          <p:cNvPr id="15" name="Picture 14" descr="crop-geography.png"/>
+          <p:cNvPr id="50" name="Picture 49" descr="crop-geography.png"/>
           <p:cNvPicPr>
             <a:picLocks noChangeAspect="1"/>
           </p:cNvPicPr>
@@ -1159,8 +2483,8 @@
         </p:blipFill>
         <p:spPr>
           <a:xfrm>
-            <a:off x="6499793" y="1298448"/>
-            <a:ext cx="2324166" cy="1444752"/>
+            <a:off x="7067914" y="1298448"/>
+            <a:ext cx="1500411" cy="932688"/>
           </a:xfrm>
           <a:prstGeom prst="rect">
             <a:avLst/>
@@ -1169,14 +2493,14 @@
       </p:pic>
       <p:sp>
         <p:nvSpPr>
-          <p:cNvPr id="16" name="TextBox 15"/>
-          <p:cNvSpPr txBox="1"/>
-          <p:nvPr/>
-        </p:nvSpPr>
-        <p:spPr>
-          <a:xfrm>
-            <a:off x="6499793" y="2798064"/>
-            <a:ext cx="2324166" cy="137160"/>
+          <p:cNvPr id="51" name="TextBox 50"/>
+          <p:cNvSpPr txBox="1"/>
+          <p:nvPr/>
+        </p:nvSpPr>
+        <p:spPr>
+          <a:xfrm>
+            <a:off x="6812279" y="2304288"/>
+            <a:ext cx="2011680" cy="128016"/>
           </a:xfrm>
           <a:prstGeom prst="rect">
             <a:avLst/>
@@ -1198,19 +2522,28 @@
               </a:rPr>
               <a:t>GEOGRAPHY</a:t>
             </a:r>
-          </a:p>
-        </p:txBody>
-      </p:sp>
-      <p:sp>
-        <p:nvSpPr>
-          <p:cNvPr id="17" name="TextBox 16"/>
-          <p:cNvSpPr txBox="1"/>
-          <p:nvPr/>
-        </p:nvSpPr>
-        <p:spPr>
-          <a:xfrm>
-            <a:off x="6499793" y="2926080"/>
-            <a:ext cx="2324166" cy="310896"/>
+            <a:r>
+              <a:rPr sz="700" b="1" i="0">
+                <a:solidFill>
+                  <a:srgbClr val="B4483D"/>
+                </a:solidFill>
+                <a:latin typeface="Century Schoolbook"/>
+              </a:rPr>
+              <a:t>*</a:t>
+            </a:r>
+          </a:p>
+        </p:txBody>
+      </p:sp>
+      <p:sp>
+        <p:nvSpPr>
+          <p:cNvPr id="52" name="TextBox 51"/>
+          <p:cNvSpPr txBox="1"/>
+          <p:nvPr/>
+        </p:nvSpPr>
+        <p:spPr>
+          <a:xfrm>
+            <a:off x="6812279" y="2432304"/>
+            <a:ext cx="2011680" cy="146304"/>
           </a:xfrm>
           <a:prstGeom prst="rect">
             <a:avLst/>
@@ -1223,13 +2556,8 @@
           </a:bodyPr>
           <a:lstStyle/>
           <a:p>
-            <a:pPr>
-              <a:lnSpc>
-                <a:spcPct val="92000"/>
-              </a:lnSpc>
-            </a:pPr>
-            <a:r>
-              <a:rPr sz="1000" b="1" i="0">
+            <a:r>
+              <a:rPr sz="950" b="1" i="0">
                 <a:solidFill>
                   <a:srgbClr val="15803D"/>
                 </a:solidFill>
@@ -1238,26 +2566,302 @@
               <a:t>37.3%</a:t>
             </a:r>
             <a:r>
-              <a:rPr sz="700" b="0" i="0">
+              <a:rPr sz="650" b="0" i="0">
                 <a:solidFill>
                   <a:srgbClr val="6D6C66"/>
                 </a:solidFill>
                 <a:latin typeface="Century Schoolbook"/>
               </a:rPr>
-              <a:t> of trial sites sit in the South. CA, TX, FL and NY dominate the map.</a:t>
-            </a:r>
-          </a:p>
-        </p:txBody>
-      </p:sp>
-      <p:sp>
-        <p:nvSpPr>
-          <p:cNvPr id="18" name="Rectangle 17"/>
+              <a:t>  of sites are in the South</a:t>
+            </a:r>
+          </a:p>
+        </p:txBody>
+      </p:sp>
+      <p:sp>
+        <p:nvSpPr>
+          <p:cNvPr id="53" name="TextBox 52"/>
+          <p:cNvSpPr txBox="1"/>
+          <p:nvPr/>
+        </p:nvSpPr>
+        <p:spPr>
+          <a:xfrm>
+            <a:off x="6812279" y="2633472"/>
+            <a:ext cx="1508760" cy="118872"/>
+          </a:xfrm>
+          <a:prstGeom prst="rect">
+            <a:avLst/>
+          </a:prstGeom>
+          <a:noFill/>
+        </p:spPr>
+        <p:txBody>
+          <a:bodyPr wrap="square" lIns="0" rIns="0" tIns="0" bIns="0">
+            <a:spAutoFit/>
+          </a:bodyPr>
+          <a:lstStyle/>
+          <a:p>
+            <a:r>
+              <a:rPr sz="630" b="0" i="0">
+                <a:solidFill>
+                  <a:srgbClr val="111827"/>
+                </a:solidFill>
+                <a:latin typeface="Century Schoolbook"/>
+              </a:rPr>
+              <a:t>South</a:t>
+            </a:r>
+          </a:p>
+        </p:txBody>
+      </p:sp>
+      <p:sp>
+        <p:nvSpPr>
+          <p:cNvPr id="54" name="TextBox 53"/>
+          <p:cNvSpPr txBox="1"/>
+          <p:nvPr/>
+        </p:nvSpPr>
+        <p:spPr>
+          <a:xfrm>
+            <a:off x="8385047" y="2633472"/>
+            <a:ext cx="438912" cy="118872"/>
+          </a:xfrm>
+          <a:prstGeom prst="rect">
+            <a:avLst/>
+          </a:prstGeom>
+          <a:noFill/>
+        </p:spPr>
+        <p:txBody>
+          <a:bodyPr wrap="square" lIns="0" rIns="0" tIns="0" bIns="0">
+            <a:spAutoFit/>
+          </a:bodyPr>
+          <a:lstStyle/>
+          <a:p>
+            <a:pPr algn="r"/>
+            <a:r>
+              <a:rPr sz="630" b="1" i="0">
+                <a:solidFill>
+                  <a:srgbClr val="111827"/>
+                </a:solidFill>
+                <a:latin typeface="Century Schoolbook"/>
+              </a:rPr>
+              <a:t>37.3%</a:t>
+            </a:r>
+          </a:p>
+        </p:txBody>
+      </p:sp>
+      <p:sp>
+        <p:nvSpPr>
+          <p:cNvPr id="55" name="TextBox 54"/>
+          <p:cNvSpPr txBox="1"/>
+          <p:nvPr/>
+        </p:nvSpPr>
+        <p:spPr>
+          <a:xfrm>
+            <a:off x="6812279" y="2740456"/>
+            <a:ext cx="1508760" cy="118872"/>
+          </a:xfrm>
+          <a:prstGeom prst="rect">
+            <a:avLst/>
+          </a:prstGeom>
+          <a:noFill/>
+        </p:spPr>
+        <p:txBody>
+          <a:bodyPr wrap="square" lIns="0" rIns="0" tIns="0" bIns="0">
+            <a:spAutoFit/>
+          </a:bodyPr>
+          <a:lstStyle/>
+          <a:p>
+            <a:r>
+              <a:rPr sz="630" b="0" i="0">
+                <a:solidFill>
+                  <a:srgbClr val="111827"/>
+                </a:solidFill>
+                <a:latin typeface="Century Schoolbook"/>
+              </a:rPr>
+              <a:t>Midwest</a:t>
+            </a:r>
+          </a:p>
+        </p:txBody>
+      </p:sp>
+      <p:sp>
+        <p:nvSpPr>
+          <p:cNvPr id="56" name="TextBox 55"/>
+          <p:cNvSpPr txBox="1"/>
+          <p:nvPr/>
+        </p:nvSpPr>
+        <p:spPr>
+          <a:xfrm>
+            <a:off x="8385047" y="2740456"/>
+            <a:ext cx="438912" cy="118872"/>
+          </a:xfrm>
+          <a:prstGeom prst="rect">
+            <a:avLst/>
+          </a:prstGeom>
+          <a:noFill/>
+        </p:spPr>
+        <p:txBody>
+          <a:bodyPr wrap="square" lIns="0" rIns="0" tIns="0" bIns="0">
+            <a:spAutoFit/>
+          </a:bodyPr>
+          <a:lstStyle/>
+          <a:p>
+            <a:pPr algn="r"/>
+            <a:r>
+              <a:rPr sz="630" b="1" i="0">
+                <a:solidFill>
+                  <a:srgbClr val="111827"/>
+                </a:solidFill>
+                <a:latin typeface="Century Schoolbook"/>
+              </a:rPr>
+              <a:t>23.6%</a:t>
+            </a:r>
+          </a:p>
+        </p:txBody>
+      </p:sp>
+      <p:sp>
+        <p:nvSpPr>
+          <p:cNvPr id="57" name="TextBox 56"/>
+          <p:cNvSpPr txBox="1"/>
+          <p:nvPr/>
+        </p:nvSpPr>
+        <p:spPr>
+          <a:xfrm>
+            <a:off x="6812279" y="2847441"/>
+            <a:ext cx="1508760" cy="118872"/>
+          </a:xfrm>
+          <a:prstGeom prst="rect">
+            <a:avLst/>
+          </a:prstGeom>
+          <a:noFill/>
+        </p:spPr>
+        <p:txBody>
+          <a:bodyPr wrap="square" lIns="0" rIns="0" tIns="0" bIns="0">
+            <a:spAutoFit/>
+          </a:bodyPr>
+          <a:lstStyle/>
+          <a:p>
+            <a:r>
+              <a:rPr sz="630" b="0" i="0">
+                <a:solidFill>
+                  <a:srgbClr val="111827"/>
+                </a:solidFill>
+                <a:latin typeface="Century Schoolbook"/>
+              </a:rPr>
+              <a:t>West</a:t>
+            </a:r>
+          </a:p>
+        </p:txBody>
+      </p:sp>
+      <p:sp>
+        <p:nvSpPr>
+          <p:cNvPr id="58" name="TextBox 57"/>
+          <p:cNvSpPr txBox="1"/>
+          <p:nvPr/>
+        </p:nvSpPr>
+        <p:spPr>
+          <a:xfrm>
+            <a:off x="8385047" y="2847441"/>
+            <a:ext cx="438912" cy="118872"/>
+          </a:xfrm>
+          <a:prstGeom prst="rect">
+            <a:avLst/>
+          </a:prstGeom>
+          <a:noFill/>
+        </p:spPr>
+        <p:txBody>
+          <a:bodyPr wrap="square" lIns="0" rIns="0" tIns="0" bIns="0">
+            <a:spAutoFit/>
+          </a:bodyPr>
+          <a:lstStyle/>
+          <a:p>
+            <a:pPr algn="r"/>
+            <a:r>
+              <a:rPr sz="630" b="1" i="0">
+                <a:solidFill>
+                  <a:srgbClr val="111827"/>
+                </a:solidFill>
+                <a:latin typeface="Century Schoolbook"/>
+              </a:rPr>
+              <a:t>20.6%</a:t>
+            </a:r>
+          </a:p>
+        </p:txBody>
+      </p:sp>
+      <p:sp>
+        <p:nvSpPr>
+          <p:cNvPr id="59" name="TextBox 58"/>
+          <p:cNvSpPr txBox="1"/>
+          <p:nvPr/>
+        </p:nvSpPr>
+        <p:spPr>
+          <a:xfrm>
+            <a:off x="6812279" y="2954426"/>
+            <a:ext cx="1508760" cy="118872"/>
+          </a:xfrm>
+          <a:prstGeom prst="rect">
+            <a:avLst/>
+          </a:prstGeom>
+          <a:noFill/>
+        </p:spPr>
+        <p:txBody>
+          <a:bodyPr wrap="square" lIns="0" rIns="0" tIns="0" bIns="0">
+            <a:spAutoFit/>
+          </a:bodyPr>
+          <a:lstStyle/>
+          <a:p>
+            <a:r>
+              <a:rPr sz="630" b="0" i="0">
+                <a:solidFill>
+                  <a:srgbClr val="111827"/>
+                </a:solidFill>
+                <a:latin typeface="Century Schoolbook"/>
+              </a:rPr>
+              <a:t>Northeast</a:t>
+            </a:r>
+          </a:p>
+        </p:txBody>
+      </p:sp>
+      <p:sp>
+        <p:nvSpPr>
+          <p:cNvPr id="60" name="TextBox 59"/>
+          <p:cNvSpPr txBox="1"/>
+          <p:nvPr/>
+        </p:nvSpPr>
+        <p:spPr>
+          <a:xfrm>
+            <a:off x="8385047" y="2954426"/>
+            <a:ext cx="438912" cy="118872"/>
+          </a:xfrm>
+          <a:prstGeom prst="rect">
+            <a:avLst/>
+          </a:prstGeom>
+          <a:noFill/>
+        </p:spPr>
+        <p:txBody>
+          <a:bodyPr wrap="square" lIns="0" rIns="0" tIns="0" bIns="0">
+            <a:spAutoFit/>
+          </a:bodyPr>
+          <a:lstStyle/>
+          <a:p>
+            <a:pPr algn="r"/>
+            <a:r>
+              <a:rPr sz="630" b="1" i="0">
+                <a:solidFill>
+                  <a:srgbClr val="111827"/>
+                </a:solidFill>
+                <a:latin typeface="Century Schoolbook"/>
+              </a:rPr>
+              <a:t>18.5%</a:t>
+            </a:r>
+          </a:p>
+        </p:txBody>
+      </p:sp>
+      <p:sp>
+        <p:nvSpPr>
+          <p:cNvPr id="61" name="Rectangle 60"/>
           <p:cNvSpPr/>
           <p:nvPr/>
         </p:nvSpPr>
         <p:spPr>
           <a:xfrm>
-            <a:off x="320040" y="3310128"/>
+            <a:off x="320040" y="3291840"/>
             <a:ext cx="8503920" cy="11430"/>
           </a:xfrm>
           <a:prstGeom prst="rect">
@@ -1295,13 +2899,13 @@
       </p:sp>
       <p:sp>
         <p:nvSpPr>
-          <p:cNvPr id="19" name="TextBox 18"/>
-          <p:cNvSpPr txBox="1"/>
-          <p:nvPr/>
-        </p:nvSpPr>
-        <p:spPr>
-          <a:xfrm>
-            <a:off x="320040" y="3383280"/>
+          <p:cNvPr id="62" name="TextBox 61"/>
+          <p:cNvSpPr txBox="1"/>
+          <p:nvPr/>
+        </p:nvSpPr>
+        <p:spPr>
+          <a:xfrm>
+            <a:off x="320040" y="3364992"/>
             <a:ext cx="5486400" cy="237744"/>
           </a:xfrm>
           <a:prstGeom prst="rect">
@@ -1329,7 +2933,7 @@
       </p:sp>
       <p:pic>
         <p:nvPicPr>
-          <p:cNvPr id="20" name="Picture 19" descr="crop-ai-devices.png"/>
+          <p:cNvPr id="63" name="Picture 62" descr="crop-ai-devices.png"/>
           <p:cNvPicPr>
             <a:picLocks noChangeAspect="1"/>
           </p:cNvPicPr>
@@ -1343,7 +2947,7 @@
         </p:blipFill>
         <p:spPr>
           <a:xfrm>
-            <a:off x="320040" y="3712463"/>
+            <a:off x="320040" y="3657600"/>
             <a:ext cx="4160520" cy="795528"/>
           </a:xfrm>
           <a:prstGeom prst="rect">
@@ -1353,48 +2957,14 @@
       </p:pic>
       <p:sp>
         <p:nvSpPr>
-          <p:cNvPr id="21" name="TextBox 20"/>
-          <p:cNvSpPr txBox="1"/>
-          <p:nvPr/>
-        </p:nvSpPr>
-        <p:spPr>
-          <a:xfrm>
-            <a:off x="320040" y="4562856"/>
-            <a:ext cx="4160520" cy="146304"/>
-          </a:xfrm>
-          <a:prstGeom prst="rect">
-            <a:avLst/>
-          </a:prstGeom>
-          <a:noFill/>
-        </p:spPr>
-        <p:txBody>
-          <a:bodyPr wrap="square" lIns="0" rIns="0" tIns="0" bIns="0">
-            <a:spAutoFit/>
-          </a:bodyPr>
-          <a:lstStyle/>
-          <a:p>
-            <a:r>
-              <a:rPr sz="700" b="0" i="0">
-                <a:solidFill>
-                  <a:srgbClr val="6D6C66"/>
-                </a:solidFill>
-                <a:latin typeface="Century Schoolbook"/>
-              </a:rPr>
-              <a:t>FDA AI/ML-Enabled Device List · 1,451 authorizations to 2026-03-05</a:t>
-            </a:r>
-          </a:p>
-        </p:txBody>
-      </p:sp>
-      <p:sp>
-        <p:nvSpPr>
-          <p:cNvPr id="22" name="Rectangle 21"/>
+          <p:cNvPr id="64" name="Rectangle 63"/>
           <p:cNvSpPr/>
           <p:nvPr/>
         </p:nvSpPr>
         <p:spPr>
           <a:xfrm>
-            <a:off x="4754880" y="3675887"/>
-            <a:ext cx="11430" cy="960120"/>
+            <a:off x="4754880" y="3639312"/>
+            <a:ext cx="11430" cy="932688"/>
           </a:xfrm>
           <a:prstGeom prst="rect">
             <a:avLst/>
@@ -1431,14 +3001,14 @@
       </p:sp>
       <p:sp>
         <p:nvSpPr>
-          <p:cNvPr id="23" name="TextBox 22"/>
-          <p:cNvSpPr txBox="1"/>
-          <p:nvPr/>
-        </p:nvSpPr>
-        <p:spPr>
-          <a:xfrm>
-            <a:off x="4956048" y="3675887"/>
-            <a:ext cx="3867912" cy="1051560"/>
+          <p:cNvPr id="65" name="TextBox 64"/>
+          <p:cNvSpPr txBox="1"/>
+          <p:nvPr/>
+        </p:nvSpPr>
+        <p:spPr>
+          <a:xfrm>
+            <a:off x="4956048" y="3639312"/>
+            <a:ext cx="3867912" cy="1005840"/>
           </a:xfrm>
           <a:prstGeom prst="rect">
             <a:avLst/>
@@ -1507,13 +3077,56 @@
       </p:sp>
       <p:sp>
         <p:nvSpPr>
-          <p:cNvPr id="24" name="TextBox 23"/>
-          <p:cNvSpPr txBox="1"/>
-          <p:nvPr/>
-        </p:nvSpPr>
-        <p:spPr>
-          <a:xfrm>
-            <a:off x="320040" y="4809744"/>
+          <p:cNvPr id="66" name="TextBox 65"/>
+          <p:cNvSpPr txBox="1"/>
+          <p:nvPr/>
+        </p:nvSpPr>
+        <p:spPr>
+          <a:xfrm>
+            <a:off x="320040" y="4681728"/>
+            <a:ext cx="8503920" cy="128016"/>
+          </a:xfrm>
+          <a:prstGeom prst="rect">
+            <a:avLst/>
+          </a:prstGeom>
+          <a:noFill/>
+        </p:spPr>
+        <p:txBody>
+          <a:bodyPr wrap="square" lIns="0" rIns="0" tIns="0" bIns="0">
+            <a:spAutoFit/>
+          </a:bodyPr>
+          <a:lstStyle/>
+          <a:p>
+            <a:r>
+              <a:rPr sz="680" b="1" i="0">
+                <a:solidFill>
+                  <a:srgbClr val="B4483D"/>
+                </a:solidFill>
+                <a:latin typeface="Century Schoolbook"/>
+              </a:rPr>
+              <a:t>*</a:t>
+            </a:r>
+            <a:r>
+              <a:rPr sz="680" b="0" i="0">
+                <a:solidFill>
+                  <a:srgbClr val="6D6C66"/>
+                </a:solidFill>
+                <a:latin typeface="Century Schoolbook"/>
+              </a:rPr>
+              <a:t> Sex and geography sit outside the race/ethnicity analyses already written up — protocol manuscripts covering their extraction are in preparation.</a:t>
+            </a:r>
+          </a:p>
+        </p:txBody>
+      </p:sp>
+      <p:sp>
+        <p:nvSpPr>
+          <p:cNvPr id="67" name="TextBox 66"/>
+          <p:cNvSpPr txBox="1"/>
+          <p:nvPr/>
+        </p:nvSpPr>
+        <p:spPr>
+          <a:xfrm>
+            <a:off x="320040" y="4828032"/>
             <a:ext cx="8503920" cy="201168"/>
           </a:xfrm>
           <a:prstGeom prst="rect">
@@ -1528,13 +3141,13 @@
           <a:lstStyle/>
           <a:p>
             <a:r>
-              <a:rPr sz="700" b="0" i="0">
+              <a:rPr sz="680" b="0" i="0">
                 <a:solidFill>
                   <a:srgbClr val="6D6C66"/>
                 </a:solidFill>
                 <a:latin typeface="Century Schoolbook"/>
               </a:rPr>
-              <a:t>Dashboard: civicsample.com · trial figures from data/dashboard-summary.json (2026-07-26 snapshot, all study types) · device figures from the FDA AI/ML-Enabled Device List</a:t>
+              <a:t>Dashboard: civicsample.com · trial figures from data/dashboard-summary.json (2026-07-26 snapshot, all study types) · geography shares are US Census regions · device figures from the FDA AI/ML-Enabled Device List</a:t>
             </a:r>
           </a:p>
         </p:txBody>
@@ -1638,7 +3251,7 @@
                 </a:solidFill>
                 <a:latin typeface="Century Schoolbook"/>
               </a:rPr>
-              <a:t>$11.11</a:t>
+              <a:t>What it costs to pull one concept out of a regulatory PDF</a:t>
             </a:r>
             <a:r>
               <a:rPr sz="1050" b="0" i="1">
@@ -1647,25 +3260,7 @@
                 </a:solidFill>
                 <a:latin typeface="Century Schoolbook"/>
               </a:rPr>
-              <a:t> of the </a:t>
-            </a:r>
-            <a:r>
-              <a:rPr sz="1050" b="1" i="1">
-                <a:solidFill>
-                  <a:srgbClr val="6D6C66"/>
-                </a:solidFill>
-                <a:latin typeface="Century Schoolbook"/>
-              </a:rPr>
-              <a:t>$38,133</a:t>
-            </a:r>
-            <a:r>
-              <a:rPr sz="1050" b="0" i="1">
-                <a:solidFill>
-                  <a:srgbClr val="6D6C66"/>
-                </a:solidFill>
-                <a:latin typeface="Century Schoolbook"/>
-              </a:rPr>
-              <a:t> award spent so far — the pilot was about proving the extraction before scaling it, not about volume.</a:t>
+              <a:t> — and where feedback would help most.</a:t>
             </a:r>
           </a:p>
         </p:txBody>
@@ -1679,7 +3274,7 @@
         <p:spPr>
           <a:xfrm>
             <a:off x="320040" y="914400"/>
-            <a:ext cx="4892040" cy="237744"/>
+            <a:ext cx="4709160" cy="237744"/>
           </a:xfrm>
           <a:prstGeom prst="rect">
             <a:avLst/>
@@ -1699,7 +3294,7 @@
                 </a:solidFill>
                 <a:latin typeface="Century Schoolbook"/>
               </a:rPr>
-              <a:t>What the pilot cost</a:t>
+              <a:t>The extraction, end to end</a:t>
             </a:r>
           </a:p>
         </p:txBody>
@@ -1713,7 +3308,7 @@
         <p:spPr>
           <a:xfrm>
             <a:off x="320040" y="1207008"/>
-            <a:ext cx="4892040" cy="11430"/>
+            <a:ext cx="4709160" cy="11430"/>
           </a:xfrm>
           <a:prstGeom prst="rect">
             <a:avLst/>
@@ -1756,8 +3351,8 @@
         </p:nvSpPr>
         <p:spPr>
           <a:xfrm>
-            <a:off x="320040" y="1298448"/>
-            <a:ext cx="1188720" cy="219456"/>
+            <a:off x="320040" y="1280160"/>
+            <a:ext cx="4709160" cy="118872"/>
           </a:xfrm>
           <a:prstGeom prst="rect">
             <a:avLst/>
@@ -1771,48 +3366,61 @@
           <a:lstStyle/>
           <a:p>
             <a:r>
-              <a:rPr sz="1300" b="1" i="0">
-                <a:solidFill>
-                  <a:srgbClr val="15803D"/>
-                </a:solidFill>
-                <a:latin typeface="Century Schoolbook"/>
-              </a:rPr>
-              <a:t>2.63M</a:t>
-            </a:r>
-          </a:p>
-        </p:txBody>
-      </p:sp>
-      <p:sp>
-        <p:nvSpPr>
-          <p:cNvPr id="7" name="TextBox 6"/>
-          <p:cNvSpPr txBox="1"/>
-          <p:nvPr/>
-        </p:nvSpPr>
-        <p:spPr>
-          <a:xfrm>
-            <a:off x="320040" y="1517904"/>
-            <a:ext cx="1188720" cy="128016"/>
-          </a:xfrm>
-          <a:prstGeom prst="rect">
-            <a:avLst/>
-          </a:prstGeom>
-          <a:noFill/>
-        </p:spPr>
-        <p:txBody>
-          <a:bodyPr wrap="square" lIns="0" rIns="0" tIns="0" bIns="0">
-            <a:spAutoFit/>
-          </a:bodyPr>
-          <a:lstStyle/>
-          <a:p>
-            <a:r>
-              <a:rPr sz="800" b="1" i="0">
-                <a:solidFill>
-                  <a:srgbClr val="111827"/>
-                </a:solidFill>
-                <a:latin typeface="Century Schoolbook"/>
-              </a:rPr>
-              <a:t>tokens</a:t>
-            </a:r>
+              <a:rPr sz="700" b="1" i="0">
+                <a:solidFill>
+                  <a:srgbClr val="6D6C66"/>
+                </a:solidFill>
+                <a:latin typeface="Century Schoolbook"/>
+              </a:rPr>
+              <a:t>1 · THE REVIEW PROMPT</a:t>
+            </a:r>
+          </a:p>
+        </p:txBody>
+      </p:sp>
+      <p:sp>
+        <p:nvSpPr>
+          <p:cNvPr id="7" name="Rectangle 6"/>
+          <p:cNvSpPr/>
+          <p:nvPr/>
+        </p:nvSpPr>
+        <p:spPr>
+          <a:xfrm>
+            <a:off x="320040" y="1408176"/>
+            <a:ext cx="4709160" cy="932688"/>
+          </a:xfrm>
+          <a:prstGeom prst="rect">
+            <a:avLst/>
+          </a:prstGeom>
+          <a:solidFill>
+            <a:srgbClr val="FAF7F6"/>
+          </a:solidFill>
+          <a:ln w="9525">
+            <a:solidFill>
+              <a:srgbClr val="B4483D"/>
+            </a:solidFill>
+            <a:prstDash val="dash"/>
+          </a:ln>
+          <a:effectLst/>
+        </p:spPr>
+        <p:style>
+          <a:lnRef idx="1">
+            <a:schemeClr val="accent1"/>
+          </a:lnRef>
+          <a:fillRef idx="3">
+            <a:schemeClr val="accent1"/>
+          </a:fillRef>
+          <a:effectRef idx="2">
+            <a:schemeClr val="accent1"/>
+          </a:effectRef>
+          <a:fontRef idx="minor">
+            <a:schemeClr val="lt1"/>
+          </a:fontRef>
+        </p:style>
+        <p:txBody>
+          <a:bodyPr rtlCol="0" anchor="ctr"/>
+          <a:lstStyle/>
+          <a:p>
+            <a:pPr algn="ctr"/>
           </a:p>
         </p:txBody>
       </p:sp>
@@ -1824,406 +3432,8 @@
         </p:nvSpPr>
         <p:spPr>
           <a:xfrm>
-            <a:off x="320040" y="1645920"/>
-            <a:ext cx="1188720" cy="128016"/>
-          </a:xfrm>
-          <a:prstGeom prst="rect">
-            <a:avLst/>
-          </a:prstGeom>
-          <a:noFill/>
-        </p:spPr>
-        <p:txBody>
-          <a:bodyPr wrap="square" lIns="0" rIns="0" tIns="0" bIns="0">
-            <a:spAutoFit/>
-          </a:bodyPr>
-          <a:lstStyle/>
-          <a:p>
-            <a:r>
-              <a:rPr sz="650" b="0" i="0">
-                <a:solidFill>
-                  <a:srgbClr val="6D6C66"/>
-                </a:solidFill>
-                <a:latin typeface="Century Schoolbook"/>
-              </a:rPr>
-              <a:t>2.41M in · 220K out</a:t>
-            </a:r>
-          </a:p>
-        </p:txBody>
-      </p:sp>
-      <p:sp>
-        <p:nvSpPr>
-          <p:cNvPr id="9" name="TextBox 8"/>
-          <p:cNvSpPr txBox="1"/>
-          <p:nvPr/>
-        </p:nvSpPr>
-        <p:spPr>
-          <a:xfrm>
-            <a:off x="1554480" y="1298448"/>
-            <a:ext cx="1188720" cy="219456"/>
-          </a:xfrm>
-          <a:prstGeom prst="rect">
-            <a:avLst/>
-          </a:prstGeom>
-          <a:noFill/>
-        </p:spPr>
-        <p:txBody>
-          <a:bodyPr wrap="square" lIns="0" rIns="0" tIns="0" bIns="0">
-            <a:spAutoFit/>
-          </a:bodyPr>
-          <a:lstStyle/>
-          <a:p>
-            <a:r>
-              <a:rPr sz="1300" b="1" i="0">
-                <a:solidFill>
-                  <a:srgbClr val="15803D"/>
-                </a:solidFill>
-                <a:latin typeface="Century Schoolbook"/>
-              </a:rPr>
-              <a:t>36</a:t>
-            </a:r>
-          </a:p>
-        </p:txBody>
-      </p:sp>
-      <p:sp>
-        <p:nvSpPr>
-          <p:cNvPr id="10" name="TextBox 9"/>
-          <p:cNvSpPr txBox="1"/>
-          <p:nvPr/>
-        </p:nvSpPr>
-        <p:spPr>
-          <a:xfrm>
-            <a:off x="1554480" y="1517904"/>
-            <a:ext cx="1188720" cy="128016"/>
-          </a:xfrm>
-          <a:prstGeom prst="rect">
-            <a:avLst/>
-          </a:prstGeom>
-          <a:noFill/>
-        </p:spPr>
-        <p:txBody>
-          <a:bodyPr wrap="square" lIns="0" rIns="0" tIns="0" bIns="0">
-            <a:spAutoFit/>
-          </a:bodyPr>
-          <a:lstStyle/>
-          <a:p>
-            <a:r>
-              <a:rPr sz="800" b="1" i="0">
-                <a:solidFill>
-                  <a:srgbClr val="111827"/>
-                </a:solidFill>
-                <a:latin typeface="Century Schoolbook"/>
-              </a:rPr>
-              <a:t>documents</a:t>
-            </a:r>
-          </a:p>
-        </p:txBody>
-      </p:sp>
-      <p:sp>
-        <p:nvSpPr>
-          <p:cNvPr id="11" name="TextBox 10"/>
-          <p:cNvSpPr txBox="1"/>
-          <p:nvPr/>
-        </p:nvSpPr>
-        <p:spPr>
-          <a:xfrm>
-            <a:off x="1554480" y="1645920"/>
-            <a:ext cx="1188720" cy="128016"/>
-          </a:xfrm>
-          <a:prstGeom prst="rect">
-            <a:avLst/>
-          </a:prstGeom>
-          <a:noFill/>
-        </p:spPr>
-        <p:txBody>
-          <a:bodyPr wrap="square" lIns="0" rIns="0" tIns="0" bIns="0">
-            <a:spAutoFit/>
-          </a:bodyPr>
-          <a:lstStyle/>
-          <a:p>
-            <a:r>
-              <a:rPr sz="650" b="0" i="0">
-                <a:solidFill>
-                  <a:srgbClr val="6D6C66"/>
-                </a:solidFill>
-                <a:latin typeface="Century Schoolbook"/>
-              </a:rPr>
-              <a:t>373 PDF pages</a:t>
-            </a:r>
-          </a:p>
-        </p:txBody>
-      </p:sp>
-      <p:sp>
-        <p:nvSpPr>
-          <p:cNvPr id="12" name="TextBox 11"/>
-          <p:cNvSpPr txBox="1"/>
-          <p:nvPr/>
-        </p:nvSpPr>
-        <p:spPr>
-          <a:xfrm>
-            <a:off x="2788920" y="1298448"/>
-            <a:ext cx="1188720" cy="219456"/>
-          </a:xfrm>
-          <a:prstGeom prst="rect">
-            <a:avLst/>
-          </a:prstGeom>
-          <a:noFill/>
-        </p:spPr>
-        <p:txBody>
-          <a:bodyPr wrap="square" lIns="0" rIns="0" tIns="0" bIns="0">
-            <a:spAutoFit/>
-          </a:bodyPr>
-          <a:lstStyle/>
-          <a:p>
-            <a:r>
-              <a:rPr sz="1300" b="1" i="0">
-                <a:solidFill>
-                  <a:srgbClr val="15803D"/>
-                </a:solidFill>
-                <a:latin typeface="Century Schoolbook"/>
-              </a:rPr>
-              <a:t>3×</a:t>
-            </a:r>
-          </a:p>
-        </p:txBody>
-      </p:sp>
-      <p:sp>
-        <p:nvSpPr>
-          <p:cNvPr id="13" name="TextBox 12"/>
-          <p:cNvSpPr txBox="1"/>
-          <p:nvPr/>
-        </p:nvSpPr>
-        <p:spPr>
-          <a:xfrm>
-            <a:off x="2788920" y="1517904"/>
-            <a:ext cx="1188720" cy="128016"/>
-          </a:xfrm>
-          <a:prstGeom prst="rect">
-            <a:avLst/>
-          </a:prstGeom>
-          <a:noFill/>
-        </p:spPr>
-        <p:txBody>
-          <a:bodyPr wrap="square" lIns="0" rIns="0" tIns="0" bIns="0">
-            <a:spAutoFit/>
-          </a:bodyPr>
-          <a:lstStyle/>
-          <a:p>
-            <a:r>
-              <a:rPr sz="800" b="1" i="0">
-                <a:solidFill>
-                  <a:srgbClr val="111827"/>
-                </a:solidFill>
-                <a:latin typeface="Century Schoolbook"/>
-              </a:rPr>
-              <a:t>models each</a:t>
-            </a:r>
-          </a:p>
-        </p:txBody>
-      </p:sp>
-      <p:sp>
-        <p:nvSpPr>
-          <p:cNvPr id="14" name="TextBox 13"/>
-          <p:cNvSpPr txBox="1"/>
-          <p:nvPr/>
-        </p:nvSpPr>
-        <p:spPr>
-          <a:xfrm>
-            <a:off x="2788920" y="1645920"/>
-            <a:ext cx="1188720" cy="128016"/>
-          </a:xfrm>
-          <a:prstGeom prst="rect">
-            <a:avLst/>
-          </a:prstGeom>
-          <a:noFill/>
-        </p:spPr>
-        <p:txBody>
-          <a:bodyPr wrap="square" lIns="0" rIns="0" tIns="0" bIns="0">
-            <a:spAutoFit/>
-          </a:bodyPr>
-          <a:lstStyle/>
-          <a:p>
-            <a:r>
-              <a:rPr sz="650" b="0" i="0">
-                <a:solidFill>
-                  <a:srgbClr val="6D6C66"/>
-                </a:solidFill>
-                <a:latin typeface="Century Schoolbook"/>
-              </a:rPr>
-              <a:t>Haiku · Sonnet · Opus</a:t>
-            </a:r>
-          </a:p>
-        </p:txBody>
-      </p:sp>
-      <p:sp>
-        <p:nvSpPr>
-          <p:cNvPr id="15" name="TextBox 14"/>
-          <p:cNvSpPr txBox="1"/>
-          <p:nvPr/>
-        </p:nvSpPr>
-        <p:spPr>
-          <a:xfrm>
-            <a:off x="4023360" y="1298448"/>
-            <a:ext cx="1188720" cy="219456"/>
-          </a:xfrm>
-          <a:prstGeom prst="rect">
-            <a:avLst/>
-          </a:prstGeom>
-          <a:noFill/>
-        </p:spPr>
-        <p:txBody>
-          <a:bodyPr wrap="square" lIns="0" rIns="0" tIns="0" bIns="0">
-            <a:spAutoFit/>
-          </a:bodyPr>
-          <a:lstStyle/>
-          <a:p>
-            <a:r>
-              <a:rPr sz="1300" b="1" i="0">
-                <a:solidFill>
-                  <a:srgbClr val="15803D"/>
-                </a:solidFill>
-                <a:latin typeface="Century Schoolbook"/>
-              </a:rPr>
-              <a:t>0.03%</a:t>
-            </a:r>
-          </a:p>
-        </p:txBody>
-      </p:sp>
-      <p:sp>
-        <p:nvSpPr>
-          <p:cNvPr id="16" name="TextBox 15"/>
-          <p:cNvSpPr txBox="1"/>
-          <p:nvPr/>
-        </p:nvSpPr>
-        <p:spPr>
-          <a:xfrm>
-            <a:off x="4023360" y="1517904"/>
-            <a:ext cx="1188720" cy="128016"/>
-          </a:xfrm>
-          <a:prstGeom prst="rect">
-            <a:avLst/>
-          </a:prstGeom>
-          <a:noFill/>
-        </p:spPr>
-        <p:txBody>
-          <a:bodyPr wrap="square" lIns="0" rIns="0" tIns="0" bIns="0">
-            <a:spAutoFit/>
-          </a:bodyPr>
-          <a:lstStyle/>
-          <a:p>
-            <a:r>
-              <a:rPr sz="800" b="1" i="0">
-                <a:solidFill>
-                  <a:srgbClr val="111827"/>
-                </a:solidFill>
-                <a:latin typeface="Century Schoolbook"/>
-              </a:rPr>
-              <a:t>of award used</a:t>
-            </a:r>
-          </a:p>
-        </p:txBody>
-      </p:sp>
-      <p:sp>
-        <p:nvSpPr>
-          <p:cNvPr id="17" name="TextBox 16"/>
-          <p:cNvSpPr txBox="1"/>
-          <p:nvPr/>
-        </p:nvSpPr>
-        <p:spPr>
-          <a:xfrm>
-            <a:off x="4023360" y="1645920"/>
-            <a:ext cx="1188720" cy="128016"/>
-          </a:xfrm>
-          <a:prstGeom prst="rect">
-            <a:avLst/>
-          </a:prstGeom>
-          <a:noFill/>
-        </p:spPr>
-        <p:txBody>
-          <a:bodyPr wrap="square" lIns="0" rIns="0" tIns="0" bIns="0">
-            <a:spAutoFit/>
-          </a:bodyPr>
-          <a:lstStyle/>
-          <a:p>
-            <a:r>
-              <a:rPr sz="650" b="0" i="0">
-                <a:solidFill>
-                  <a:srgbClr val="6D6C66"/>
-                </a:solidFill>
-                <a:latin typeface="Century Schoolbook"/>
-              </a:rPr>
-              <a:t>$11.11 of $38,133</a:t>
-            </a:r>
-          </a:p>
-        </p:txBody>
-      </p:sp>
-      <p:sp>
-        <p:nvSpPr>
-          <p:cNvPr id="18" name="TextBox 17"/>
-          <p:cNvSpPr txBox="1"/>
-          <p:nvPr/>
-        </p:nvSpPr>
-        <p:spPr>
-          <a:xfrm>
-            <a:off x="320040" y="1883664"/>
-            <a:ext cx="4892040" cy="182880"/>
-          </a:xfrm>
-          <a:prstGeom prst="rect">
-            <a:avLst/>
-          </a:prstGeom>
-          <a:noFill/>
-        </p:spPr>
-        <p:txBody>
-          <a:bodyPr wrap="square" lIns="0" rIns="0" tIns="0" bIns="0">
-            <a:spAutoFit/>
-          </a:bodyPr>
-          <a:lstStyle/>
-          <a:p>
-            <a:r>
-              <a:rPr sz="800" b="0" i="1">
-                <a:solidFill>
-                  <a:srgbClr val="6D6C66"/>
-                </a:solidFill>
-                <a:latin typeface="Century Schoolbook"/>
-              </a:rPr>
-              <a:t>Per-model comparison from the FDA pilot, as shown on the dashboard</a:t>
-            </a:r>
-          </a:p>
-        </p:txBody>
-      </p:sp>
-      <p:pic>
-        <p:nvPicPr>
-          <p:cNvPr id="19" name="Picture 18" descr="crop-models.png"/>
-          <p:cNvPicPr>
-            <a:picLocks noChangeAspect="1"/>
-          </p:cNvPicPr>
-          <p:nvPr/>
-        </p:nvPicPr>
-        <p:blipFill>
-          <a:blip r:embed="rId2"/>
-          <a:stretch>
-            <a:fillRect/>
-          </a:stretch>
-        </p:blipFill>
-        <p:spPr>
-          <a:xfrm>
-            <a:off x="320040" y="2084831"/>
-            <a:ext cx="4892040" cy="1271016"/>
-          </a:xfrm>
-          <a:prstGeom prst="rect">
-            <a:avLst/>
-          </a:prstGeom>
-        </p:spPr>
-      </p:pic>
-      <p:sp>
-        <p:nvSpPr>
-          <p:cNvPr id="20" name="TextBox 19"/>
-          <p:cNvSpPr txBox="1"/>
-          <p:nvPr/>
-        </p:nvSpPr>
-        <p:spPr>
-          <a:xfrm>
-            <a:off x="320040" y="3456432"/>
-            <a:ext cx="4892040" cy="1234440"/>
+            <a:off x="429768" y="1499616"/>
+            <a:ext cx="4489704" cy="749808"/>
           </a:xfrm>
           <a:prstGeom prst="rect">
             <a:avLst/>
@@ -2238,68 +3448,271 @@
           <a:p>
             <a:pPr>
               <a:lnSpc>
-                <a:spcPct val="95000"/>
+                <a:spcPct val="98000"/>
               </a:lnSpc>
             </a:pPr>
             <a:r>
-              <a:rPr sz="800" b="1" i="0">
-                <a:solidFill>
-                  <a:srgbClr val="111827"/>
-                </a:solidFill>
-                <a:latin typeface="Century Schoolbook"/>
-              </a:rPr>
-              <a:t>Scaling from here.</a:t>
-            </a:r>
-            <a:r>
-              <a:rPr sz="800" b="0" i="0">
-                <a:solidFill>
-                  <a:srgbClr val="111827"/>
-                </a:solidFill>
-                <a:latin typeface="Century Schoolbook"/>
-              </a:rPr>
-              <a:t> The proposal budgets ~2.9B tokens for 1,200 devices and 75,000 manuscripts, and the $38,133 assumes all three models over the whole corpus. A single model is $2.8K–$8.6K of that.</a:t>
+              <a:rPr sz="750" b="1" i="0">
+                <a:solidFill>
+                  <a:srgbClr val="B4483D"/>
+                </a:solidFill>
+                <a:latin typeface="Century Schoolbook"/>
+              </a:rPr>
+              <a:t>PLACEHOLDER — Maryam</a:t>
             </a:r>
           </a:p>
           <a:p>
             <a:pPr>
               <a:lnSpc>
-                <a:spcPct val="95000"/>
+                <a:spcPct val="98000"/>
               </a:lnSpc>
               <a:spcBef>
-                <a:spcPts val="400"/>
+                <a:spcPts val="300"/>
               </a:spcBef>
             </a:pPr>
             <a:r>
-              <a:rPr sz="800" b="1" i="0">
+              <a:rPr sz="750" b="0" i="0">
+                <a:solidFill>
+                  <a:srgbClr val="6D6C66"/>
+                </a:solidFill>
+                <a:latin typeface="Century Schoolbook"/>
+              </a:rPr>
+              <a:t>Paste the review prompt here: the system prompt that tells Claude to quote its evidence before committing a value, plus whatever review criteria you want to show the room.</a:t>
+            </a:r>
+          </a:p>
+        </p:txBody>
+      </p:sp>
+      <p:sp>
+        <p:nvSpPr>
+          <p:cNvPr id="9" name="TextBox 8"/>
+          <p:cNvSpPr txBox="1"/>
+          <p:nvPr/>
+        </p:nvSpPr>
+        <p:spPr>
+          <a:xfrm>
+            <a:off x="320040" y="2414016"/>
+            <a:ext cx="4709160" cy="118872"/>
+          </a:xfrm>
+          <a:prstGeom prst="rect">
+            <a:avLst/>
+          </a:prstGeom>
+          <a:noFill/>
+        </p:spPr>
+        <p:txBody>
+          <a:bodyPr wrap="square" lIns="0" rIns="0" tIns="0" bIns="0">
+            <a:spAutoFit/>
+          </a:bodyPr>
+          <a:lstStyle/>
+          <a:p>
+            <a:r>
+              <a:rPr sz="700" b="1" i="0">
+                <a:solidFill>
+                  <a:srgbClr val="6D6C66"/>
+                </a:solidFill>
+                <a:latin typeface="Century Schoolbook"/>
+              </a:rPr>
+              <a:t>2 · WHAT COMES BACK</a:t>
+            </a:r>
+          </a:p>
+        </p:txBody>
+      </p:sp>
+      <p:sp>
+        <p:nvSpPr>
+          <p:cNvPr id="10" name="Rectangle 9"/>
+          <p:cNvSpPr/>
+          <p:nvPr/>
+        </p:nvSpPr>
+        <p:spPr>
+          <a:xfrm>
+            <a:off x="320040" y="2542032"/>
+            <a:ext cx="4709160" cy="640080"/>
+          </a:xfrm>
+          <a:prstGeom prst="rect">
+            <a:avLst/>
+          </a:prstGeom>
+          <a:solidFill>
+            <a:srgbClr val="F6F7F5"/>
+          </a:solidFill>
+          <a:ln w="9525">
+            <a:solidFill>
+              <a:srgbClr val="D9D8D3"/>
+            </a:solidFill>
+          </a:ln>
+          <a:effectLst/>
+        </p:spPr>
+        <p:style>
+          <a:lnRef idx="1">
+            <a:schemeClr val="accent1"/>
+          </a:lnRef>
+          <a:fillRef idx="3">
+            <a:schemeClr val="accent1"/>
+          </a:fillRef>
+          <a:effectRef idx="2">
+            <a:schemeClr val="accent1"/>
+          </a:effectRef>
+          <a:fontRef idx="minor">
+            <a:schemeClr val="lt1"/>
+          </a:fontRef>
+        </p:style>
+        <p:txBody>
+          <a:bodyPr rtlCol="0" anchor="ctr"/>
+          <a:lstStyle/>
+          <a:p>
+            <a:pPr algn="ctr"/>
+          </a:p>
+        </p:txBody>
+      </p:sp>
+      <p:sp>
+        <p:nvSpPr>
+          <p:cNvPr id="11" name="TextBox 10"/>
+          <p:cNvSpPr txBox="1"/>
+          <p:nvPr/>
+        </p:nvSpPr>
+        <p:spPr>
+          <a:xfrm>
+            <a:off x="429768" y="2606040"/>
+            <a:ext cx="4489704" cy="548640"/>
+          </a:xfrm>
+          <a:prstGeom prst="rect">
+            <a:avLst/>
+          </a:prstGeom>
+          <a:noFill/>
+        </p:spPr>
+        <p:txBody>
+          <a:bodyPr wrap="square" lIns="0" rIns="0" tIns="0" bIns="0">
+            <a:spAutoFit/>
+          </a:bodyPr>
+          <a:lstStyle/>
+          <a:p>
+            <a:pPr>
+              <a:lnSpc>
+                <a:spcPct val="98000"/>
+              </a:lnSpc>
+            </a:pPr>
+            <a:r>
+              <a:rPr sz="700" b="1" i="0">
+                <a:solidFill>
+                  <a:srgbClr val="111827"/>
+                </a:solidFill>
+                <a:latin typeface="Century Schoolbook"/>
+              </a:rPr>
+              <a:t>DEN140025 · BrainScope Ahead 100 · 6-page De Novo summary</a:t>
+            </a:r>
+          </a:p>
+          <a:p>
+            <a:pPr>
+              <a:lnSpc>
+                <a:spcPct val="98000"/>
+              </a:lnSpc>
+              <a:spcBef>
+                <a:spcPts val="200"/>
+              </a:spcBef>
+            </a:pPr>
+            <a:r>
+              <a:rPr sz="680" b="0" i="0">
+                <a:solidFill>
+                  <a:srgbClr val="6D6C66"/>
+                </a:solidFill>
+                <a:latin typeface="Century Schoolbook"/>
+              </a:rPr>
+              <a:t>device_name  </a:t>
+            </a:r>
+            <a:r>
+              <a:rPr sz="680" b="0" i="0">
+                <a:solidFill>
+                  <a:srgbClr val="111827"/>
+                </a:solidFill>
+                <a:latin typeface="Century Schoolbook"/>
+              </a:rPr>
+              <a:t>“BrainScope Ahead 100 (Ahead® M-100 and CV-100)”</a:t>
+            </a:r>
+            <a:r>
+              <a:rPr sz="680" b="0" i="0">
+                <a:solidFill>
+                  <a:srgbClr val="6D6C66"/>
+                </a:solidFill>
+                <a:latin typeface="Century Schoolbook"/>
+              </a:rPr>
+              <a:t>  p.1</a:t>
+            </a:r>
+          </a:p>
+          <a:p>
+            <a:pPr>
+              <a:lnSpc>
+                <a:spcPct val="98000"/>
+              </a:lnSpc>
+              <a:spcBef>
+                <a:spcPts val="200"/>
+              </a:spcBef>
+            </a:pPr>
+            <a:r>
+              <a:rPr sz="680" b="0" i="0">
+                <a:solidFill>
+                  <a:srgbClr val="6D6C66"/>
+                </a:solidFill>
+                <a:latin typeface="Century Schoolbook"/>
+              </a:rPr>
+              <a:t>age_range    </a:t>
+            </a:r>
+            <a:r>
+              <a:rPr sz="680" b="0" i="0">
+                <a:solidFill>
+                  <a:srgbClr val="111827"/>
+                </a:solidFill>
+                <a:latin typeface="Century Schoolbook"/>
+              </a:rPr>
+              <a:t>“18–80 years”</a:t>
+            </a:r>
+            <a:r>
+              <a:rPr sz="680" b="0" i="0">
+                <a:solidFill>
+                  <a:srgbClr val="6D6C66"/>
+                </a:solidFill>
+                <a:latin typeface="Century Schoolbook"/>
+              </a:rPr>
+              <a:t>  ← quoted from “…are between the ages of 18-80 years.”  p.1</a:t>
+            </a:r>
+          </a:p>
+          <a:p>
+            <a:pPr>
+              <a:lnSpc>
+                <a:spcPct val="98000"/>
+              </a:lnSpc>
+              <a:spcBef>
+                <a:spcPts val="200"/>
+              </a:spcBef>
+            </a:pPr>
+            <a:r>
+              <a:rPr sz="680" b="0" i="0">
+                <a:solidFill>
+                  <a:srgbClr val="6D6C66"/>
+                </a:solidFill>
+                <a:latin typeface="Century Schoolbook"/>
+              </a:rPr>
+              <a:t>sex · race · ethnicity  </a:t>
+            </a:r>
+            <a:r>
+              <a:rPr sz="680" b="1" i="0">
                 <a:solidFill>
                   <a:srgbClr val="B4483D"/>
                 </a:solidFill>
                 <a:latin typeface="Century Schoolbook"/>
               </a:rPr>
-              <a:t>One correction before this is presented.</a:t>
-            </a:r>
-            <a:r>
-              <a:rPr sz="800" b="0" i="0">
-                <a:solidFill>
-                  <a:srgbClr val="B4483D"/>
-                </a:solidFill>
-                <a:latin typeface="Century Schoolbook"/>
-              </a:rPr>
-              <a:t> The dashboard still prices Opus 4.7 at $15/$75 per 1M — the current rate is $5/$25, so the projections above read ~3× high. The proposal’s own budget uses the correct rate; only the dashboard display is stale.</a:t>
-            </a:r>
-          </a:p>
-        </p:txBody>
-      </p:sp>
-      <p:sp>
-        <p:nvSpPr>
-          <p:cNvPr id="21" name="Rectangle 20"/>
+              <a:t>not reported anywhere in the document</a:t>
+            </a:r>
+          </a:p>
+        </p:txBody>
+      </p:sp>
+      <p:sp>
+        <p:nvSpPr>
+          <p:cNvPr id="12" name="Rectangle 11"/>
           <p:cNvSpPr/>
           <p:nvPr/>
         </p:nvSpPr>
         <p:spPr>
           <a:xfrm>
-            <a:off x="5394960" y="1261872"/>
-            <a:ext cx="11430" cy="3429000"/>
+            <a:off x="5138928" y="1280160"/>
+            <a:ext cx="11430" cy="1901952"/>
           </a:xfrm>
           <a:prstGeom prst="rect">
             <a:avLst/>
@@ -2336,14 +3749,14 @@
       </p:sp>
       <p:sp>
         <p:nvSpPr>
-          <p:cNvPr id="22" name="TextBox 21"/>
-          <p:cNvSpPr txBox="1"/>
-          <p:nvPr/>
-        </p:nvSpPr>
-        <p:spPr>
-          <a:xfrm>
-            <a:off x="5532120" y="914400"/>
-            <a:ext cx="3291840" cy="237744"/>
+          <p:cNvPr id="13" name="TextBox 12"/>
+          <p:cNvSpPr txBox="1"/>
+          <p:nvPr/>
+        </p:nvSpPr>
+        <p:spPr>
+          <a:xfrm>
+            <a:off x="5303520" y="914400"/>
+            <a:ext cx="3520440" cy="237744"/>
           </a:xfrm>
           <a:prstGeom prst="rect">
             <a:avLst/>
@@ -2363,21 +3776,21 @@
                 </a:solidFill>
                 <a:latin typeface="Century Schoolbook"/>
               </a:rPr>
-              <a:t>Where feedback would help most</a:t>
-            </a:r>
-          </a:p>
-        </p:txBody>
-      </p:sp>
-      <p:sp>
-        <p:nvSpPr>
-          <p:cNvPr id="23" name="Rectangle 22"/>
+              <a:t>What a concept costs to extract</a:t>
+            </a:r>
+          </a:p>
+        </p:txBody>
+      </p:sp>
+      <p:sp>
+        <p:nvSpPr>
+          <p:cNvPr id="14" name="Rectangle 13"/>
           <p:cNvSpPr/>
           <p:nvPr/>
         </p:nvSpPr>
         <p:spPr>
           <a:xfrm>
-            <a:off x="5532120" y="1207008"/>
-            <a:ext cx="3291840" cy="11430"/>
+            <a:off x="5303520" y="1207008"/>
+            <a:ext cx="3520440" cy="11430"/>
           </a:xfrm>
           <a:prstGeom prst="rect">
             <a:avLst/>
@@ -2414,14 +3827,337 @@
       </p:sp>
       <p:sp>
         <p:nvSpPr>
+          <p:cNvPr id="15" name="TextBox 14"/>
+          <p:cNvSpPr txBox="1"/>
+          <p:nvPr/>
+        </p:nvSpPr>
+        <p:spPr>
+          <a:xfrm>
+            <a:off x="5303520" y="1298448"/>
+            <a:ext cx="1737360" cy="118872"/>
+          </a:xfrm>
+          <a:prstGeom prst="rect">
+            <a:avLst/>
+          </a:prstGeom>
+          <a:noFill/>
+        </p:spPr>
+        <p:txBody>
+          <a:bodyPr wrap="square" lIns="0" rIns="0" tIns="0" bIns="0">
+            <a:spAutoFit/>
+          </a:bodyPr>
+          <a:lstStyle/>
+          <a:p>
+            <a:pPr algn="l"/>
+            <a:r>
+              <a:rPr sz="600" b="1" i="0">
+                <a:solidFill>
+                  <a:srgbClr val="6D6C66"/>
+                </a:solidFill>
+                <a:latin typeface="Century Schoolbook"/>
+              </a:rPr>
+              <a:t>CONCEPT GROUP</a:t>
+            </a:r>
+          </a:p>
+        </p:txBody>
+      </p:sp>
+      <p:sp>
+        <p:nvSpPr>
+          <p:cNvPr id="16" name="TextBox 15"/>
+          <p:cNvSpPr txBox="1"/>
+          <p:nvPr/>
+        </p:nvSpPr>
+        <p:spPr>
+          <a:xfrm>
+            <a:off x="7059168" y="1298448"/>
+            <a:ext cx="548640" cy="118872"/>
+          </a:xfrm>
+          <a:prstGeom prst="rect">
+            <a:avLst/>
+          </a:prstGeom>
+          <a:noFill/>
+        </p:spPr>
+        <p:txBody>
+          <a:bodyPr wrap="square" lIns="0" rIns="0" tIns="0" bIns="0">
+            <a:spAutoFit/>
+          </a:bodyPr>
+          <a:lstStyle/>
+          <a:p>
+            <a:pPr algn="r"/>
+            <a:r>
+              <a:rPr sz="600" b="1" i="0">
+                <a:solidFill>
+                  <a:srgbClr val="6D6C66"/>
+                </a:solidFill>
+                <a:latin typeface="Century Schoolbook"/>
+              </a:rPr>
+              <a:t>HAIKU</a:t>
+            </a:r>
+          </a:p>
+        </p:txBody>
+      </p:sp>
+      <p:sp>
+        <p:nvSpPr>
+          <p:cNvPr id="17" name="TextBox 16"/>
+          <p:cNvSpPr txBox="1"/>
+          <p:nvPr/>
+        </p:nvSpPr>
+        <p:spPr>
+          <a:xfrm>
+            <a:off x="7644383" y="1298448"/>
+            <a:ext cx="548640" cy="118872"/>
+          </a:xfrm>
+          <a:prstGeom prst="rect">
+            <a:avLst/>
+          </a:prstGeom>
+          <a:noFill/>
+        </p:spPr>
+        <p:txBody>
+          <a:bodyPr wrap="square" lIns="0" rIns="0" tIns="0" bIns="0">
+            <a:spAutoFit/>
+          </a:bodyPr>
+          <a:lstStyle/>
+          <a:p>
+            <a:pPr algn="r"/>
+            <a:r>
+              <a:rPr sz="600" b="1" i="0">
+                <a:solidFill>
+                  <a:srgbClr val="6D6C66"/>
+                </a:solidFill>
+                <a:latin typeface="Century Schoolbook"/>
+              </a:rPr>
+              <a:t>SONNET</a:t>
+            </a:r>
+          </a:p>
+        </p:txBody>
+      </p:sp>
+      <p:sp>
+        <p:nvSpPr>
+          <p:cNvPr id="18" name="TextBox 17"/>
+          <p:cNvSpPr txBox="1"/>
+          <p:nvPr/>
+        </p:nvSpPr>
+        <p:spPr>
+          <a:xfrm>
+            <a:off x="8247888" y="1298448"/>
+            <a:ext cx="576072" cy="118872"/>
+          </a:xfrm>
+          <a:prstGeom prst="rect">
+            <a:avLst/>
+          </a:prstGeom>
+          <a:noFill/>
+        </p:spPr>
+        <p:txBody>
+          <a:bodyPr wrap="square" lIns="0" rIns="0" tIns="0" bIns="0">
+            <a:spAutoFit/>
+          </a:bodyPr>
+          <a:lstStyle/>
+          <a:p>
+            <a:pPr algn="r"/>
+            <a:r>
+              <a:rPr sz="600" b="1" i="0">
+                <a:solidFill>
+                  <a:srgbClr val="6D6C66"/>
+                </a:solidFill>
+                <a:latin typeface="Century Schoolbook"/>
+              </a:rPr>
+              <a:t>OPUS</a:t>
+            </a:r>
+          </a:p>
+        </p:txBody>
+      </p:sp>
+      <p:sp>
+        <p:nvSpPr>
+          <p:cNvPr id="19" name="Rectangle 18"/>
+          <p:cNvSpPr/>
+          <p:nvPr/>
+        </p:nvSpPr>
+        <p:spPr>
+          <a:xfrm>
+            <a:off x="5303520" y="1435608"/>
+            <a:ext cx="3520440" cy="11430"/>
+          </a:xfrm>
+          <a:prstGeom prst="rect">
+            <a:avLst/>
+          </a:prstGeom>
+          <a:solidFill>
+            <a:srgbClr val="D9D8D3"/>
+          </a:solidFill>
+          <a:ln>
+            <a:noFill/>
+          </a:ln>
+          <a:effectLst/>
+        </p:spPr>
+        <p:style>
+          <a:lnRef idx="1">
+            <a:schemeClr val="accent1"/>
+          </a:lnRef>
+          <a:fillRef idx="3">
+            <a:schemeClr val="accent1"/>
+          </a:fillRef>
+          <a:effectRef idx="2">
+            <a:schemeClr val="accent1"/>
+          </a:effectRef>
+          <a:fontRef idx="minor">
+            <a:schemeClr val="lt1"/>
+          </a:fontRef>
+        </p:style>
+        <p:txBody>
+          <a:bodyPr rtlCol="0" anchor="ctr"/>
+          <a:lstStyle/>
+          <a:p>
+            <a:pPr algn="ctr"/>
+          </a:p>
+        </p:txBody>
+      </p:sp>
+      <p:sp>
+        <p:nvSpPr>
+          <p:cNvPr id="20" name="TextBox 19"/>
+          <p:cNvSpPr txBox="1"/>
+          <p:nvPr/>
+        </p:nvSpPr>
+        <p:spPr>
+          <a:xfrm>
+            <a:off x="5303520" y="1490472"/>
+            <a:ext cx="1737360" cy="118872"/>
+          </a:xfrm>
+          <a:prstGeom prst="rect">
+            <a:avLst/>
+          </a:prstGeom>
+          <a:noFill/>
+        </p:spPr>
+        <p:txBody>
+          <a:bodyPr wrap="square" lIns="0" rIns="0" tIns="0" bIns="0">
+            <a:spAutoFit/>
+          </a:bodyPr>
+          <a:lstStyle/>
+          <a:p>
+            <a:r>
+              <a:rPr sz="680" b="0" i="0">
+                <a:solidFill>
+                  <a:srgbClr val="111827"/>
+                </a:solidFill>
+                <a:latin typeface="Century Schoolbook"/>
+              </a:rPr>
+              <a:t>Current FDA schema — 20 fields</a:t>
+            </a:r>
+          </a:p>
+        </p:txBody>
+      </p:sp>
+      <p:sp>
+        <p:nvSpPr>
+          <p:cNvPr id="21" name="TextBox 20"/>
+          <p:cNvSpPr txBox="1"/>
+          <p:nvPr/>
+        </p:nvSpPr>
+        <p:spPr>
+          <a:xfrm>
+            <a:off x="7059168" y="1490472"/>
+            <a:ext cx="548640" cy="118872"/>
+          </a:xfrm>
+          <a:prstGeom prst="rect">
+            <a:avLst/>
+          </a:prstGeom>
+          <a:noFill/>
+        </p:spPr>
+        <p:txBody>
+          <a:bodyPr wrap="square" lIns="0" rIns="0" tIns="0" bIns="0">
+            <a:spAutoFit/>
+          </a:bodyPr>
+          <a:lstStyle/>
+          <a:p>
+            <a:pPr algn="r"/>
+            <a:r>
+              <a:rPr sz="680" b="1" i="0">
+                <a:solidFill>
+                  <a:srgbClr val="111827"/>
+                </a:solidFill>
+                <a:latin typeface="Century Schoolbook"/>
+              </a:rPr>
+              <a:t>$23.95</a:t>
+            </a:r>
+          </a:p>
+        </p:txBody>
+      </p:sp>
+      <p:sp>
+        <p:nvSpPr>
+          <p:cNvPr id="22" name="TextBox 21"/>
+          <p:cNvSpPr txBox="1"/>
+          <p:nvPr/>
+        </p:nvSpPr>
+        <p:spPr>
+          <a:xfrm>
+            <a:off x="7644383" y="1490472"/>
+            <a:ext cx="548640" cy="118872"/>
+          </a:xfrm>
+          <a:prstGeom prst="rect">
+            <a:avLst/>
+          </a:prstGeom>
+          <a:noFill/>
+        </p:spPr>
+        <p:txBody>
+          <a:bodyPr wrap="square" lIns="0" rIns="0" tIns="0" bIns="0">
+            <a:spAutoFit/>
+          </a:bodyPr>
+          <a:lstStyle/>
+          <a:p>
+            <a:pPr algn="r"/>
+            <a:r>
+              <a:rPr sz="680" b="1" i="0">
+                <a:solidFill>
+                  <a:srgbClr val="111827"/>
+                </a:solidFill>
+                <a:latin typeface="Century Schoolbook"/>
+              </a:rPr>
+              <a:t>$62.99</a:t>
+            </a:r>
+          </a:p>
+        </p:txBody>
+      </p:sp>
+      <p:sp>
+        <p:nvSpPr>
+          <p:cNvPr id="23" name="TextBox 22"/>
+          <p:cNvSpPr txBox="1"/>
+          <p:nvPr/>
+        </p:nvSpPr>
+        <p:spPr>
+          <a:xfrm>
+            <a:off x="8247888" y="1490472"/>
+            <a:ext cx="576072" cy="118872"/>
+          </a:xfrm>
+          <a:prstGeom prst="rect">
+            <a:avLst/>
+          </a:prstGeom>
+          <a:noFill/>
+        </p:spPr>
+        <p:txBody>
+          <a:bodyPr wrap="square" lIns="0" rIns="0" tIns="0" bIns="0">
+            <a:spAutoFit/>
+          </a:bodyPr>
+          <a:lstStyle/>
+          <a:p>
+            <a:pPr algn="r"/>
+            <a:r>
+              <a:rPr sz="680" b="1" i="0">
+                <a:solidFill>
+                  <a:srgbClr val="111827"/>
+                </a:solidFill>
+                <a:latin typeface="Century Schoolbook"/>
+              </a:rPr>
+              <a:t>$141.70</a:t>
+            </a:r>
+          </a:p>
+        </p:txBody>
+      </p:sp>
+      <p:sp>
+        <p:nvSpPr>
           <p:cNvPr id="24" name="TextBox 23"/>
           <p:cNvSpPr txBox="1"/>
           <p:nvPr/>
         </p:nvSpPr>
         <p:spPr>
           <a:xfrm>
-            <a:off x="5532120" y="1316736"/>
-            <a:ext cx="164592" cy="128016"/>
+            <a:off x="5303520" y="1641348"/>
+            <a:ext cx="1737360" cy="118872"/>
           </a:xfrm>
           <a:prstGeom prst="rect">
             <a:avLst/>
@@ -2435,12 +4171,704 @@
           <a:lstStyle/>
           <a:p>
             <a:r>
-              <a:rPr sz="850" b="1" i="0">
+              <a:rPr sz="680" b="0" i="1">
                 <a:solidFill>
                   <a:srgbClr val="B4483D"/>
                 </a:solidFill>
                 <a:latin typeface="Century Schoolbook"/>
               </a:rPr>
+              <a:t>[ Maryam — concept group ]</a:t>
+            </a:r>
+          </a:p>
+        </p:txBody>
+      </p:sp>
+      <p:sp>
+        <p:nvSpPr>
+          <p:cNvPr id="25" name="TextBox 24"/>
+          <p:cNvSpPr txBox="1"/>
+          <p:nvPr/>
+        </p:nvSpPr>
+        <p:spPr>
+          <a:xfrm>
+            <a:off x="7059168" y="1641348"/>
+            <a:ext cx="548640" cy="118872"/>
+          </a:xfrm>
+          <a:prstGeom prst="rect">
+            <a:avLst/>
+          </a:prstGeom>
+          <a:noFill/>
+        </p:spPr>
+        <p:txBody>
+          <a:bodyPr wrap="square" lIns="0" rIns="0" tIns="0" bIns="0">
+            <a:spAutoFit/>
+          </a:bodyPr>
+          <a:lstStyle/>
+          <a:p>
+            <a:pPr algn="r"/>
+            <a:r>
+              <a:rPr sz="680" b="0" i="0">
+                <a:solidFill>
+                  <a:srgbClr val="D9D8D3"/>
+                </a:solidFill>
+                <a:latin typeface="Century Schoolbook"/>
+              </a:rPr>
+              <a:t>—</a:t>
+            </a:r>
+          </a:p>
+        </p:txBody>
+      </p:sp>
+      <p:sp>
+        <p:nvSpPr>
+          <p:cNvPr id="26" name="TextBox 25"/>
+          <p:cNvSpPr txBox="1"/>
+          <p:nvPr/>
+        </p:nvSpPr>
+        <p:spPr>
+          <a:xfrm>
+            <a:off x="7644383" y="1641348"/>
+            <a:ext cx="548640" cy="118872"/>
+          </a:xfrm>
+          <a:prstGeom prst="rect">
+            <a:avLst/>
+          </a:prstGeom>
+          <a:noFill/>
+        </p:spPr>
+        <p:txBody>
+          <a:bodyPr wrap="square" lIns="0" rIns="0" tIns="0" bIns="0">
+            <a:spAutoFit/>
+          </a:bodyPr>
+          <a:lstStyle/>
+          <a:p>
+            <a:pPr algn="r"/>
+            <a:r>
+              <a:rPr sz="680" b="0" i="0">
+                <a:solidFill>
+                  <a:srgbClr val="D9D8D3"/>
+                </a:solidFill>
+                <a:latin typeface="Century Schoolbook"/>
+              </a:rPr>
+              <a:t>—</a:t>
+            </a:r>
+          </a:p>
+        </p:txBody>
+      </p:sp>
+      <p:sp>
+        <p:nvSpPr>
+          <p:cNvPr id="27" name="TextBox 26"/>
+          <p:cNvSpPr txBox="1"/>
+          <p:nvPr/>
+        </p:nvSpPr>
+        <p:spPr>
+          <a:xfrm>
+            <a:off x="8247888" y="1641348"/>
+            <a:ext cx="576072" cy="118872"/>
+          </a:xfrm>
+          <a:prstGeom prst="rect">
+            <a:avLst/>
+          </a:prstGeom>
+          <a:noFill/>
+        </p:spPr>
+        <p:txBody>
+          <a:bodyPr wrap="square" lIns="0" rIns="0" tIns="0" bIns="0">
+            <a:spAutoFit/>
+          </a:bodyPr>
+          <a:lstStyle/>
+          <a:p>
+            <a:pPr algn="r"/>
+            <a:r>
+              <a:rPr sz="680" b="0" i="0">
+                <a:solidFill>
+                  <a:srgbClr val="D9D8D3"/>
+                </a:solidFill>
+                <a:latin typeface="Century Schoolbook"/>
+              </a:rPr>
+              <a:t>—</a:t>
+            </a:r>
+          </a:p>
+        </p:txBody>
+      </p:sp>
+      <p:sp>
+        <p:nvSpPr>
+          <p:cNvPr id="28" name="TextBox 27"/>
+          <p:cNvSpPr txBox="1"/>
+          <p:nvPr/>
+        </p:nvSpPr>
+        <p:spPr>
+          <a:xfrm>
+            <a:off x="5303520" y="1792224"/>
+            <a:ext cx="1737360" cy="118872"/>
+          </a:xfrm>
+          <a:prstGeom prst="rect">
+            <a:avLst/>
+          </a:prstGeom>
+          <a:noFill/>
+        </p:spPr>
+        <p:txBody>
+          <a:bodyPr wrap="square" lIns="0" rIns="0" tIns="0" bIns="0">
+            <a:spAutoFit/>
+          </a:bodyPr>
+          <a:lstStyle/>
+          <a:p>
+            <a:r>
+              <a:rPr sz="680" b="0" i="1">
+                <a:solidFill>
+                  <a:srgbClr val="B4483D"/>
+                </a:solidFill>
+                <a:latin typeface="Century Schoolbook"/>
+              </a:rPr>
+              <a:t>[ Maryam — concept group ]</a:t>
+            </a:r>
+          </a:p>
+        </p:txBody>
+      </p:sp>
+      <p:sp>
+        <p:nvSpPr>
+          <p:cNvPr id="29" name="TextBox 28"/>
+          <p:cNvSpPr txBox="1"/>
+          <p:nvPr/>
+        </p:nvSpPr>
+        <p:spPr>
+          <a:xfrm>
+            <a:off x="7059168" y="1792224"/>
+            <a:ext cx="548640" cy="118872"/>
+          </a:xfrm>
+          <a:prstGeom prst="rect">
+            <a:avLst/>
+          </a:prstGeom>
+          <a:noFill/>
+        </p:spPr>
+        <p:txBody>
+          <a:bodyPr wrap="square" lIns="0" rIns="0" tIns="0" bIns="0">
+            <a:spAutoFit/>
+          </a:bodyPr>
+          <a:lstStyle/>
+          <a:p>
+            <a:pPr algn="r"/>
+            <a:r>
+              <a:rPr sz="680" b="0" i="0">
+                <a:solidFill>
+                  <a:srgbClr val="D9D8D3"/>
+                </a:solidFill>
+                <a:latin typeface="Century Schoolbook"/>
+              </a:rPr>
+              <a:t>—</a:t>
+            </a:r>
+          </a:p>
+        </p:txBody>
+      </p:sp>
+      <p:sp>
+        <p:nvSpPr>
+          <p:cNvPr id="30" name="TextBox 29"/>
+          <p:cNvSpPr txBox="1"/>
+          <p:nvPr/>
+        </p:nvSpPr>
+        <p:spPr>
+          <a:xfrm>
+            <a:off x="7644383" y="1792224"/>
+            <a:ext cx="548640" cy="118872"/>
+          </a:xfrm>
+          <a:prstGeom prst="rect">
+            <a:avLst/>
+          </a:prstGeom>
+          <a:noFill/>
+        </p:spPr>
+        <p:txBody>
+          <a:bodyPr wrap="square" lIns="0" rIns="0" tIns="0" bIns="0">
+            <a:spAutoFit/>
+          </a:bodyPr>
+          <a:lstStyle/>
+          <a:p>
+            <a:pPr algn="r"/>
+            <a:r>
+              <a:rPr sz="680" b="0" i="0">
+                <a:solidFill>
+                  <a:srgbClr val="D9D8D3"/>
+                </a:solidFill>
+                <a:latin typeface="Century Schoolbook"/>
+              </a:rPr>
+              <a:t>—</a:t>
+            </a:r>
+          </a:p>
+        </p:txBody>
+      </p:sp>
+      <p:sp>
+        <p:nvSpPr>
+          <p:cNvPr id="31" name="TextBox 30"/>
+          <p:cNvSpPr txBox="1"/>
+          <p:nvPr/>
+        </p:nvSpPr>
+        <p:spPr>
+          <a:xfrm>
+            <a:off x="8247888" y="1792224"/>
+            <a:ext cx="576072" cy="118872"/>
+          </a:xfrm>
+          <a:prstGeom prst="rect">
+            <a:avLst/>
+          </a:prstGeom>
+          <a:noFill/>
+        </p:spPr>
+        <p:txBody>
+          <a:bodyPr wrap="square" lIns="0" rIns="0" tIns="0" bIns="0">
+            <a:spAutoFit/>
+          </a:bodyPr>
+          <a:lstStyle/>
+          <a:p>
+            <a:pPr algn="r"/>
+            <a:r>
+              <a:rPr sz="680" b="0" i="0">
+                <a:solidFill>
+                  <a:srgbClr val="D9D8D3"/>
+                </a:solidFill>
+                <a:latin typeface="Century Schoolbook"/>
+              </a:rPr>
+              <a:t>—</a:t>
+            </a:r>
+          </a:p>
+        </p:txBody>
+      </p:sp>
+      <p:sp>
+        <p:nvSpPr>
+          <p:cNvPr id="32" name="TextBox 31"/>
+          <p:cNvSpPr txBox="1"/>
+          <p:nvPr/>
+        </p:nvSpPr>
+        <p:spPr>
+          <a:xfrm>
+            <a:off x="5303520" y="1943100"/>
+            <a:ext cx="1737360" cy="118872"/>
+          </a:xfrm>
+          <a:prstGeom prst="rect">
+            <a:avLst/>
+          </a:prstGeom>
+          <a:noFill/>
+        </p:spPr>
+        <p:txBody>
+          <a:bodyPr wrap="square" lIns="0" rIns="0" tIns="0" bIns="0">
+            <a:spAutoFit/>
+          </a:bodyPr>
+          <a:lstStyle/>
+          <a:p>
+            <a:r>
+              <a:rPr sz="680" b="0" i="1">
+                <a:solidFill>
+                  <a:srgbClr val="B4483D"/>
+                </a:solidFill>
+                <a:latin typeface="Century Schoolbook"/>
+              </a:rPr>
+              <a:t>[ Maryam — concept group ]</a:t>
+            </a:r>
+          </a:p>
+        </p:txBody>
+      </p:sp>
+      <p:sp>
+        <p:nvSpPr>
+          <p:cNvPr id="33" name="TextBox 32"/>
+          <p:cNvSpPr txBox="1"/>
+          <p:nvPr/>
+        </p:nvSpPr>
+        <p:spPr>
+          <a:xfrm>
+            <a:off x="7059168" y="1943100"/>
+            <a:ext cx="548640" cy="118872"/>
+          </a:xfrm>
+          <a:prstGeom prst="rect">
+            <a:avLst/>
+          </a:prstGeom>
+          <a:noFill/>
+        </p:spPr>
+        <p:txBody>
+          <a:bodyPr wrap="square" lIns="0" rIns="0" tIns="0" bIns="0">
+            <a:spAutoFit/>
+          </a:bodyPr>
+          <a:lstStyle/>
+          <a:p>
+            <a:pPr algn="r"/>
+            <a:r>
+              <a:rPr sz="680" b="0" i="0">
+                <a:solidFill>
+                  <a:srgbClr val="D9D8D3"/>
+                </a:solidFill>
+                <a:latin typeface="Century Schoolbook"/>
+              </a:rPr>
+              <a:t>—</a:t>
+            </a:r>
+          </a:p>
+        </p:txBody>
+      </p:sp>
+      <p:sp>
+        <p:nvSpPr>
+          <p:cNvPr id="34" name="TextBox 33"/>
+          <p:cNvSpPr txBox="1"/>
+          <p:nvPr/>
+        </p:nvSpPr>
+        <p:spPr>
+          <a:xfrm>
+            <a:off x="7644383" y="1943100"/>
+            <a:ext cx="548640" cy="118872"/>
+          </a:xfrm>
+          <a:prstGeom prst="rect">
+            <a:avLst/>
+          </a:prstGeom>
+          <a:noFill/>
+        </p:spPr>
+        <p:txBody>
+          <a:bodyPr wrap="square" lIns="0" rIns="0" tIns="0" bIns="0">
+            <a:spAutoFit/>
+          </a:bodyPr>
+          <a:lstStyle/>
+          <a:p>
+            <a:pPr algn="r"/>
+            <a:r>
+              <a:rPr sz="680" b="0" i="0">
+                <a:solidFill>
+                  <a:srgbClr val="D9D8D3"/>
+                </a:solidFill>
+                <a:latin typeface="Century Schoolbook"/>
+              </a:rPr>
+              <a:t>—</a:t>
+            </a:r>
+          </a:p>
+        </p:txBody>
+      </p:sp>
+      <p:sp>
+        <p:nvSpPr>
+          <p:cNvPr id="35" name="TextBox 34"/>
+          <p:cNvSpPr txBox="1"/>
+          <p:nvPr/>
+        </p:nvSpPr>
+        <p:spPr>
+          <a:xfrm>
+            <a:off x="8247888" y="1943100"/>
+            <a:ext cx="576072" cy="118872"/>
+          </a:xfrm>
+          <a:prstGeom prst="rect">
+            <a:avLst/>
+          </a:prstGeom>
+          <a:noFill/>
+        </p:spPr>
+        <p:txBody>
+          <a:bodyPr wrap="square" lIns="0" rIns="0" tIns="0" bIns="0">
+            <a:spAutoFit/>
+          </a:bodyPr>
+          <a:lstStyle/>
+          <a:p>
+            <a:pPr algn="r"/>
+            <a:r>
+              <a:rPr sz="680" b="0" i="0">
+                <a:solidFill>
+                  <a:srgbClr val="D9D8D3"/>
+                </a:solidFill>
+                <a:latin typeface="Century Schoolbook"/>
+              </a:rPr>
+              <a:t>—</a:t>
+            </a:r>
+          </a:p>
+        </p:txBody>
+      </p:sp>
+      <p:sp>
+        <p:nvSpPr>
+          <p:cNvPr id="36" name="Rectangle 35"/>
+          <p:cNvSpPr/>
+          <p:nvPr/>
+        </p:nvSpPr>
+        <p:spPr>
+          <a:xfrm>
+            <a:off x="5303520" y="2112264"/>
+            <a:ext cx="3520440" cy="11430"/>
+          </a:xfrm>
+          <a:prstGeom prst="rect">
+            <a:avLst/>
+          </a:prstGeom>
+          <a:solidFill>
+            <a:srgbClr val="D9D8D3"/>
+          </a:solidFill>
+          <a:ln>
+            <a:noFill/>
+          </a:ln>
+          <a:effectLst/>
+        </p:spPr>
+        <p:style>
+          <a:lnRef idx="1">
+            <a:schemeClr val="accent1"/>
+          </a:lnRef>
+          <a:fillRef idx="3">
+            <a:schemeClr val="accent1"/>
+          </a:fillRef>
+          <a:effectRef idx="2">
+            <a:schemeClr val="accent1"/>
+          </a:effectRef>
+          <a:fontRef idx="minor">
+            <a:schemeClr val="lt1"/>
+          </a:fontRef>
+        </p:style>
+        <p:txBody>
+          <a:bodyPr rtlCol="0" anchor="ctr"/>
+          <a:lstStyle/>
+          <a:p>
+            <a:pPr algn="ctr"/>
+          </a:p>
+        </p:txBody>
+      </p:sp>
+      <p:sp>
+        <p:nvSpPr>
+          <p:cNvPr id="37" name="TextBox 36"/>
+          <p:cNvSpPr txBox="1"/>
+          <p:nvPr/>
+        </p:nvSpPr>
+        <p:spPr>
+          <a:xfrm>
+            <a:off x="5303520" y="2185416"/>
+            <a:ext cx="3520440" cy="274320"/>
+          </a:xfrm>
+          <a:prstGeom prst="rect">
+            <a:avLst/>
+          </a:prstGeom>
+          <a:noFill/>
+        </p:spPr>
+        <p:txBody>
+          <a:bodyPr wrap="square" lIns="0" rIns="0" tIns="0" bIns="0">
+            <a:spAutoFit/>
+          </a:bodyPr>
+          <a:lstStyle/>
+          <a:p>
+            <a:pPr>
+              <a:lnSpc>
+                <a:spcPct val="98000"/>
+              </a:lnSpc>
+            </a:pPr>
+            <a:r>
+              <a:rPr sz="650" b="0" i="0">
+                <a:solidFill>
+                  <a:srgbClr val="6D6C66"/>
+                </a:solidFill>
+                <a:latin typeface="Century Schoolbook"/>
+              </a:rPr>
+              <a:t>Cost per 1,000 documents at current list rates. </a:t>
+            </a:r>
+            <a:r>
+              <a:rPr sz="650" b="1" i="0">
+                <a:solidFill>
+                  <a:srgbClr val="111827"/>
+                </a:solidFill>
+                <a:latin typeface="Century Schoolbook"/>
+              </a:rPr>
+              <a:t>Amortised over the 20 fields the schema returns, that is $0.0012 per field on Haiku and $0.0071 on Opus.</a:t>
+            </a:r>
+          </a:p>
+        </p:txBody>
+      </p:sp>
+      <p:sp>
+        <p:nvSpPr>
+          <p:cNvPr id="38" name="Rectangle 37"/>
+          <p:cNvSpPr/>
+          <p:nvPr/>
+        </p:nvSpPr>
+        <p:spPr>
+          <a:xfrm>
+            <a:off x="5303520" y="2615184"/>
+            <a:ext cx="3520440" cy="566928"/>
+          </a:xfrm>
+          <a:prstGeom prst="rect">
+            <a:avLst/>
+          </a:prstGeom>
+          <a:solidFill>
+            <a:srgbClr val="FAF7F6"/>
+          </a:solidFill>
+          <a:ln w="9525">
+            <a:solidFill>
+              <a:srgbClr val="B4483D"/>
+            </a:solidFill>
+            <a:prstDash val="dash"/>
+          </a:ln>
+          <a:effectLst/>
+        </p:spPr>
+        <p:style>
+          <a:lnRef idx="1">
+            <a:schemeClr val="accent1"/>
+          </a:lnRef>
+          <a:fillRef idx="3">
+            <a:schemeClr val="accent1"/>
+          </a:fillRef>
+          <a:effectRef idx="2">
+            <a:schemeClr val="accent1"/>
+          </a:effectRef>
+          <a:fontRef idx="minor">
+            <a:schemeClr val="lt1"/>
+          </a:fontRef>
+        </p:style>
+        <p:txBody>
+          <a:bodyPr rtlCol="0" anchor="ctr"/>
+          <a:lstStyle/>
+          <a:p>
+            <a:pPr algn="ctr"/>
+          </a:p>
+        </p:txBody>
+      </p:sp>
+      <p:sp>
+        <p:nvSpPr>
+          <p:cNvPr id="39" name="TextBox 38"/>
+          <p:cNvSpPr txBox="1"/>
+          <p:nvPr/>
+        </p:nvSpPr>
+        <p:spPr>
+          <a:xfrm>
+            <a:off x="5413248" y="2706624"/>
+            <a:ext cx="3300984" cy="384048"/>
+          </a:xfrm>
+          <a:prstGeom prst="rect">
+            <a:avLst/>
+          </a:prstGeom>
+          <a:noFill/>
+        </p:spPr>
+        <p:txBody>
+          <a:bodyPr wrap="square" lIns="0" rIns="0" tIns="0" bIns="0">
+            <a:spAutoFit/>
+          </a:bodyPr>
+          <a:lstStyle/>
+          <a:p>
+            <a:pPr>
+              <a:lnSpc>
+                <a:spcPct val="98000"/>
+              </a:lnSpc>
+            </a:pPr>
+            <a:r>
+              <a:rPr sz="750" b="1" i="0">
+                <a:solidFill>
+                  <a:srgbClr val="B4483D"/>
+                </a:solidFill>
+                <a:latin typeface="Century Schoolbook"/>
+              </a:rPr>
+              <a:t>PLACEHOLDER — efficiency</a:t>
+            </a:r>
+          </a:p>
+          <a:p>
+            <a:pPr>
+              <a:lnSpc>
+                <a:spcPct val="98000"/>
+              </a:lnSpc>
+              <a:spcBef>
+                <a:spcPts val="300"/>
+              </a:spcBef>
+            </a:pPr>
+            <a:r>
+              <a:rPr sz="750" b="0" i="0">
+                <a:solidFill>
+                  <a:srgbClr val="6D6C66"/>
+                </a:solidFill>
+                <a:latin typeface="Century Schoolbook"/>
+              </a:rPr>
+              <a:t>Manual review takes ____ per document; the pipeline takes ____. Add the human-hours baseline you want to compare against.</a:t>
+            </a:r>
+          </a:p>
+        </p:txBody>
+      </p:sp>
+      <p:sp>
+        <p:nvSpPr>
+          <p:cNvPr id="40" name="Rectangle 39"/>
+          <p:cNvSpPr/>
+          <p:nvPr/>
+        </p:nvSpPr>
+        <p:spPr>
+          <a:xfrm>
+            <a:off x="320040" y="3291840"/>
+            <a:ext cx="8503920" cy="11430"/>
+          </a:xfrm>
+          <a:prstGeom prst="rect">
+            <a:avLst/>
+          </a:prstGeom>
+          <a:solidFill>
+            <a:srgbClr val="D9D8D3"/>
+          </a:solidFill>
+          <a:ln>
+            <a:noFill/>
+          </a:ln>
+          <a:effectLst/>
+        </p:spPr>
+        <p:style>
+          <a:lnRef idx="1">
+            <a:schemeClr val="accent1"/>
+          </a:lnRef>
+          <a:fillRef idx="3">
+            <a:schemeClr val="accent1"/>
+          </a:fillRef>
+          <a:effectRef idx="2">
+            <a:schemeClr val="accent1"/>
+          </a:effectRef>
+          <a:fontRef idx="minor">
+            <a:schemeClr val="lt1"/>
+          </a:fontRef>
+        </p:style>
+        <p:txBody>
+          <a:bodyPr rtlCol="0" anchor="ctr"/>
+          <a:lstStyle/>
+          <a:p>
+            <a:pPr algn="ctr"/>
+          </a:p>
+        </p:txBody>
+      </p:sp>
+      <p:sp>
+        <p:nvSpPr>
+          <p:cNvPr id="41" name="TextBox 40"/>
+          <p:cNvSpPr txBox="1"/>
+          <p:nvPr/>
+        </p:nvSpPr>
+        <p:spPr>
+          <a:xfrm>
+            <a:off x="320040" y="3364992"/>
+            <a:ext cx="5486400" cy="237744"/>
+          </a:xfrm>
+          <a:prstGeom prst="rect">
+            <a:avLst/>
+          </a:prstGeom>
+          <a:noFill/>
+        </p:spPr>
+        <p:txBody>
+          <a:bodyPr wrap="square" lIns="0" rIns="0" tIns="0" bIns="0">
+            <a:spAutoFit/>
+          </a:bodyPr>
+          <a:lstStyle/>
+          <a:p>
+            <a:r>
+              <a:rPr sz="1100" b="0" i="0">
+                <a:solidFill>
+                  <a:srgbClr val="111827"/>
+                </a:solidFill>
+                <a:latin typeface="Century Schoolbook"/>
+              </a:rPr>
+              <a:t>Where feedback would help most</a:t>
+            </a:r>
+          </a:p>
+        </p:txBody>
+      </p:sp>
+      <p:sp>
+        <p:nvSpPr>
+          <p:cNvPr id="42" name="TextBox 41"/>
+          <p:cNvSpPr txBox="1"/>
+          <p:nvPr/>
+        </p:nvSpPr>
+        <p:spPr>
+          <a:xfrm>
+            <a:off x="320040" y="3657600"/>
+            <a:ext cx="146304" cy="118872"/>
+          </a:xfrm>
+          <a:prstGeom prst="rect">
+            <a:avLst/>
+          </a:prstGeom>
+          <a:noFill/>
+        </p:spPr>
+        <p:txBody>
+          <a:bodyPr wrap="square" lIns="0" rIns="0" tIns="0" bIns="0">
+            <a:spAutoFit/>
+          </a:bodyPr>
+          <a:lstStyle/>
+          <a:p>
+            <a:r>
+              <a:rPr sz="750" b="1" i="0">
+                <a:solidFill>
+                  <a:srgbClr val="B4483D"/>
+                </a:solidFill>
+                <a:latin typeface="Century Schoolbook"/>
+              </a:rPr>
               <a:t>1</a:t>
             </a:r>
           </a:p>
@@ -2448,48 +4876,14 @@
       </p:sp>
       <p:sp>
         <p:nvSpPr>
-          <p:cNvPr id="25" name="TextBox 24"/>
-          <p:cNvSpPr txBox="1"/>
-          <p:nvPr/>
-        </p:nvSpPr>
-        <p:spPr>
-          <a:xfrm>
-            <a:off x="5724144" y="1316736"/>
-            <a:ext cx="3099816" cy="137160"/>
-          </a:xfrm>
-          <a:prstGeom prst="rect">
-            <a:avLst/>
-          </a:prstGeom>
-          <a:noFill/>
-        </p:spPr>
-        <p:txBody>
-          <a:bodyPr wrap="square" lIns="0" rIns="0" tIns="0" bIns="0">
-            <a:spAutoFit/>
-          </a:bodyPr>
-          <a:lstStyle/>
-          <a:p>
-            <a:r>
-              <a:rPr sz="850" b="1" i="0">
-                <a:solidFill>
-                  <a:srgbClr val="111827"/>
-                </a:solidFill>
-                <a:latin typeface="Century Schoolbook"/>
-              </a:rPr>
-              <a:t>All three models, or one?</a:t>
-            </a:r>
-          </a:p>
-        </p:txBody>
-      </p:sp>
-      <p:sp>
-        <p:nvSpPr>
-          <p:cNvPr id="26" name="TextBox 25"/>
-          <p:cNvSpPr txBox="1"/>
-          <p:nvPr/>
-        </p:nvSpPr>
-        <p:spPr>
-          <a:xfrm>
-            <a:off x="5724144" y="1463039"/>
-            <a:ext cx="3099816" cy="566928"/>
+          <p:cNvPr id="43" name="TextBox 42"/>
+          <p:cNvSpPr txBox="1"/>
+          <p:nvPr/>
+        </p:nvSpPr>
+        <p:spPr>
+          <a:xfrm>
+            <a:off x="466344" y="3657600"/>
+            <a:ext cx="1865376" cy="155448"/>
           </a:xfrm>
           <a:prstGeom prst="rect">
             <a:avLst/>
@@ -2508,27 +4902,66 @@
               </a:lnSpc>
             </a:pPr>
             <a:r>
-              <a:rPr sz="700" b="0" i="0">
+              <a:rPr sz="750" b="1" i="0">
+                <a:solidFill>
+                  <a:srgbClr val="111827"/>
+                </a:solidFill>
+                <a:latin typeface="Century Schoolbook"/>
+              </a:rPr>
+              <a:t>All three models, or one?</a:t>
+            </a:r>
+          </a:p>
+        </p:txBody>
+      </p:sp>
+      <p:sp>
+        <p:nvSpPr>
+          <p:cNvPr id="44" name="TextBox 43"/>
+          <p:cNvSpPr txBox="1"/>
+          <p:nvPr/>
+        </p:nvSpPr>
+        <p:spPr>
+          <a:xfrm>
+            <a:off x="466344" y="3840480"/>
+            <a:ext cx="1865376" cy="777240"/>
+          </a:xfrm>
+          <a:prstGeom prst="rect">
+            <a:avLst/>
+          </a:prstGeom>
+          <a:noFill/>
+        </p:spPr>
+        <p:txBody>
+          <a:bodyPr wrap="square" lIns="0" rIns="0" tIns="0" bIns="0">
+            <a:spAutoFit/>
+          </a:bodyPr>
+          <a:lstStyle/>
+          <a:p>
+            <a:pPr>
+              <a:lnSpc>
+                <a:spcPct val="98000"/>
+              </a:lnSpc>
+            </a:pPr>
+            <a:r>
+              <a:rPr sz="650" b="0" i="0">
                 <a:solidFill>
                   <a:srgbClr val="6D6C66"/>
                 </a:solidFill>
                 <a:latin typeface="Century Schoolbook"/>
               </a:rPr>
-              <a:t>We run every document through Haiku, Sonnet and Opus and treat agreement as the reliability signal. That is most of the award. Would one model plus an adversarial verification pass buy more confidence per dollar?</a:t>
-            </a:r>
-          </a:p>
-        </p:txBody>
-      </p:sp>
-      <p:sp>
-        <p:nvSpPr>
-          <p:cNvPr id="27" name="TextBox 26"/>
-          <p:cNvSpPr txBox="1"/>
-          <p:nvPr/>
-        </p:nvSpPr>
-        <p:spPr>
-          <a:xfrm>
-            <a:off x="5532120" y="2231136"/>
-            <a:ext cx="164592" cy="128016"/>
+              <a:t>Agreement across Haiku, Sonnet and Opus is our reliability signal, but it makes every concept 3× more expensive to extract. Would one model plus an adversarial verification pass buy more confidence per dollar?</a:t>
+            </a:r>
+          </a:p>
+        </p:txBody>
+      </p:sp>
+      <p:sp>
+        <p:nvSpPr>
+          <p:cNvPr id="45" name="TextBox 44"/>
+          <p:cNvSpPr txBox="1"/>
+          <p:nvPr/>
+        </p:nvSpPr>
+        <p:spPr>
+          <a:xfrm>
+            <a:off x="2484120" y="3657600"/>
+            <a:ext cx="146304" cy="118872"/>
           </a:xfrm>
           <a:prstGeom prst="rect">
             <a:avLst/>
@@ -2542,7 +4975,7 @@
           <a:lstStyle/>
           <a:p>
             <a:r>
-              <a:rPr sz="850" b="1" i="0">
+              <a:rPr sz="750" b="1" i="0">
                 <a:solidFill>
                   <a:srgbClr val="B4483D"/>
                 </a:solidFill>
@@ -2555,48 +4988,14 @@
       </p:sp>
       <p:sp>
         <p:nvSpPr>
-          <p:cNvPr id="28" name="TextBox 27"/>
-          <p:cNvSpPr txBox="1"/>
-          <p:nvPr/>
-        </p:nvSpPr>
-        <p:spPr>
-          <a:xfrm>
-            <a:off x="5724144" y="2231136"/>
-            <a:ext cx="3099816" cy="137160"/>
-          </a:xfrm>
-          <a:prstGeom prst="rect">
-            <a:avLst/>
-          </a:prstGeom>
-          <a:noFill/>
-        </p:spPr>
-        <p:txBody>
-          <a:bodyPr wrap="square" lIns="0" rIns="0" tIns="0" bIns="0">
-            <a:spAutoFit/>
-          </a:bodyPr>
-          <a:lstStyle/>
-          <a:p>
-            <a:r>
-              <a:rPr sz="850" b="1" i="0">
-                <a:solidFill>
-                  <a:srgbClr val="111827"/>
-                </a:solidFill>
-                <a:latin typeface="Century Schoolbook"/>
-              </a:rPr>
-              <a:t>Prompt caching may not reach us.</a:t>
-            </a:r>
-          </a:p>
-        </p:txBody>
-      </p:sp>
-      <p:sp>
-        <p:nvSpPr>
-          <p:cNvPr id="29" name="TextBox 28"/>
-          <p:cNvSpPr txBox="1"/>
-          <p:nvPr/>
-        </p:nvSpPr>
-        <p:spPr>
-          <a:xfrm>
-            <a:off x="5724144" y="2377440"/>
-            <a:ext cx="3099816" cy="566928"/>
+          <p:cNvPr id="46" name="TextBox 45"/>
+          <p:cNvSpPr txBox="1"/>
+          <p:nvPr/>
+        </p:nvSpPr>
+        <p:spPr>
+          <a:xfrm>
+            <a:off x="2630424" y="3657600"/>
+            <a:ext cx="1865376" cy="155448"/>
           </a:xfrm>
           <a:prstGeom prst="rect">
             <a:avLst/>
@@ -2615,27 +5014,66 @@
               </a:lnSpc>
             </a:pPr>
             <a:r>
-              <a:rPr sz="700" b="0" i="0">
+              <a:rPr sz="750" b="1" i="0">
+                <a:solidFill>
+                  <a:srgbClr val="111827"/>
+                </a:solidFill>
+                <a:latin typeface="Century Schoolbook"/>
+              </a:rPr>
+              <a:t>Prompt caching may not reach us.</a:t>
+            </a:r>
+          </a:p>
+        </p:txBody>
+      </p:sp>
+      <p:sp>
+        <p:nvSpPr>
+          <p:cNvPr id="47" name="TextBox 46"/>
+          <p:cNvSpPr txBox="1"/>
+          <p:nvPr/>
+        </p:nvSpPr>
+        <p:spPr>
+          <a:xfrm>
+            <a:off x="2630424" y="3840480"/>
+            <a:ext cx="1865376" cy="777240"/>
+          </a:xfrm>
+          <a:prstGeom prst="rect">
+            <a:avLst/>
+          </a:prstGeom>
+          <a:noFill/>
+        </p:spPr>
+        <p:txBody>
+          <a:bodyPr wrap="square" lIns="0" rIns="0" tIns="0" bIns="0">
+            <a:spAutoFit/>
+          </a:bodyPr>
+          <a:lstStyle/>
+          <a:p>
+            <a:pPr>
+              <a:lnSpc>
+                <a:spcPct val="98000"/>
+              </a:lnSpc>
+            </a:pPr>
+            <a:r>
+              <a:rPr sz="650" b="0" i="0">
                 <a:solidFill>
                   <a:srgbClr val="6D6C66"/>
                 </a:solidFill>
                 <a:latin typeface="Century Schoolbook"/>
               </a:rPr>
-              <a:t>Our reusable prefix — system prompt plus tool schema — is only ~1,400 tokens. That clears Sonnet 4.6’s 1,024-token minimum but falls under Opus 4.7 (2,048) and Haiku 4.5 (4,096). Is it worth restructuring to cross it?</a:t>
-            </a:r>
-          </a:p>
-        </p:txBody>
-      </p:sp>
-      <p:sp>
-        <p:nvSpPr>
-          <p:cNvPr id="30" name="TextBox 29"/>
-          <p:cNvSpPr txBox="1"/>
-          <p:nvPr/>
-        </p:nvSpPr>
-        <p:spPr>
-          <a:xfrm>
-            <a:off x="5532120" y="3145536"/>
-            <a:ext cx="164592" cy="128016"/>
+              <a:t>Our reusable prefix — system prompt plus tool schema — is only ~1,400 tokens. That clears Sonnet 4.6’s 1,024-token minimum but falls under Opus 4.7 (2,048) and Haiku 4.5 (4,096).</a:t>
+            </a:r>
+          </a:p>
+        </p:txBody>
+      </p:sp>
+      <p:sp>
+        <p:nvSpPr>
+          <p:cNvPr id="48" name="TextBox 47"/>
+          <p:cNvSpPr txBox="1"/>
+          <p:nvPr/>
+        </p:nvSpPr>
+        <p:spPr>
+          <a:xfrm>
+            <a:off x="4648200" y="3657600"/>
+            <a:ext cx="146304" cy="118872"/>
           </a:xfrm>
           <a:prstGeom prst="rect">
             <a:avLst/>
@@ -2649,7 +5087,7 @@
           <a:lstStyle/>
           <a:p>
             <a:r>
-              <a:rPr sz="850" b="1" i="0">
+              <a:rPr sz="750" b="1" i="0">
                 <a:solidFill>
                   <a:srgbClr val="B4483D"/>
                 </a:solidFill>
@@ -2662,48 +5100,14 @@
       </p:sp>
       <p:sp>
         <p:nvSpPr>
-          <p:cNvPr id="31" name="TextBox 30"/>
-          <p:cNvSpPr txBox="1"/>
-          <p:nvPr/>
-        </p:nvSpPr>
-        <p:spPr>
-          <a:xfrm>
-            <a:off x="5724144" y="3145536"/>
-            <a:ext cx="3099816" cy="137160"/>
-          </a:xfrm>
-          <a:prstGeom prst="rect">
-            <a:avLst/>
-          </a:prstGeom>
-          <a:noFill/>
-        </p:spPr>
-        <p:txBody>
-          <a:bodyPr wrap="square" lIns="0" rIns="0" tIns="0" bIns="0">
-            <a:spAutoFit/>
-          </a:bodyPr>
-          <a:lstStyle/>
-          <a:p>
-            <a:r>
-              <a:rPr sz="850" b="1" i="0">
-                <a:solidFill>
-                  <a:srgbClr val="111827"/>
-                </a:solidFill>
-                <a:latin typeface="Century Schoolbook"/>
-              </a:rPr>
-              <a:t>Batch API on offline runs.</a:t>
-            </a:r>
-          </a:p>
-        </p:txBody>
-      </p:sp>
-      <p:sp>
-        <p:nvSpPr>
-          <p:cNvPr id="32" name="TextBox 31"/>
-          <p:cNvSpPr txBox="1"/>
-          <p:nvPr/>
-        </p:nvSpPr>
-        <p:spPr>
-          <a:xfrm>
-            <a:off x="5724144" y="3291840"/>
-            <a:ext cx="3099816" cy="566928"/>
+          <p:cNvPr id="49" name="TextBox 48"/>
+          <p:cNvSpPr txBox="1"/>
+          <p:nvPr/>
+        </p:nvSpPr>
+        <p:spPr>
+          <a:xfrm>
+            <a:off x="4794504" y="3657600"/>
+            <a:ext cx="1865376" cy="155448"/>
           </a:xfrm>
           <a:prstGeom prst="rect">
             <a:avLst/>
@@ -2722,27 +5126,66 @@
               </a:lnSpc>
             </a:pPr>
             <a:r>
-              <a:rPr sz="700" b="0" i="0">
+              <a:rPr sz="750" b="1" i="0">
+                <a:solidFill>
+                  <a:srgbClr val="111827"/>
+                </a:solidFill>
+                <a:latin typeface="Century Schoolbook"/>
+              </a:rPr>
+              <a:t>Batch API on offline runs.</a:t>
+            </a:r>
+          </a:p>
+        </p:txBody>
+      </p:sp>
+      <p:sp>
+        <p:nvSpPr>
+          <p:cNvPr id="50" name="TextBox 49"/>
+          <p:cNvSpPr txBox="1"/>
+          <p:nvPr/>
+        </p:nvSpPr>
+        <p:spPr>
+          <a:xfrm>
+            <a:off x="4794504" y="3840480"/>
+            <a:ext cx="1865376" cy="777240"/>
+          </a:xfrm>
+          <a:prstGeom prst="rect">
+            <a:avLst/>
+          </a:prstGeom>
+          <a:noFill/>
+        </p:spPr>
+        <p:txBody>
+          <a:bodyPr wrap="square" lIns="0" rIns="0" tIns="0" bIns="0">
+            <a:spAutoFit/>
+          </a:bodyPr>
+          <a:lstStyle/>
+          <a:p>
+            <a:pPr>
+              <a:lnSpc>
+                <a:spcPct val="98000"/>
+              </a:lnSpc>
+            </a:pPr>
+            <a:r>
+              <a:rPr sz="650" b="0" i="0">
                 <a:solidFill>
                   <a:srgbClr val="6D6C66"/>
                 </a:solidFill>
                 <a:latin typeface="Century Schoolbook"/>
               </a:rPr>
-              <a:t>Nothing here is latency-sensitive — GitHub Actions runs the pipeline nightly. That looks like 50% of the award left on the table.</a:t>
-            </a:r>
-          </a:p>
-        </p:txBody>
-      </p:sp>
-      <p:sp>
-        <p:nvSpPr>
-          <p:cNvPr id="33" name="TextBox 32"/>
-          <p:cNvSpPr txBox="1"/>
-          <p:nvPr/>
-        </p:nvSpPr>
-        <p:spPr>
-          <a:xfrm>
-            <a:off x="5532120" y="4059935"/>
-            <a:ext cx="164592" cy="128016"/>
+              <a:t>Nothing here is latency-sensitive — GitHub Actions runs the pipeline nightly. That reads like half the per-concept cost, for free.</a:t>
+            </a:r>
+          </a:p>
+        </p:txBody>
+      </p:sp>
+      <p:sp>
+        <p:nvSpPr>
+          <p:cNvPr id="51" name="TextBox 50"/>
+          <p:cNvSpPr txBox="1"/>
+          <p:nvPr/>
+        </p:nvSpPr>
+        <p:spPr>
+          <a:xfrm>
+            <a:off x="6812279" y="3657600"/>
+            <a:ext cx="146304" cy="118872"/>
           </a:xfrm>
           <a:prstGeom prst="rect">
             <a:avLst/>
@@ -2756,7 +5199,7 @@
           <a:lstStyle/>
           <a:p>
             <a:r>
-              <a:rPr sz="850" b="1" i="0">
+              <a:rPr sz="750" b="1" i="0">
                 <a:solidFill>
                   <a:srgbClr val="B4483D"/>
                 </a:solidFill>
@@ -2769,48 +5212,14 @@
       </p:sp>
       <p:sp>
         <p:nvSpPr>
-          <p:cNvPr id="34" name="TextBox 33"/>
-          <p:cNvSpPr txBox="1"/>
-          <p:nvPr/>
-        </p:nvSpPr>
-        <p:spPr>
-          <a:xfrm>
-            <a:off x="5724144" y="4059935"/>
-            <a:ext cx="3099816" cy="137160"/>
-          </a:xfrm>
-          <a:prstGeom prst="rect">
-            <a:avLst/>
-          </a:prstGeom>
-          <a:noFill/>
-        </p:spPr>
-        <p:txBody>
-          <a:bodyPr wrap="square" lIns="0" rIns="0" tIns="0" bIns="0">
-            <a:spAutoFit/>
-          </a:bodyPr>
-          <a:lstStyle/>
-          <a:p>
-            <a:r>
-              <a:rPr sz="850" b="1" i="0">
-                <a:solidFill>
-                  <a:srgbClr val="111827"/>
-                </a:solidFill>
-                <a:latin typeface="Century Schoolbook"/>
-              </a:rPr>
-              <a:t>Haiku leaked tool-call markup into 4 extracted values.</a:t>
-            </a:r>
-          </a:p>
-        </p:txBody>
-      </p:sp>
-      <p:sp>
-        <p:nvSpPr>
-          <p:cNvPr id="35" name="TextBox 34"/>
-          <p:cNvSpPr txBox="1"/>
-          <p:nvPr/>
-        </p:nvSpPr>
-        <p:spPr>
-          <a:xfrm>
-            <a:off x="5724144" y="4206240"/>
-            <a:ext cx="3099816" cy="566928"/>
+          <p:cNvPr id="52" name="TextBox 51"/>
+          <p:cNvSpPr txBox="1"/>
+          <p:nvPr/>
+        </p:nvSpPr>
+        <p:spPr>
+          <a:xfrm>
+            <a:off x="6958583" y="3657600"/>
+            <a:ext cx="1865376" cy="155448"/>
           </a:xfrm>
           <a:prstGeom prst="rect">
             <a:avLst/>
@@ -2829,20 +5238,59 @@
               </a:lnSpc>
             </a:pPr>
             <a:r>
-              <a:rPr sz="700" b="0" i="0">
+              <a:rPr sz="750" b="1" i="0">
+                <a:solidFill>
+                  <a:srgbClr val="111827"/>
+                </a:solidFill>
+                <a:latin typeface="Century Schoolbook"/>
+              </a:rPr>
+              <a:t>Haiku leaked markup into 4 values.</a:t>
+            </a:r>
+          </a:p>
+        </p:txBody>
+      </p:sp>
+      <p:sp>
+        <p:nvSpPr>
+          <p:cNvPr id="53" name="TextBox 52"/>
+          <p:cNvSpPr txBox="1"/>
+          <p:nvPr/>
+        </p:nvSpPr>
+        <p:spPr>
+          <a:xfrm>
+            <a:off x="6958583" y="3840480"/>
+            <a:ext cx="1865376" cy="777240"/>
+          </a:xfrm>
+          <a:prstGeom prst="rect">
+            <a:avLst/>
+          </a:prstGeom>
+          <a:noFill/>
+        </p:spPr>
+        <p:txBody>
+          <a:bodyPr wrap="square" lIns="0" rIns="0" tIns="0" bIns="0">
+            <a:spAutoFit/>
+          </a:bodyPr>
+          <a:lstStyle/>
+          <a:p>
+            <a:pPr>
+              <a:lnSpc>
+                <a:spcPct val="98000"/>
+              </a:lnSpc>
+            </a:pPr>
+            <a:r>
+              <a:rPr sz="650" b="0" i="0">
                 <a:solidFill>
                   <a:srgbClr val="6D6C66"/>
                 </a:solidFill>
                 <a:latin typeface="Century Schoolbook"/>
               </a:rPr>
-              <a:t>Sonnet and Opus: zero. We are targeting &gt;95% precision and recall — is our paired evidence/value schema too deep for Haiku, or is this a prompt fix?</a:t>
-            </a:r>
-          </a:p>
-        </p:txBody>
-      </p:sp>
-      <p:sp>
-        <p:nvSpPr>
-          <p:cNvPr id="36" name="TextBox 35"/>
+              <a:t>Sonnet and Opus: zero. We are targeting &gt;95% precision and recall — is the paired evidence/value schema too deep for Haiku, or is this a prompt fix?</a:t>
+            </a:r>
+          </a:p>
+        </p:txBody>
+      </p:sp>
+      <p:sp>
+        <p:nvSpPr>
+          <p:cNvPr id="54" name="TextBox 53"/>
           <p:cNvSpPr txBox="1"/>
           <p:nvPr/>
         </p:nvSpPr>
@@ -2863,13 +5311,13 @@
           <a:lstStyle/>
           <a:p>
             <a:r>
-              <a:rPr sz="700" b="0" i="0">
+              <a:rPr sz="680" b="0" i="0">
                 <a:solidFill>
                   <a:srgbClr val="6D6C66"/>
                 </a:solidFill>
                 <a:latin typeface="Century Schoolbook"/>
               </a:rPr>
-              <a:t>Token counts from data/fda_token_metrics.json, lit_token_metrics.json and trials_lit_token_metrics.json · rates per Anthropic list pricing · cache minimums per Anthropic prompt-caching docs</a:t>
+              <a:t>Pilot to date: 36 documents · 373 pages · 2.63M tokens, each document run through all three models · token counts from data/fda_token_metrics.json · costs at Anthropic list rates · extraction sample is real Sonnet 4.6 output</a:t>
             </a:r>
           </a:p>
         </p:txBody>

--- a/slides/Presentation_for_Anthropic_Healthcare_filled.pptx
+++ b/slides/Presentation_for_Anthropic_Healthcare_filled.pptx
@@ -841,8 +841,8 @@
         </p:blipFill>
         <p:spPr>
           <a:xfrm>
-            <a:off x="859536" y="1298448"/>
-            <a:ext cx="932688" cy="932688"/>
+            <a:off x="381336" y="1298448"/>
+            <a:ext cx="1889087" cy="1389888"/>
           </a:xfrm>
           <a:prstGeom prst="rect">
             <a:avLst/>
@@ -857,7 +857,7 @@
         </p:nvSpPr>
         <p:spPr>
           <a:xfrm>
-            <a:off x="320040" y="2304288"/>
+            <a:off x="320040" y="2761488"/>
             <a:ext cx="2011680" cy="128016"/>
           </a:xfrm>
           <a:prstGeom prst="rect">
@@ -900,8 +900,8 @@
         </p:nvSpPr>
         <p:spPr>
           <a:xfrm>
-            <a:off x="320040" y="2432304"/>
-            <a:ext cx="2011680" cy="146304"/>
+            <a:off x="320040" y="2889504"/>
+            <a:ext cx="2011680" cy="365760"/>
           </a:xfrm>
           <a:prstGeom prst="rect">
             <a:avLst/>
@@ -914,6 +914,11 @@
           </a:bodyPr>
           <a:lstStyle/>
           <a:p>
+            <a:pPr>
+              <a:lnSpc>
+                <a:spcPct val="95000"/>
+              </a:lnSpc>
+            </a:pPr>
             <a:r>
               <a:rPr sz="950" b="1" i="0">
                 <a:solidFill>
@@ -935,22 +940,367 @@
           </a:p>
         </p:txBody>
       </p:sp>
-      <p:sp>
-        <p:nvSpPr>
-          <p:cNvPr id="9" name="Rectangle 8"/>
+      <p:pic>
+        <p:nvPicPr>
+          <p:cNvPr id="9" name="Picture 8" descr="crop-ethnicity.png"/>
+          <p:cNvPicPr>
+            <a:picLocks noChangeAspect="1"/>
+          </p:cNvPicPr>
+          <p:nvPr/>
+        </p:nvPicPr>
+        <p:blipFill>
+          <a:blip r:embed="rId3"/>
+          <a:stretch>
+            <a:fillRect/>
+          </a:stretch>
+        </p:blipFill>
+        <p:spPr>
+          <a:xfrm>
+            <a:off x="2484120" y="1370676"/>
+            <a:ext cx="2011680" cy="1245430"/>
+          </a:xfrm>
+          <a:prstGeom prst="rect">
+            <a:avLst/>
+          </a:prstGeom>
+        </p:spPr>
+      </p:pic>
+      <p:sp>
+        <p:nvSpPr>
+          <p:cNvPr id="10" name="TextBox 9"/>
+          <p:cNvSpPr txBox="1"/>
+          <p:nvPr/>
+        </p:nvSpPr>
+        <p:spPr>
+          <a:xfrm>
+            <a:off x="2484120" y="2761488"/>
+            <a:ext cx="2011680" cy="128016"/>
+          </a:xfrm>
+          <a:prstGeom prst="rect">
+            <a:avLst/>
+          </a:prstGeom>
+          <a:noFill/>
+        </p:spPr>
+        <p:txBody>
+          <a:bodyPr wrap="square" lIns="0" rIns="0" tIns="0" bIns="0">
+            <a:spAutoFit/>
+          </a:bodyPr>
+          <a:lstStyle/>
+          <a:p>
+            <a:r>
+              <a:rPr sz="700" b="1" i="0">
+                <a:solidFill>
+                  <a:srgbClr val="6D6C66"/>
+                </a:solidFill>
+                <a:latin typeface="Century Schoolbook"/>
+              </a:rPr>
+              <a:t>ETHNICITY</a:t>
+            </a:r>
+            <a:r>
+              <a:rPr sz="700" b="1" i="0">
+                <a:solidFill>
+                  <a:srgbClr val="B4483D"/>
+                </a:solidFill>
+                <a:latin typeface="Century Schoolbook"/>
+              </a:rPr>
+              <a:t/>
+            </a:r>
+          </a:p>
+        </p:txBody>
+      </p:sp>
+      <p:sp>
+        <p:nvSpPr>
+          <p:cNvPr id="11" name="TextBox 10"/>
+          <p:cNvSpPr txBox="1"/>
+          <p:nvPr/>
+        </p:nvSpPr>
+        <p:spPr>
+          <a:xfrm>
+            <a:off x="2484120" y="2889504"/>
+            <a:ext cx="2011680" cy="365760"/>
+          </a:xfrm>
+          <a:prstGeom prst="rect">
+            <a:avLst/>
+          </a:prstGeom>
+          <a:noFill/>
+        </p:spPr>
+        <p:txBody>
+          <a:bodyPr wrap="square" lIns="0" rIns="0" tIns="0" bIns="0">
+            <a:spAutoFit/>
+          </a:bodyPr>
+          <a:lstStyle/>
+          <a:p>
+            <a:pPr>
+              <a:lnSpc>
+                <a:spcPct val="95000"/>
+              </a:lnSpc>
+            </a:pPr>
+            <a:r>
+              <a:rPr sz="950" b="1" i="0">
+                <a:solidFill>
+                  <a:srgbClr val="15803D"/>
+                </a:solidFill>
+                <a:latin typeface="Century Schoolbook"/>
+              </a:rPr>
+              <a:t>39.1%</a:t>
+            </a:r>
+            <a:r>
+              <a:rPr sz="650" b="0" i="0">
+                <a:solidFill>
+                  <a:srgbClr val="6D6C66"/>
+                </a:solidFill>
+                <a:latin typeface="Century Schoolbook"/>
+              </a:rPr>
+              <a:t>  of trials report it</a:t>
+            </a:r>
+          </a:p>
+        </p:txBody>
+      </p:sp>
+      <p:pic>
+        <p:nvPicPr>
+          <p:cNvPr id="12" name="Picture 11" descr="crop-sex.png"/>
+          <p:cNvPicPr>
+            <a:picLocks noChangeAspect="1"/>
+          </p:cNvPicPr>
+          <p:nvPr/>
+        </p:nvPicPr>
+        <p:blipFill>
+          <a:blip r:embed="rId4"/>
+          <a:stretch>
+            <a:fillRect/>
+          </a:stretch>
+        </p:blipFill>
+        <p:spPr>
+          <a:xfrm>
+            <a:off x="4739958" y="1298448"/>
+            <a:ext cx="1828162" cy="1389888"/>
+          </a:xfrm>
+          <a:prstGeom prst="rect">
+            <a:avLst/>
+          </a:prstGeom>
+        </p:spPr>
+      </p:pic>
+      <p:sp>
+        <p:nvSpPr>
+          <p:cNvPr id="13" name="TextBox 12"/>
+          <p:cNvSpPr txBox="1"/>
+          <p:nvPr/>
+        </p:nvSpPr>
+        <p:spPr>
+          <a:xfrm>
+            <a:off x="4648200" y="2761488"/>
+            <a:ext cx="2011680" cy="128016"/>
+          </a:xfrm>
+          <a:prstGeom prst="rect">
+            <a:avLst/>
+          </a:prstGeom>
+          <a:noFill/>
+        </p:spPr>
+        <p:txBody>
+          <a:bodyPr wrap="square" lIns="0" rIns="0" tIns="0" bIns="0">
+            <a:spAutoFit/>
+          </a:bodyPr>
+          <a:lstStyle/>
+          <a:p>
+            <a:r>
+              <a:rPr sz="700" b="1" i="0">
+                <a:solidFill>
+                  <a:srgbClr val="6D6C66"/>
+                </a:solidFill>
+                <a:latin typeface="Century Schoolbook"/>
+              </a:rPr>
+              <a:t>SEX</a:t>
+            </a:r>
+            <a:r>
+              <a:rPr sz="700" b="1" i="0">
+                <a:solidFill>
+                  <a:srgbClr val="B4483D"/>
+                </a:solidFill>
+                <a:latin typeface="Century Schoolbook"/>
+              </a:rPr>
+              <a:t>*</a:t>
+            </a:r>
+          </a:p>
+        </p:txBody>
+      </p:sp>
+      <p:sp>
+        <p:nvSpPr>
+          <p:cNvPr id="14" name="TextBox 13"/>
+          <p:cNvSpPr txBox="1"/>
+          <p:nvPr/>
+        </p:nvSpPr>
+        <p:spPr>
+          <a:xfrm>
+            <a:off x="4648200" y="2889504"/>
+            <a:ext cx="2011680" cy="365760"/>
+          </a:xfrm>
+          <a:prstGeom prst="rect">
+            <a:avLst/>
+          </a:prstGeom>
+          <a:noFill/>
+        </p:spPr>
+        <p:txBody>
+          <a:bodyPr wrap="square" lIns="0" rIns="0" tIns="0" bIns="0">
+            <a:spAutoFit/>
+          </a:bodyPr>
+          <a:lstStyle/>
+          <a:p>
+            <a:pPr>
+              <a:lnSpc>
+                <a:spcPct val="95000"/>
+              </a:lnSpc>
+            </a:pPr>
+            <a:r>
+              <a:rPr sz="950" b="1" i="0">
+                <a:solidFill>
+                  <a:srgbClr val="15803D"/>
+                </a:solidFill>
+                <a:latin typeface="Century Schoolbook"/>
+              </a:rPr>
+              <a:t>97.3%</a:t>
+            </a:r>
+            <a:r>
+              <a:rPr sz="650" b="0" i="0">
+                <a:solidFill>
+                  <a:srgbClr val="6D6C66"/>
+                </a:solidFill>
+                <a:latin typeface="Century Schoolbook"/>
+              </a:rPr>
+              <a:t>  of trials report it</a:t>
+            </a:r>
+          </a:p>
+        </p:txBody>
+      </p:sp>
+      <p:pic>
+        <p:nvPicPr>
+          <p:cNvPr id="15" name="Picture 14" descr="crop-geography.png"/>
+          <p:cNvPicPr>
+            <a:picLocks noChangeAspect="1"/>
+          </p:cNvPicPr>
+          <p:nvPr/>
+        </p:nvPicPr>
+        <p:blipFill>
+          <a:blip r:embed="rId5"/>
+          <a:stretch>
+            <a:fillRect/>
+          </a:stretch>
+        </p:blipFill>
+        <p:spPr>
+          <a:xfrm>
+            <a:off x="6812279" y="1368140"/>
+            <a:ext cx="2011680" cy="1250503"/>
+          </a:xfrm>
+          <a:prstGeom prst="rect">
+            <a:avLst/>
+          </a:prstGeom>
+        </p:spPr>
+      </p:pic>
+      <p:sp>
+        <p:nvSpPr>
+          <p:cNvPr id="16" name="TextBox 15"/>
+          <p:cNvSpPr txBox="1"/>
+          <p:nvPr/>
+        </p:nvSpPr>
+        <p:spPr>
+          <a:xfrm>
+            <a:off x="6812279" y="2761488"/>
+            <a:ext cx="2011680" cy="128016"/>
+          </a:xfrm>
+          <a:prstGeom prst="rect">
+            <a:avLst/>
+          </a:prstGeom>
+          <a:noFill/>
+        </p:spPr>
+        <p:txBody>
+          <a:bodyPr wrap="square" lIns="0" rIns="0" tIns="0" bIns="0">
+            <a:spAutoFit/>
+          </a:bodyPr>
+          <a:lstStyle/>
+          <a:p>
+            <a:r>
+              <a:rPr sz="700" b="1" i="0">
+                <a:solidFill>
+                  <a:srgbClr val="6D6C66"/>
+                </a:solidFill>
+                <a:latin typeface="Century Schoolbook"/>
+              </a:rPr>
+              <a:t>GEOGRAPHY</a:t>
+            </a:r>
+            <a:r>
+              <a:rPr sz="700" b="1" i="0">
+                <a:solidFill>
+                  <a:srgbClr val="B4483D"/>
+                </a:solidFill>
+                <a:latin typeface="Century Schoolbook"/>
+              </a:rPr>
+              <a:t>*</a:t>
+            </a:r>
+          </a:p>
+        </p:txBody>
+      </p:sp>
+      <p:sp>
+        <p:nvSpPr>
+          <p:cNvPr id="17" name="TextBox 16"/>
+          <p:cNvSpPr txBox="1"/>
+          <p:nvPr/>
+        </p:nvSpPr>
+        <p:spPr>
+          <a:xfrm>
+            <a:off x="6812279" y="2889504"/>
+            <a:ext cx="2011680" cy="365760"/>
+          </a:xfrm>
+          <a:prstGeom prst="rect">
+            <a:avLst/>
+          </a:prstGeom>
+          <a:noFill/>
+        </p:spPr>
+        <p:txBody>
+          <a:bodyPr wrap="square" lIns="0" rIns="0" tIns="0" bIns="0">
+            <a:spAutoFit/>
+          </a:bodyPr>
+          <a:lstStyle/>
+          <a:p>
+            <a:pPr>
+              <a:lnSpc>
+                <a:spcPct val="95000"/>
+              </a:lnSpc>
+            </a:pPr>
+            <a:r>
+              <a:rPr sz="950" b="1" i="0">
+                <a:solidFill>
+                  <a:srgbClr val="15803D"/>
+                </a:solidFill>
+                <a:latin typeface="Century Schoolbook"/>
+              </a:rPr>
+              <a:t>37.3%</a:t>
+            </a:r>
+            <a:r>
+              <a:rPr sz="650" b="0" i="0">
+                <a:solidFill>
+                  <a:srgbClr val="6D6C66"/>
+                </a:solidFill>
+                <a:latin typeface="Century Schoolbook"/>
+              </a:rPr>
+              <a:t>  of sites are in the South · Midwest 23.6% · West 20.6% · Northeast 18.5%</a:t>
+            </a:r>
+          </a:p>
+        </p:txBody>
+      </p:sp>
+      <p:sp>
+        <p:nvSpPr>
+          <p:cNvPr id="18" name="Rectangle 17"/>
           <p:cNvSpPr/>
           <p:nvPr/>
         </p:nvSpPr>
         <p:spPr>
           <a:xfrm>
-            <a:off x="320040" y="2653588"/>
-            <a:ext cx="53340" cy="53340"/>
+            <a:off x="320040" y="3291840"/>
+            <a:ext cx="8503920" cy="11430"/>
           </a:xfrm>
           <a:prstGeom prst="rect">
             <a:avLst/>
           </a:prstGeom>
           <a:solidFill>
-            <a:srgbClr val="8B5CF6"/>
+            <a:srgbClr val="D9D8D3"/>
           </a:solidFill>
           <a:ln>
             <a:noFill/>
@@ -981,14 +1331,14 @@
       </p:sp>
       <p:sp>
         <p:nvSpPr>
-          <p:cNvPr id="10" name="TextBox 9"/>
-          <p:cNvSpPr txBox="1"/>
-          <p:nvPr/>
-        </p:nvSpPr>
-        <p:spPr>
-          <a:xfrm>
-            <a:off x="411479" y="2633472"/>
-            <a:ext cx="1508760" cy="118872"/>
+          <p:cNvPr id="19" name="TextBox 18"/>
+          <p:cNvSpPr txBox="1"/>
+          <p:nvPr/>
+        </p:nvSpPr>
+        <p:spPr>
+          <a:xfrm>
+            <a:off x="320040" y="3364992"/>
+            <a:ext cx="5486400" cy="237744"/>
           </a:xfrm>
           <a:prstGeom prst="rect">
             <a:avLst/>
@@ -1002,68 +1352,57 @@
           <a:lstStyle/>
           <a:p>
             <a:r>
-              <a:rPr sz="630" b="0" i="0">
+              <a:rPr sz="1100" b="0" i="0">
                 <a:solidFill>
                   <a:srgbClr val="111827"/>
                 </a:solidFill>
                 <a:latin typeface="Century Schoolbook"/>
               </a:rPr>
-              <a:t>White</a:t>
-            </a:r>
-          </a:p>
-        </p:txBody>
-      </p:sp>
-      <p:sp>
-        <p:nvSpPr>
-          <p:cNvPr id="11" name="TextBox 10"/>
-          <p:cNvSpPr txBox="1"/>
-          <p:nvPr/>
-        </p:nvSpPr>
-        <p:spPr>
-          <a:xfrm>
-            <a:off x="1892808" y="2633472"/>
-            <a:ext cx="438912" cy="118872"/>
-          </a:xfrm>
-          <a:prstGeom prst="rect">
-            <a:avLst/>
-          </a:prstGeom>
-          <a:noFill/>
-        </p:spPr>
-        <p:txBody>
-          <a:bodyPr wrap="square" lIns="0" rIns="0" tIns="0" bIns="0">
-            <a:spAutoFit/>
-          </a:bodyPr>
-          <a:lstStyle/>
-          <a:p>
-            <a:pPr algn="r"/>
-            <a:r>
-              <a:rPr sz="630" b="1" i="0">
-                <a:solidFill>
-                  <a:srgbClr val="111827"/>
-                </a:solidFill>
-                <a:latin typeface="Century Schoolbook"/>
-              </a:rPr>
-              <a:t>54.6%</a:t>
-            </a:r>
-          </a:p>
-        </p:txBody>
-      </p:sp>
-      <p:sp>
-        <p:nvSpPr>
-          <p:cNvPr id="12" name="Rectangle 11"/>
+              <a:t>The same four questions, now for medical AI</a:t>
+            </a:r>
+          </a:p>
+        </p:txBody>
+      </p:sp>
+      <p:pic>
+        <p:nvPicPr>
+          <p:cNvPr id="20" name="Picture 19" descr="crop-ai-devices.png"/>
+          <p:cNvPicPr>
+            <a:picLocks noChangeAspect="1"/>
+          </p:cNvPicPr>
+          <p:nvPr/>
+        </p:nvPicPr>
+        <p:blipFill>
+          <a:blip r:embed="rId6"/>
+          <a:stretch>
+            <a:fillRect/>
+          </a:stretch>
+        </p:blipFill>
+        <p:spPr>
+          <a:xfrm>
+            <a:off x="320040" y="3657600"/>
+            <a:ext cx="4160520" cy="795528"/>
+          </a:xfrm>
+          <a:prstGeom prst="rect">
+            <a:avLst/>
+          </a:prstGeom>
+        </p:spPr>
+      </p:pic>
+      <p:sp>
+        <p:nvSpPr>
+          <p:cNvPr id="21" name="Rectangle 20"/>
           <p:cNvSpPr/>
           <p:nvPr/>
         </p:nvSpPr>
         <p:spPr>
           <a:xfrm>
-            <a:off x="320040" y="2760573"/>
-            <a:ext cx="53340" cy="53340"/>
+            <a:off x="4754880" y="3639312"/>
+            <a:ext cx="11430" cy="932688"/>
           </a:xfrm>
           <a:prstGeom prst="rect">
             <a:avLst/>
           </a:prstGeom>
           <a:solidFill>
-            <a:srgbClr val="6B7280"/>
+            <a:srgbClr val="D9D8D3"/>
           </a:solidFill>
           <a:ln>
             <a:noFill/>
@@ -1094,1914 +1433,7 @@
       </p:sp>
       <p:sp>
         <p:nvSpPr>
-          <p:cNvPr id="13" name="TextBox 12"/>
-          <p:cNvSpPr txBox="1"/>
-          <p:nvPr/>
-        </p:nvSpPr>
-        <p:spPr>
-          <a:xfrm>
-            <a:off x="411479" y="2740456"/>
-            <a:ext cx="1508760" cy="118872"/>
-          </a:xfrm>
-          <a:prstGeom prst="rect">
-            <a:avLst/>
-          </a:prstGeom>
-          <a:noFill/>
-        </p:spPr>
-        <p:txBody>
-          <a:bodyPr wrap="square" lIns="0" rIns="0" tIns="0" bIns="0">
-            <a:spAutoFit/>
-          </a:bodyPr>
-          <a:lstStyle/>
-          <a:p>
-            <a:r>
-              <a:rPr sz="630" b="0" i="0">
-                <a:solidFill>
-                  <a:srgbClr val="111827"/>
-                </a:solidFill>
-                <a:latin typeface="Century Schoolbook"/>
-              </a:rPr>
-              <a:t>Unknown</a:t>
-            </a:r>
-          </a:p>
-        </p:txBody>
-      </p:sp>
-      <p:sp>
-        <p:nvSpPr>
-          <p:cNvPr id="14" name="TextBox 13"/>
-          <p:cNvSpPr txBox="1"/>
-          <p:nvPr/>
-        </p:nvSpPr>
-        <p:spPr>
-          <a:xfrm>
-            <a:off x="1892808" y="2740456"/>
-            <a:ext cx="438912" cy="118872"/>
-          </a:xfrm>
-          <a:prstGeom prst="rect">
-            <a:avLst/>
-          </a:prstGeom>
-          <a:noFill/>
-        </p:spPr>
-        <p:txBody>
-          <a:bodyPr wrap="square" lIns="0" rIns="0" tIns="0" bIns="0">
-            <a:spAutoFit/>
-          </a:bodyPr>
-          <a:lstStyle/>
-          <a:p>
-            <a:pPr algn="r"/>
-            <a:r>
-              <a:rPr sz="630" b="1" i="0">
-                <a:solidFill>
-                  <a:srgbClr val="111827"/>
-                </a:solidFill>
-                <a:latin typeface="Century Schoolbook"/>
-              </a:rPr>
-              <a:t>15.0%</a:t>
-            </a:r>
-          </a:p>
-        </p:txBody>
-      </p:sp>
-      <p:sp>
-        <p:nvSpPr>
-          <p:cNvPr id="15" name="Rectangle 14"/>
-          <p:cNvSpPr/>
-          <p:nvPr/>
-        </p:nvSpPr>
-        <p:spPr>
-          <a:xfrm>
-            <a:off x="320040" y="2867558"/>
-            <a:ext cx="53340" cy="53340"/>
-          </a:xfrm>
-          <a:prstGeom prst="rect">
-            <a:avLst/>
-          </a:prstGeom>
-          <a:solidFill>
-            <a:srgbClr val="10B981"/>
-          </a:solidFill>
-          <a:ln>
-            <a:noFill/>
-          </a:ln>
-          <a:effectLst/>
-        </p:spPr>
-        <p:style>
-          <a:lnRef idx="1">
-            <a:schemeClr val="accent1"/>
-          </a:lnRef>
-          <a:fillRef idx="3">
-            <a:schemeClr val="accent1"/>
-          </a:fillRef>
-          <a:effectRef idx="2">
-            <a:schemeClr val="accent1"/>
-          </a:effectRef>
-          <a:fontRef idx="minor">
-            <a:schemeClr val="lt1"/>
-          </a:fontRef>
-        </p:style>
-        <p:txBody>
-          <a:bodyPr rtlCol="0" anchor="ctr"/>
-          <a:lstStyle/>
-          <a:p>
-            <a:pPr algn="ctr"/>
-          </a:p>
-        </p:txBody>
-      </p:sp>
-      <p:sp>
-        <p:nvSpPr>
-          <p:cNvPr id="16" name="TextBox 15"/>
-          <p:cNvSpPr txBox="1"/>
-          <p:nvPr/>
-        </p:nvSpPr>
-        <p:spPr>
-          <a:xfrm>
-            <a:off x="411479" y="2847441"/>
-            <a:ext cx="1508760" cy="118872"/>
-          </a:xfrm>
-          <a:prstGeom prst="rect">
-            <a:avLst/>
-          </a:prstGeom>
-          <a:noFill/>
-        </p:spPr>
-        <p:txBody>
-          <a:bodyPr wrap="square" lIns="0" rIns="0" tIns="0" bIns="0">
-            <a:spAutoFit/>
-          </a:bodyPr>
-          <a:lstStyle/>
-          <a:p>
-            <a:r>
-              <a:rPr sz="630" b="0" i="0">
-                <a:solidFill>
-                  <a:srgbClr val="111827"/>
-                </a:solidFill>
-                <a:latin typeface="Century Schoolbook"/>
-              </a:rPr>
-              <a:t>Black/African American</a:t>
-            </a:r>
-          </a:p>
-        </p:txBody>
-      </p:sp>
-      <p:sp>
-        <p:nvSpPr>
-          <p:cNvPr id="17" name="TextBox 16"/>
-          <p:cNvSpPr txBox="1"/>
-          <p:nvPr/>
-        </p:nvSpPr>
-        <p:spPr>
-          <a:xfrm>
-            <a:off x="1892808" y="2847441"/>
-            <a:ext cx="438912" cy="118872"/>
-          </a:xfrm>
-          <a:prstGeom prst="rect">
-            <a:avLst/>
-          </a:prstGeom>
-          <a:noFill/>
-        </p:spPr>
-        <p:txBody>
-          <a:bodyPr wrap="square" lIns="0" rIns="0" tIns="0" bIns="0">
-            <a:spAutoFit/>
-          </a:bodyPr>
-          <a:lstStyle/>
-          <a:p>
-            <a:pPr algn="r"/>
-            <a:r>
-              <a:rPr sz="630" b="1" i="0">
-                <a:solidFill>
-                  <a:srgbClr val="111827"/>
-                </a:solidFill>
-                <a:latin typeface="Century Schoolbook"/>
-              </a:rPr>
-              <a:t>14.6%</a:t>
-            </a:r>
-          </a:p>
-        </p:txBody>
-      </p:sp>
-      <p:sp>
-        <p:nvSpPr>
-          <p:cNvPr id="18" name="Rectangle 17"/>
-          <p:cNvSpPr/>
-          <p:nvPr/>
-        </p:nvSpPr>
-        <p:spPr>
-          <a:xfrm>
-            <a:off x="320040" y="2974543"/>
-            <a:ext cx="53340" cy="53340"/>
-          </a:xfrm>
-          <a:prstGeom prst="rect">
-            <a:avLst/>
-          </a:prstGeom>
-          <a:solidFill>
-            <a:srgbClr val="1D1D1D"/>
-          </a:solidFill>
-          <a:ln>
-            <a:noFill/>
-          </a:ln>
-          <a:effectLst/>
-        </p:spPr>
-        <p:style>
-          <a:lnRef idx="1">
-            <a:schemeClr val="accent1"/>
-          </a:lnRef>
-          <a:fillRef idx="3">
-            <a:schemeClr val="accent1"/>
-          </a:fillRef>
-          <a:effectRef idx="2">
-            <a:schemeClr val="accent1"/>
-          </a:effectRef>
-          <a:fontRef idx="minor">
-            <a:schemeClr val="lt1"/>
-          </a:fontRef>
-        </p:style>
-        <p:txBody>
-          <a:bodyPr rtlCol="0" anchor="ctr"/>
-          <a:lstStyle/>
-          <a:p>
-            <a:pPr algn="ctr"/>
-          </a:p>
-        </p:txBody>
-      </p:sp>
-      <p:sp>
-        <p:nvSpPr>
-          <p:cNvPr id="19" name="TextBox 18"/>
-          <p:cNvSpPr txBox="1"/>
-          <p:nvPr/>
-        </p:nvSpPr>
-        <p:spPr>
-          <a:xfrm>
-            <a:off x="411479" y="2954426"/>
-            <a:ext cx="1508760" cy="118872"/>
-          </a:xfrm>
-          <a:prstGeom prst="rect">
-            <a:avLst/>
-          </a:prstGeom>
-          <a:noFill/>
-        </p:spPr>
-        <p:txBody>
-          <a:bodyPr wrap="square" lIns="0" rIns="0" tIns="0" bIns="0">
-            <a:spAutoFit/>
-          </a:bodyPr>
-          <a:lstStyle/>
-          <a:p>
-            <a:r>
-              <a:rPr sz="630" b="0" i="0">
-                <a:solidFill>
-                  <a:srgbClr val="111827"/>
-                </a:solidFill>
-                <a:latin typeface="Century Schoolbook"/>
-              </a:rPr>
-              <a:t>Other</a:t>
-            </a:r>
-          </a:p>
-        </p:txBody>
-      </p:sp>
-      <p:sp>
-        <p:nvSpPr>
-          <p:cNvPr id="20" name="TextBox 19"/>
-          <p:cNvSpPr txBox="1"/>
-          <p:nvPr/>
-        </p:nvSpPr>
-        <p:spPr>
-          <a:xfrm>
-            <a:off x="1892808" y="2954426"/>
-            <a:ext cx="438912" cy="118872"/>
-          </a:xfrm>
-          <a:prstGeom prst="rect">
-            <a:avLst/>
-          </a:prstGeom>
-          <a:noFill/>
-        </p:spPr>
-        <p:txBody>
-          <a:bodyPr wrap="square" lIns="0" rIns="0" tIns="0" bIns="0">
-            <a:spAutoFit/>
-          </a:bodyPr>
-          <a:lstStyle/>
-          <a:p>
-            <a:pPr algn="r"/>
-            <a:r>
-              <a:rPr sz="630" b="1" i="0">
-                <a:solidFill>
-                  <a:srgbClr val="111827"/>
-                </a:solidFill>
-                <a:latin typeface="Century Schoolbook"/>
-              </a:rPr>
-              <a:t>7.7%</a:t>
-            </a:r>
-          </a:p>
-        </p:txBody>
-      </p:sp>
-      <p:sp>
-        <p:nvSpPr>
-          <p:cNvPr id="21" name="Rectangle 20"/>
-          <p:cNvSpPr/>
-          <p:nvPr/>
-        </p:nvSpPr>
-        <p:spPr>
-          <a:xfrm>
-            <a:off x="320040" y="3081527"/>
-            <a:ext cx="53340" cy="53340"/>
-          </a:xfrm>
-          <a:prstGeom prst="rect">
-            <a:avLst/>
-          </a:prstGeom>
-          <a:solidFill>
-            <a:srgbClr val="F59E0B"/>
-          </a:solidFill>
-          <a:ln>
-            <a:noFill/>
-          </a:ln>
-          <a:effectLst/>
-        </p:spPr>
-        <p:style>
-          <a:lnRef idx="1">
-            <a:schemeClr val="accent1"/>
-          </a:lnRef>
-          <a:fillRef idx="3">
-            <a:schemeClr val="accent1"/>
-          </a:fillRef>
-          <a:effectRef idx="2">
-            <a:schemeClr val="accent1"/>
-          </a:effectRef>
-          <a:fontRef idx="minor">
-            <a:schemeClr val="lt1"/>
-          </a:fontRef>
-        </p:style>
-        <p:txBody>
-          <a:bodyPr rtlCol="0" anchor="ctr"/>
-          <a:lstStyle/>
-          <a:p>
-            <a:pPr algn="ctr"/>
-          </a:p>
-        </p:txBody>
-      </p:sp>
-      <p:sp>
-        <p:nvSpPr>
           <p:cNvPr id="22" name="TextBox 21"/>
-          <p:cNvSpPr txBox="1"/>
-          <p:nvPr/>
-        </p:nvSpPr>
-        <p:spPr>
-          <a:xfrm>
-            <a:off x="411479" y="3061411"/>
-            <a:ext cx="1508760" cy="118872"/>
-          </a:xfrm>
-          <a:prstGeom prst="rect">
-            <a:avLst/>
-          </a:prstGeom>
-          <a:noFill/>
-        </p:spPr>
-        <p:txBody>
-          <a:bodyPr wrap="square" lIns="0" rIns="0" tIns="0" bIns="0">
-            <a:spAutoFit/>
-          </a:bodyPr>
-          <a:lstStyle/>
-          <a:p>
-            <a:r>
-              <a:rPr sz="630" b="0" i="0">
-                <a:solidFill>
-                  <a:srgbClr val="111827"/>
-                </a:solidFill>
-                <a:latin typeface="Century Schoolbook"/>
-              </a:rPr>
-              <a:t>Asian</a:t>
-            </a:r>
-          </a:p>
-        </p:txBody>
-      </p:sp>
-      <p:sp>
-        <p:nvSpPr>
-          <p:cNvPr id="23" name="TextBox 22"/>
-          <p:cNvSpPr txBox="1"/>
-          <p:nvPr/>
-        </p:nvSpPr>
-        <p:spPr>
-          <a:xfrm>
-            <a:off x="1892808" y="3061411"/>
-            <a:ext cx="438912" cy="118872"/>
-          </a:xfrm>
-          <a:prstGeom prst="rect">
-            <a:avLst/>
-          </a:prstGeom>
-          <a:noFill/>
-        </p:spPr>
-        <p:txBody>
-          <a:bodyPr wrap="square" lIns="0" rIns="0" tIns="0" bIns="0">
-            <a:spAutoFit/>
-          </a:bodyPr>
-          <a:lstStyle/>
-          <a:p>
-            <a:pPr algn="r"/>
-            <a:r>
-              <a:rPr sz="630" b="1" i="0">
-                <a:solidFill>
-                  <a:srgbClr val="111827"/>
-                </a:solidFill>
-                <a:latin typeface="Century Schoolbook"/>
-              </a:rPr>
-              <a:t>6.6%</a:t>
-            </a:r>
-          </a:p>
-        </p:txBody>
-      </p:sp>
-      <p:sp>
-        <p:nvSpPr>
-          <p:cNvPr id="24" name="TextBox 23"/>
-          <p:cNvSpPr txBox="1"/>
-          <p:nvPr/>
-        </p:nvSpPr>
-        <p:spPr>
-          <a:xfrm>
-            <a:off x="320040" y="3168396"/>
-            <a:ext cx="1508760" cy="118872"/>
-          </a:xfrm>
-          <a:prstGeom prst="rect">
-            <a:avLst/>
-          </a:prstGeom>
-          <a:noFill/>
-        </p:spPr>
-        <p:txBody>
-          <a:bodyPr wrap="square" lIns="0" rIns="0" tIns="0" bIns="0">
-            <a:spAutoFit/>
-          </a:bodyPr>
-          <a:lstStyle/>
-          <a:p>
-            <a:r>
-              <a:rPr sz="630" b="0" i="0">
-                <a:solidFill>
-                  <a:srgbClr val="111827"/>
-                </a:solidFill>
-                <a:latin typeface="Century Schoolbook"/>
-              </a:rPr>
-              <a:t>All remaining categories</a:t>
-            </a:r>
-          </a:p>
-        </p:txBody>
-      </p:sp>
-      <p:sp>
-        <p:nvSpPr>
-          <p:cNvPr id="25" name="TextBox 24"/>
-          <p:cNvSpPr txBox="1"/>
-          <p:nvPr/>
-        </p:nvSpPr>
-        <p:spPr>
-          <a:xfrm>
-            <a:off x="1892808" y="3168396"/>
-            <a:ext cx="438912" cy="118872"/>
-          </a:xfrm>
-          <a:prstGeom prst="rect">
-            <a:avLst/>
-          </a:prstGeom>
-          <a:noFill/>
-        </p:spPr>
-        <p:txBody>
-          <a:bodyPr wrap="square" lIns="0" rIns="0" tIns="0" bIns="0">
-            <a:spAutoFit/>
-          </a:bodyPr>
-          <a:lstStyle/>
-          <a:p>
-            <a:pPr algn="r"/>
-            <a:r>
-              <a:rPr sz="630" b="1" i="0">
-                <a:solidFill>
-                  <a:srgbClr val="111827"/>
-                </a:solidFill>
-                <a:latin typeface="Century Schoolbook"/>
-              </a:rPr>
-              <a:t>1.4%</a:t>
-            </a:r>
-          </a:p>
-        </p:txBody>
-      </p:sp>
-      <p:pic>
-        <p:nvPicPr>
-          <p:cNvPr id="26" name="Picture 25" descr="crop-ethnicity.png"/>
-          <p:cNvPicPr>
-            <a:picLocks noChangeAspect="1"/>
-          </p:cNvPicPr>
-          <p:nvPr/>
-        </p:nvPicPr>
-        <p:blipFill>
-          <a:blip r:embed="rId3"/>
-          <a:stretch>
-            <a:fillRect/>
-          </a:stretch>
-        </p:blipFill>
-        <p:spPr>
-          <a:xfrm>
-            <a:off x="3023616" y="1298448"/>
-            <a:ext cx="932688" cy="932688"/>
-          </a:xfrm>
-          <a:prstGeom prst="rect">
-            <a:avLst/>
-          </a:prstGeom>
-        </p:spPr>
-      </p:pic>
-      <p:sp>
-        <p:nvSpPr>
-          <p:cNvPr id="27" name="TextBox 26"/>
-          <p:cNvSpPr txBox="1"/>
-          <p:nvPr/>
-        </p:nvSpPr>
-        <p:spPr>
-          <a:xfrm>
-            <a:off x="2484120" y="2304288"/>
-            <a:ext cx="2011680" cy="128016"/>
-          </a:xfrm>
-          <a:prstGeom prst="rect">
-            <a:avLst/>
-          </a:prstGeom>
-          <a:noFill/>
-        </p:spPr>
-        <p:txBody>
-          <a:bodyPr wrap="square" lIns="0" rIns="0" tIns="0" bIns="0">
-            <a:spAutoFit/>
-          </a:bodyPr>
-          <a:lstStyle/>
-          <a:p>
-            <a:r>
-              <a:rPr sz="700" b="1" i="0">
-                <a:solidFill>
-                  <a:srgbClr val="6D6C66"/>
-                </a:solidFill>
-                <a:latin typeface="Century Schoolbook"/>
-              </a:rPr>
-              <a:t>ETHNICITY</a:t>
-            </a:r>
-            <a:r>
-              <a:rPr sz="700" b="1" i="0">
-                <a:solidFill>
-                  <a:srgbClr val="B4483D"/>
-                </a:solidFill>
-                <a:latin typeface="Century Schoolbook"/>
-              </a:rPr>
-              <a:t/>
-            </a:r>
-          </a:p>
-        </p:txBody>
-      </p:sp>
-      <p:sp>
-        <p:nvSpPr>
-          <p:cNvPr id="28" name="TextBox 27"/>
-          <p:cNvSpPr txBox="1"/>
-          <p:nvPr/>
-        </p:nvSpPr>
-        <p:spPr>
-          <a:xfrm>
-            <a:off x="2484120" y="2432304"/>
-            <a:ext cx="2011680" cy="146304"/>
-          </a:xfrm>
-          <a:prstGeom prst="rect">
-            <a:avLst/>
-          </a:prstGeom>
-          <a:noFill/>
-        </p:spPr>
-        <p:txBody>
-          <a:bodyPr wrap="square" lIns="0" rIns="0" tIns="0" bIns="0">
-            <a:spAutoFit/>
-          </a:bodyPr>
-          <a:lstStyle/>
-          <a:p>
-            <a:r>
-              <a:rPr sz="950" b="1" i="0">
-                <a:solidFill>
-                  <a:srgbClr val="15803D"/>
-                </a:solidFill>
-                <a:latin typeface="Century Schoolbook"/>
-              </a:rPr>
-              <a:t>39.1%</a:t>
-            </a:r>
-            <a:r>
-              <a:rPr sz="650" b="0" i="0">
-                <a:solidFill>
-                  <a:srgbClr val="6D6C66"/>
-                </a:solidFill>
-                <a:latin typeface="Century Schoolbook"/>
-              </a:rPr>
-              <a:t>  of trials report it</a:t>
-            </a:r>
-          </a:p>
-        </p:txBody>
-      </p:sp>
-      <p:sp>
-        <p:nvSpPr>
-          <p:cNvPr id="29" name="Rectangle 28"/>
-          <p:cNvSpPr/>
-          <p:nvPr/>
-        </p:nvSpPr>
-        <p:spPr>
-          <a:xfrm>
-            <a:off x="2484120" y="2653588"/>
-            <a:ext cx="53340" cy="53340"/>
-          </a:xfrm>
-          <a:prstGeom prst="rect">
-            <a:avLst/>
-          </a:prstGeom>
-          <a:solidFill>
-            <a:srgbClr val="6B7280"/>
-          </a:solidFill>
-          <a:ln>
-            <a:noFill/>
-          </a:ln>
-          <a:effectLst/>
-        </p:spPr>
-        <p:style>
-          <a:lnRef idx="1">
-            <a:schemeClr val="accent1"/>
-          </a:lnRef>
-          <a:fillRef idx="3">
-            <a:schemeClr val="accent1"/>
-          </a:fillRef>
-          <a:effectRef idx="2">
-            <a:schemeClr val="accent1"/>
-          </a:effectRef>
-          <a:fontRef idx="minor">
-            <a:schemeClr val="lt1"/>
-          </a:fontRef>
-        </p:style>
-        <p:txBody>
-          <a:bodyPr rtlCol="0" anchor="ctr"/>
-          <a:lstStyle/>
-          <a:p>
-            <a:pPr algn="ctr"/>
-          </a:p>
-        </p:txBody>
-      </p:sp>
-      <p:sp>
-        <p:nvSpPr>
-          <p:cNvPr id="30" name="TextBox 29"/>
-          <p:cNvSpPr txBox="1"/>
-          <p:nvPr/>
-        </p:nvSpPr>
-        <p:spPr>
-          <a:xfrm>
-            <a:off x="2575560" y="2633472"/>
-            <a:ext cx="1508760" cy="118872"/>
-          </a:xfrm>
-          <a:prstGeom prst="rect">
-            <a:avLst/>
-          </a:prstGeom>
-          <a:noFill/>
-        </p:spPr>
-        <p:txBody>
-          <a:bodyPr wrap="square" lIns="0" rIns="0" tIns="0" bIns="0">
-            <a:spAutoFit/>
-          </a:bodyPr>
-          <a:lstStyle/>
-          <a:p>
-            <a:r>
-              <a:rPr sz="630" b="0" i="0">
-                <a:solidFill>
-                  <a:srgbClr val="111827"/>
-                </a:solidFill>
-                <a:latin typeface="Century Schoolbook"/>
-              </a:rPr>
-              <a:t>Unknown</a:t>
-            </a:r>
-          </a:p>
-        </p:txBody>
-      </p:sp>
-      <p:sp>
-        <p:nvSpPr>
-          <p:cNvPr id="31" name="TextBox 30"/>
-          <p:cNvSpPr txBox="1"/>
-          <p:nvPr/>
-        </p:nvSpPr>
-        <p:spPr>
-          <a:xfrm>
-            <a:off x="4056888" y="2633472"/>
-            <a:ext cx="438912" cy="118872"/>
-          </a:xfrm>
-          <a:prstGeom prst="rect">
-            <a:avLst/>
-          </a:prstGeom>
-          <a:noFill/>
-        </p:spPr>
-        <p:txBody>
-          <a:bodyPr wrap="square" lIns="0" rIns="0" tIns="0" bIns="0">
-            <a:spAutoFit/>
-          </a:bodyPr>
-          <a:lstStyle/>
-          <a:p>
-            <a:pPr algn="r"/>
-            <a:r>
-              <a:rPr sz="630" b="1" i="0">
-                <a:solidFill>
-                  <a:srgbClr val="111827"/>
-                </a:solidFill>
-                <a:latin typeface="Century Schoolbook"/>
-              </a:rPr>
-              <a:t>52.4%</a:t>
-            </a:r>
-          </a:p>
-        </p:txBody>
-      </p:sp>
-      <p:sp>
-        <p:nvSpPr>
-          <p:cNvPr id="32" name="Rectangle 31"/>
-          <p:cNvSpPr/>
-          <p:nvPr/>
-        </p:nvSpPr>
-        <p:spPr>
-          <a:xfrm>
-            <a:off x="2484120" y="2760573"/>
-            <a:ext cx="53340" cy="53340"/>
-          </a:xfrm>
-          <a:prstGeom prst="rect">
-            <a:avLst/>
-          </a:prstGeom>
-          <a:solidFill>
-            <a:srgbClr val="3B82F6"/>
-          </a:solidFill>
-          <a:ln>
-            <a:noFill/>
-          </a:ln>
-          <a:effectLst/>
-        </p:spPr>
-        <p:style>
-          <a:lnRef idx="1">
-            <a:schemeClr val="accent1"/>
-          </a:lnRef>
-          <a:fillRef idx="3">
-            <a:schemeClr val="accent1"/>
-          </a:fillRef>
-          <a:effectRef idx="2">
-            <a:schemeClr val="accent1"/>
-          </a:effectRef>
-          <a:fontRef idx="minor">
-            <a:schemeClr val="lt1"/>
-          </a:fontRef>
-        </p:style>
-        <p:txBody>
-          <a:bodyPr rtlCol="0" anchor="ctr"/>
-          <a:lstStyle/>
-          <a:p>
-            <a:pPr algn="ctr"/>
-          </a:p>
-        </p:txBody>
-      </p:sp>
-      <p:sp>
-        <p:nvSpPr>
-          <p:cNvPr id="33" name="TextBox 32"/>
-          <p:cNvSpPr txBox="1"/>
-          <p:nvPr/>
-        </p:nvSpPr>
-        <p:spPr>
-          <a:xfrm>
-            <a:off x="2575560" y="2740456"/>
-            <a:ext cx="1508760" cy="118872"/>
-          </a:xfrm>
-          <a:prstGeom prst="rect">
-            <a:avLst/>
-          </a:prstGeom>
-          <a:noFill/>
-        </p:spPr>
-        <p:txBody>
-          <a:bodyPr wrap="square" lIns="0" rIns="0" tIns="0" bIns="0">
-            <a:spAutoFit/>
-          </a:bodyPr>
-          <a:lstStyle/>
-          <a:p>
-            <a:r>
-              <a:rPr sz="630" b="0" i="0">
-                <a:solidFill>
-                  <a:srgbClr val="111827"/>
-                </a:solidFill>
-                <a:latin typeface="Century Schoolbook"/>
-              </a:rPr>
-              <a:t>Not Hispanic/Latino</a:t>
-            </a:r>
-          </a:p>
-        </p:txBody>
-      </p:sp>
-      <p:sp>
-        <p:nvSpPr>
-          <p:cNvPr id="34" name="TextBox 33"/>
-          <p:cNvSpPr txBox="1"/>
-          <p:nvPr/>
-        </p:nvSpPr>
-        <p:spPr>
-          <a:xfrm>
-            <a:off x="4056888" y="2740456"/>
-            <a:ext cx="438912" cy="118872"/>
-          </a:xfrm>
-          <a:prstGeom prst="rect">
-            <a:avLst/>
-          </a:prstGeom>
-          <a:noFill/>
-        </p:spPr>
-        <p:txBody>
-          <a:bodyPr wrap="square" lIns="0" rIns="0" tIns="0" bIns="0">
-            <a:spAutoFit/>
-          </a:bodyPr>
-          <a:lstStyle/>
-          <a:p>
-            <a:pPr algn="r"/>
-            <a:r>
-              <a:rPr sz="630" b="1" i="0">
-                <a:solidFill>
-                  <a:srgbClr val="111827"/>
-                </a:solidFill>
-                <a:latin typeface="Century Schoolbook"/>
-              </a:rPr>
-              <a:t>37.6%</a:t>
-            </a:r>
-          </a:p>
-        </p:txBody>
-      </p:sp>
-      <p:sp>
-        <p:nvSpPr>
-          <p:cNvPr id="35" name="Rectangle 34"/>
-          <p:cNvSpPr/>
-          <p:nvPr/>
-        </p:nvSpPr>
-        <p:spPr>
-          <a:xfrm>
-            <a:off x="2484120" y="2867558"/>
-            <a:ext cx="53340" cy="53340"/>
-          </a:xfrm>
-          <a:prstGeom prst="rect">
-            <a:avLst/>
-          </a:prstGeom>
-          <a:solidFill>
-            <a:srgbClr val="F59E0B"/>
-          </a:solidFill>
-          <a:ln>
-            <a:noFill/>
-          </a:ln>
-          <a:effectLst/>
-        </p:spPr>
-        <p:style>
-          <a:lnRef idx="1">
-            <a:schemeClr val="accent1"/>
-          </a:lnRef>
-          <a:fillRef idx="3">
-            <a:schemeClr val="accent1"/>
-          </a:fillRef>
-          <a:effectRef idx="2">
-            <a:schemeClr val="accent1"/>
-          </a:effectRef>
-          <a:fontRef idx="minor">
-            <a:schemeClr val="lt1"/>
-          </a:fontRef>
-        </p:style>
-        <p:txBody>
-          <a:bodyPr rtlCol="0" anchor="ctr"/>
-          <a:lstStyle/>
-          <a:p>
-            <a:pPr algn="ctr"/>
-          </a:p>
-        </p:txBody>
-      </p:sp>
-      <p:sp>
-        <p:nvSpPr>
-          <p:cNvPr id="36" name="TextBox 35"/>
-          <p:cNvSpPr txBox="1"/>
-          <p:nvPr/>
-        </p:nvSpPr>
-        <p:spPr>
-          <a:xfrm>
-            <a:off x="2575560" y="2847441"/>
-            <a:ext cx="1508760" cy="118872"/>
-          </a:xfrm>
-          <a:prstGeom prst="rect">
-            <a:avLst/>
-          </a:prstGeom>
-          <a:noFill/>
-        </p:spPr>
-        <p:txBody>
-          <a:bodyPr wrap="square" lIns="0" rIns="0" tIns="0" bIns="0">
-            <a:spAutoFit/>
-          </a:bodyPr>
-          <a:lstStyle/>
-          <a:p>
-            <a:r>
-              <a:rPr sz="630" b="0" i="0">
-                <a:solidFill>
-                  <a:srgbClr val="111827"/>
-                </a:solidFill>
-                <a:latin typeface="Century Schoolbook"/>
-              </a:rPr>
-              <a:t>Hispanic/Latino</a:t>
-            </a:r>
-          </a:p>
-        </p:txBody>
-      </p:sp>
-      <p:sp>
-        <p:nvSpPr>
-          <p:cNvPr id="37" name="TextBox 36"/>
-          <p:cNvSpPr txBox="1"/>
-          <p:nvPr/>
-        </p:nvSpPr>
-        <p:spPr>
-          <a:xfrm>
-            <a:off x="4056888" y="2847441"/>
-            <a:ext cx="438912" cy="118872"/>
-          </a:xfrm>
-          <a:prstGeom prst="rect">
-            <a:avLst/>
-          </a:prstGeom>
-          <a:noFill/>
-        </p:spPr>
-        <p:txBody>
-          <a:bodyPr wrap="square" lIns="0" rIns="0" tIns="0" bIns="0">
-            <a:spAutoFit/>
-          </a:bodyPr>
-          <a:lstStyle/>
-          <a:p>
-            <a:pPr algn="r"/>
-            <a:r>
-              <a:rPr sz="630" b="1" i="0">
-                <a:solidFill>
-                  <a:srgbClr val="111827"/>
-                </a:solidFill>
-                <a:latin typeface="Century Schoolbook"/>
-              </a:rPr>
-              <a:t>10.0%</a:t>
-            </a:r>
-          </a:p>
-        </p:txBody>
-      </p:sp>
-      <p:pic>
-        <p:nvPicPr>
-          <p:cNvPr id="38" name="Picture 37" descr="crop-sex.png"/>
-          <p:cNvPicPr>
-            <a:picLocks noChangeAspect="1"/>
-          </p:cNvPicPr>
-          <p:nvPr/>
-        </p:nvPicPr>
-        <p:blipFill>
-          <a:blip r:embed="rId4"/>
-          <a:stretch>
-            <a:fillRect/>
-          </a:stretch>
-        </p:blipFill>
-        <p:spPr>
-          <a:xfrm>
-            <a:off x="5187696" y="1298448"/>
-            <a:ext cx="932688" cy="932688"/>
-          </a:xfrm>
-          <a:prstGeom prst="rect">
-            <a:avLst/>
-          </a:prstGeom>
-        </p:spPr>
-      </p:pic>
-      <p:sp>
-        <p:nvSpPr>
-          <p:cNvPr id="39" name="TextBox 38"/>
-          <p:cNvSpPr txBox="1"/>
-          <p:nvPr/>
-        </p:nvSpPr>
-        <p:spPr>
-          <a:xfrm>
-            <a:off x="4648200" y="2304288"/>
-            <a:ext cx="2011680" cy="128016"/>
-          </a:xfrm>
-          <a:prstGeom prst="rect">
-            <a:avLst/>
-          </a:prstGeom>
-          <a:noFill/>
-        </p:spPr>
-        <p:txBody>
-          <a:bodyPr wrap="square" lIns="0" rIns="0" tIns="0" bIns="0">
-            <a:spAutoFit/>
-          </a:bodyPr>
-          <a:lstStyle/>
-          <a:p>
-            <a:r>
-              <a:rPr sz="700" b="1" i="0">
-                <a:solidFill>
-                  <a:srgbClr val="6D6C66"/>
-                </a:solidFill>
-                <a:latin typeface="Century Schoolbook"/>
-              </a:rPr>
-              <a:t>SEX</a:t>
-            </a:r>
-            <a:r>
-              <a:rPr sz="700" b="1" i="0">
-                <a:solidFill>
-                  <a:srgbClr val="B4483D"/>
-                </a:solidFill>
-                <a:latin typeface="Century Schoolbook"/>
-              </a:rPr>
-              <a:t>*</a:t>
-            </a:r>
-          </a:p>
-        </p:txBody>
-      </p:sp>
-      <p:sp>
-        <p:nvSpPr>
-          <p:cNvPr id="40" name="TextBox 39"/>
-          <p:cNvSpPr txBox="1"/>
-          <p:nvPr/>
-        </p:nvSpPr>
-        <p:spPr>
-          <a:xfrm>
-            <a:off x="4648200" y="2432304"/>
-            <a:ext cx="2011680" cy="146304"/>
-          </a:xfrm>
-          <a:prstGeom prst="rect">
-            <a:avLst/>
-          </a:prstGeom>
-          <a:noFill/>
-        </p:spPr>
-        <p:txBody>
-          <a:bodyPr wrap="square" lIns="0" rIns="0" tIns="0" bIns="0">
-            <a:spAutoFit/>
-          </a:bodyPr>
-          <a:lstStyle/>
-          <a:p>
-            <a:r>
-              <a:rPr sz="950" b="1" i="0">
-                <a:solidFill>
-                  <a:srgbClr val="15803D"/>
-                </a:solidFill>
-                <a:latin typeface="Century Schoolbook"/>
-              </a:rPr>
-              <a:t>97.3%</a:t>
-            </a:r>
-            <a:r>
-              <a:rPr sz="650" b="0" i="0">
-                <a:solidFill>
-                  <a:srgbClr val="6D6C66"/>
-                </a:solidFill>
-                <a:latin typeface="Century Schoolbook"/>
-              </a:rPr>
-              <a:t>  of trials report it</a:t>
-            </a:r>
-          </a:p>
-        </p:txBody>
-      </p:sp>
-      <p:sp>
-        <p:nvSpPr>
-          <p:cNvPr id="41" name="Rectangle 40"/>
-          <p:cNvSpPr/>
-          <p:nvPr/>
-        </p:nvSpPr>
-        <p:spPr>
-          <a:xfrm>
-            <a:off x="4648200" y="2653588"/>
-            <a:ext cx="53340" cy="53340"/>
-          </a:xfrm>
-          <a:prstGeom prst="rect">
-            <a:avLst/>
-          </a:prstGeom>
-          <a:solidFill>
-            <a:srgbClr val="EC4899"/>
-          </a:solidFill>
-          <a:ln>
-            <a:noFill/>
-          </a:ln>
-          <a:effectLst/>
-        </p:spPr>
-        <p:style>
-          <a:lnRef idx="1">
-            <a:schemeClr val="accent1"/>
-          </a:lnRef>
-          <a:fillRef idx="3">
-            <a:schemeClr val="accent1"/>
-          </a:fillRef>
-          <a:effectRef idx="2">
-            <a:schemeClr val="accent1"/>
-          </a:effectRef>
-          <a:fontRef idx="minor">
-            <a:schemeClr val="lt1"/>
-          </a:fontRef>
-        </p:style>
-        <p:txBody>
-          <a:bodyPr rtlCol="0" anchor="ctr"/>
-          <a:lstStyle/>
-          <a:p>
-            <a:pPr algn="ctr"/>
-          </a:p>
-        </p:txBody>
-      </p:sp>
-      <p:sp>
-        <p:nvSpPr>
-          <p:cNvPr id="42" name="TextBox 41"/>
-          <p:cNvSpPr txBox="1"/>
-          <p:nvPr/>
-        </p:nvSpPr>
-        <p:spPr>
-          <a:xfrm>
-            <a:off x="4739639" y="2633472"/>
-            <a:ext cx="1508760" cy="118872"/>
-          </a:xfrm>
-          <a:prstGeom prst="rect">
-            <a:avLst/>
-          </a:prstGeom>
-          <a:noFill/>
-        </p:spPr>
-        <p:txBody>
-          <a:bodyPr wrap="square" lIns="0" rIns="0" tIns="0" bIns="0">
-            <a:spAutoFit/>
-          </a:bodyPr>
-          <a:lstStyle/>
-          <a:p>
-            <a:r>
-              <a:rPr sz="630" b="0" i="0">
-                <a:solidFill>
-                  <a:srgbClr val="111827"/>
-                </a:solidFill>
-                <a:latin typeface="Century Schoolbook"/>
-              </a:rPr>
-              <a:t>Female</a:t>
-            </a:r>
-          </a:p>
-        </p:txBody>
-      </p:sp>
-      <p:sp>
-        <p:nvSpPr>
-          <p:cNvPr id="43" name="TextBox 42"/>
-          <p:cNvSpPr txBox="1"/>
-          <p:nvPr/>
-        </p:nvSpPr>
-        <p:spPr>
-          <a:xfrm>
-            <a:off x="6220967" y="2633472"/>
-            <a:ext cx="438912" cy="118872"/>
-          </a:xfrm>
-          <a:prstGeom prst="rect">
-            <a:avLst/>
-          </a:prstGeom>
-          <a:noFill/>
-        </p:spPr>
-        <p:txBody>
-          <a:bodyPr wrap="square" lIns="0" rIns="0" tIns="0" bIns="0">
-            <a:spAutoFit/>
-          </a:bodyPr>
-          <a:lstStyle/>
-          <a:p>
-            <a:pPr algn="r"/>
-            <a:r>
-              <a:rPr sz="630" b="1" i="0">
-                <a:solidFill>
-                  <a:srgbClr val="111827"/>
-                </a:solidFill>
-                <a:latin typeface="Century Schoolbook"/>
-              </a:rPr>
-              <a:t>51.5%</a:t>
-            </a:r>
-          </a:p>
-        </p:txBody>
-      </p:sp>
-      <p:sp>
-        <p:nvSpPr>
-          <p:cNvPr id="44" name="Rectangle 43"/>
-          <p:cNvSpPr/>
-          <p:nvPr/>
-        </p:nvSpPr>
-        <p:spPr>
-          <a:xfrm>
-            <a:off x="4648200" y="2760573"/>
-            <a:ext cx="53340" cy="53340"/>
-          </a:xfrm>
-          <a:prstGeom prst="rect">
-            <a:avLst/>
-          </a:prstGeom>
-          <a:solidFill>
-            <a:srgbClr val="3B82F6"/>
-          </a:solidFill>
-          <a:ln>
-            <a:noFill/>
-          </a:ln>
-          <a:effectLst/>
-        </p:spPr>
-        <p:style>
-          <a:lnRef idx="1">
-            <a:schemeClr val="accent1"/>
-          </a:lnRef>
-          <a:fillRef idx="3">
-            <a:schemeClr val="accent1"/>
-          </a:fillRef>
-          <a:effectRef idx="2">
-            <a:schemeClr val="accent1"/>
-          </a:effectRef>
-          <a:fontRef idx="minor">
-            <a:schemeClr val="lt1"/>
-          </a:fontRef>
-        </p:style>
-        <p:txBody>
-          <a:bodyPr rtlCol="0" anchor="ctr"/>
-          <a:lstStyle/>
-          <a:p>
-            <a:pPr algn="ctr"/>
-          </a:p>
-        </p:txBody>
-      </p:sp>
-      <p:sp>
-        <p:nvSpPr>
-          <p:cNvPr id="45" name="TextBox 44"/>
-          <p:cNvSpPr txBox="1"/>
-          <p:nvPr/>
-        </p:nvSpPr>
-        <p:spPr>
-          <a:xfrm>
-            <a:off x="4739639" y="2740456"/>
-            <a:ext cx="1508760" cy="118872"/>
-          </a:xfrm>
-          <a:prstGeom prst="rect">
-            <a:avLst/>
-          </a:prstGeom>
-          <a:noFill/>
-        </p:spPr>
-        <p:txBody>
-          <a:bodyPr wrap="square" lIns="0" rIns="0" tIns="0" bIns="0">
-            <a:spAutoFit/>
-          </a:bodyPr>
-          <a:lstStyle/>
-          <a:p>
-            <a:r>
-              <a:rPr sz="630" b="0" i="0">
-                <a:solidFill>
-                  <a:srgbClr val="111827"/>
-                </a:solidFill>
-                <a:latin typeface="Century Schoolbook"/>
-              </a:rPr>
-              <a:t>Male</a:t>
-            </a:r>
-          </a:p>
-        </p:txBody>
-      </p:sp>
-      <p:sp>
-        <p:nvSpPr>
-          <p:cNvPr id="46" name="TextBox 45"/>
-          <p:cNvSpPr txBox="1"/>
-          <p:nvPr/>
-        </p:nvSpPr>
-        <p:spPr>
-          <a:xfrm>
-            <a:off x="6220967" y="2740456"/>
-            <a:ext cx="438912" cy="118872"/>
-          </a:xfrm>
-          <a:prstGeom prst="rect">
-            <a:avLst/>
-          </a:prstGeom>
-          <a:noFill/>
-        </p:spPr>
-        <p:txBody>
-          <a:bodyPr wrap="square" lIns="0" rIns="0" tIns="0" bIns="0">
-            <a:spAutoFit/>
-          </a:bodyPr>
-          <a:lstStyle/>
-          <a:p>
-            <a:pPr algn="r"/>
-            <a:r>
-              <a:rPr sz="630" b="1" i="0">
-                <a:solidFill>
-                  <a:srgbClr val="111827"/>
-                </a:solidFill>
-                <a:latin typeface="Century Schoolbook"/>
-              </a:rPr>
-              <a:t>45.0%</a:t>
-            </a:r>
-          </a:p>
-        </p:txBody>
-      </p:sp>
-      <p:sp>
-        <p:nvSpPr>
-          <p:cNvPr id="47" name="Rectangle 46"/>
-          <p:cNvSpPr/>
-          <p:nvPr/>
-        </p:nvSpPr>
-        <p:spPr>
-          <a:xfrm>
-            <a:off x="4648200" y="2867558"/>
-            <a:ext cx="53340" cy="53340"/>
-          </a:xfrm>
-          <a:prstGeom prst="rect">
-            <a:avLst/>
-          </a:prstGeom>
-          <a:solidFill>
-            <a:srgbClr val="6B7280"/>
-          </a:solidFill>
-          <a:ln>
-            <a:noFill/>
-          </a:ln>
-          <a:effectLst/>
-        </p:spPr>
-        <p:style>
-          <a:lnRef idx="1">
-            <a:schemeClr val="accent1"/>
-          </a:lnRef>
-          <a:fillRef idx="3">
-            <a:schemeClr val="accent1"/>
-          </a:fillRef>
-          <a:effectRef idx="2">
-            <a:schemeClr val="accent1"/>
-          </a:effectRef>
-          <a:fontRef idx="minor">
-            <a:schemeClr val="lt1"/>
-          </a:fontRef>
-        </p:style>
-        <p:txBody>
-          <a:bodyPr rtlCol="0" anchor="ctr"/>
-          <a:lstStyle/>
-          <a:p>
-            <a:pPr algn="ctr"/>
-          </a:p>
-        </p:txBody>
-      </p:sp>
-      <p:sp>
-        <p:nvSpPr>
-          <p:cNvPr id="48" name="TextBox 47"/>
-          <p:cNvSpPr txBox="1"/>
-          <p:nvPr/>
-        </p:nvSpPr>
-        <p:spPr>
-          <a:xfrm>
-            <a:off x="4739639" y="2847441"/>
-            <a:ext cx="1508760" cy="118872"/>
-          </a:xfrm>
-          <a:prstGeom prst="rect">
-            <a:avLst/>
-          </a:prstGeom>
-          <a:noFill/>
-        </p:spPr>
-        <p:txBody>
-          <a:bodyPr wrap="square" lIns="0" rIns="0" tIns="0" bIns="0">
-            <a:spAutoFit/>
-          </a:bodyPr>
-          <a:lstStyle/>
-          <a:p>
-            <a:r>
-              <a:rPr sz="630" b="0" i="0">
-                <a:solidFill>
-                  <a:srgbClr val="111827"/>
-                </a:solidFill>
-                <a:latin typeface="Century Schoolbook"/>
-              </a:rPr>
-              <a:t>Unknown</a:t>
-            </a:r>
-          </a:p>
-        </p:txBody>
-      </p:sp>
-      <p:sp>
-        <p:nvSpPr>
-          <p:cNvPr id="49" name="TextBox 48"/>
-          <p:cNvSpPr txBox="1"/>
-          <p:nvPr/>
-        </p:nvSpPr>
-        <p:spPr>
-          <a:xfrm>
-            <a:off x="6220967" y="2847441"/>
-            <a:ext cx="438912" cy="118872"/>
-          </a:xfrm>
-          <a:prstGeom prst="rect">
-            <a:avLst/>
-          </a:prstGeom>
-          <a:noFill/>
-        </p:spPr>
-        <p:txBody>
-          <a:bodyPr wrap="square" lIns="0" rIns="0" tIns="0" bIns="0">
-            <a:spAutoFit/>
-          </a:bodyPr>
-          <a:lstStyle/>
-          <a:p>
-            <a:pPr algn="r"/>
-            <a:r>
-              <a:rPr sz="630" b="1" i="0">
-                <a:solidFill>
-                  <a:srgbClr val="111827"/>
-                </a:solidFill>
-                <a:latin typeface="Century Schoolbook"/>
-              </a:rPr>
-              <a:t>3.5%</a:t>
-            </a:r>
-          </a:p>
-        </p:txBody>
-      </p:sp>
-      <p:pic>
-        <p:nvPicPr>
-          <p:cNvPr id="50" name="Picture 49" descr="crop-geography.png"/>
-          <p:cNvPicPr>
-            <a:picLocks noChangeAspect="1"/>
-          </p:cNvPicPr>
-          <p:nvPr/>
-        </p:nvPicPr>
-        <p:blipFill>
-          <a:blip r:embed="rId5"/>
-          <a:stretch>
-            <a:fillRect/>
-          </a:stretch>
-        </p:blipFill>
-        <p:spPr>
-          <a:xfrm>
-            <a:off x="7067914" y="1298448"/>
-            <a:ext cx="1500411" cy="932688"/>
-          </a:xfrm>
-          <a:prstGeom prst="rect">
-            <a:avLst/>
-          </a:prstGeom>
-        </p:spPr>
-      </p:pic>
-      <p:sp>
-        <p:nvSpPr>
-          <p:cNvPr id="51" name="TextBox 50"/>
-          <p:cNvSpPr txBox="1"/>
-          <p:nvPr/>
-        </p:nvSpPr>
-        <p:spPr>
-          <a:xfrm>
-            <a:off x="6812279" y="2304288"/>
-            <a:ext cx="2011680" cy="128016"/>
-          </a:xfrm>
-          <a:prstGeom prst="rect">
-            <a:avLst/>
-          </a:prstGeom>
-          <a:noFill/>
-        </p:spPr>
-        <p:txBody>
-          <a:bodyPr wrap="square" lIns="0" rIns="0" tIns="0" bIns="0">
-            <a:spAutoFit/>
-          </a:bodyPr>
-          <a:lstStyle/>
-          <a:p>
-            <a:r>
-              <a:rPr sz="700" b="1" i="0">
-                <a:solidFill>
-                  <a:srgbClr val="6D6C66"/>
-                </a:solidFill>
-                <a:latin typeface="Century Schoolbook"/>
-              </a:rPr>
-              <a:t>GEOGRAPHY</a:t>
-            </a:r>
-            <a:r>
-              <a:rPr sz="700" b="1" i="0">
-                <a:solidFill>
-                  <a:srgbClr val="B4483D"/>
-                </a:solidFill>
-                <a:latin typeface="Century Schoolbook"/>
-              </a:rPr>
-              <a:t>*</a:t>
-            </a:r>
-          </a:p>
-        </p:txBody>
-      </p:sp>
-      <p:sp>
-        <p:nvSpPr>
-          <p:cNvPr id="52" name="TextBox 51"/>
-          <p:cNvSpPr txBox="1"/>
-          <p:nvPr/>
-        </p:nvSpPr>
-        <p:spPr>
-          <a:xfrm>
-            <a:off x="6812279" y="2432304"/>
-            <a:ext cx="2011680" cy="146304"/>
-          </a:xfrm>
-          <a:prstGeom prst="rect">
-            <a:avLst/>
-          </a:prstGeom>
-          <a:noFill/>
-        </p:spPr>
-        <p:txBody>
-          <a:bodyPr wrap="square" lIns="0" rIns="0" tIns="0" bIns="0">
-            <a:spAutoFit/>
-          </a:bodyPr>
-          <a:lstStyle/>
-          <a:p>
-            <a:r>
-              <a:rPr sz="950" b="1" i="0">
-                <a:solidFill>
-                  <a:srgbClr val="15803D"/>
-                </a:solidFill>
-                <a:latin typeface="Century Schoolbook"/>
-              </a:rPr>
-              <a:t>37.3%</a:t>
-            </a:r>
-            <a:r>
-              <a:rPr sz="650" b="0" i="0">
-                <a:solidFill>
-                  <a:srgbClr val="6D6C66"/>
-                </a:solidFill>
-                <a:latin typeface="Century Schoolbook"/>
-              </a:rPr>
-              <a:t>  of sites are in the South</a:t>
-            </a:r>
-          </a:p>
-        </p:txBody>
-      </p:sp>
-      <p:sp>
-        <p:nvSpPr>
-          <p:cNvPr id="53" name="TextBox 52"/>
-          <p:cNvSpPr txBox="1"/>
-          <p:nvPr/>
-        </p:nvSpPr>
-        <p:spPr>
-          <a:xfrm>
-            <a:off x="6812279" y="2633472"/>
-            <a:ext cx="1508760" cy="118872"/>
-          </a:xfrm>
-          <a:prstGeom prst="rect">
-            <a:avLst/>
-          </a:prstGeom>
-          <a:noFill/>
-        </p:spPr>
-        <p:txBody>
-          <a:bodyPr wrap="square" lIns="0" rIns="0" tIns="0" bIns="0">
-            <a:spAutoFit/>
-          </a:bodyPr>
-          <a:lstStyle/>
-          <a:p>
-            <a:r>
-              <a:rPr sz="630" b="0" i="0">
-                <a:solidFill>
-                  <a:srgbClr val="111827"/>
-                </a:solidFill>
-                <a:latin typeface="Century Schoolbook"/>
-              </a:rPr>
-              <a:t>South</a:t>
-            </a:r>
-          </a:p>
-        </p:txBody>
-      </p:sp>
-      <p:sp>
-        <p:nvSpPr>
-          <p:cNvPr id="54" name="TextBox 53"/>
-          <p:cNvSpPr txBox="1"/>
-          <p:nvPr/>
-        </p:nvSpPr>
-        <p:spPr>
-          <a:xfrm>
-            <a:off x="8385047" y="2633472"/>
-            <a:ext cx="438912" cy="118872"/>
-          </a:xfrm>
-          <a:prstGeom prst="rect">
-            <a:avLst/>
-          </a:prstGeom>
-          <a:noFill/>
-        </p:spPr>
-        <p:txBody>
-          <a:bodyPr wrap="square" lIns="0" rIns="0" tIns="0" bIns="0">
-            <a:spAutoFit/>
-          </a:bodyPr>
-          <a:lstStyle/>
-          <a:p>
-            <a:pPr algn="r"/>
-            <a:r>
-              <a:rPr sz="630" b="1" i="0">
-                <a:solidFill>
-                  <a:srgbClr val="111827"/>
-                </a:solidFill>
-                <a:latin typeface="Century Schoolbook"/>
-              </a:rPr>
-              <a:t>37.3%</a:t>
-            </a:r>
-          </a:p>
-        </p:txBody>
-      </p:sp>
-      <p:sp>
-        <p:nvSpPr>
-          <p:cNvPr id="55" name="TextBox 54"/>
-          <p:cNvSpPr txBox="1"/>
-          <p:nvPr/>
-        </p:nvSpPr>
-        <p:spPr>
-          <a:xfrm>
-            <a:off x="6812279" y="2740456"/>
-            <a:ext cx="1508760" cy="118872"/>
-          </a:xfrm>
-          <a:prstGeom prst="rect">
-            <a:avLst/>
-          </a:prstGeom>
-          <a:noFill/>
-        </p:spPr>
-        <p:txBody>
-          <a:bodyPr wrap="square" lIns="0" rIns="0" tIns="0" bIns="0">
-            <a:spAutoFit/>
-          </a:bodyPr>
-          <a:lstStyle/>
-          <a:p>
-            <a:r>
-              <a:rPr sz="630" b="0" i="0">
-                <a:solidFill>
-                  <a:srgbClr val="111827"/>
-                </a:solidFill>
-                <a:latin typeface="Century Schoolbook"/>
-              </a:rPr>
-              <a:t>Midwest</a:t>
-            </a:r>
-          </a:p>
-        </p:txBody>
-      </p:sp>
-      <p:sp>
-        <p:nvSpPr>
-          <p:cNvPr id="56" name="TextBox 55"/>
-          <p:cNvSpPr txBox="1"/>
-          <p:nvPr/>
-        </p:nvSpPr>
-        <p:spPr>
-          <a:xfrm>
-            <a:off x="8385047" y="2740456"/>
-            <a:ext cx="438912" cy="118872"/>
-          </a:xfrm>
-          <a:prstGeom prst="rect">
-            <a:avLst/>
-          </a:prstGeom>
-          <a:noFill/>
-        </p:spPr>
-        <p:txBody>
-          <a:bodyPr wrap="square" lIns="0" rIns="0" tIns="0" bIns="0">
-            <a:spAutoFit/>
-          </a:bodyPr>
-          <a:lstStyle/>
-          <a:p>
-            <a:pPr algn="r"/>
-            <a:r>
-              <a:rPr sz="630" b="1" i="0">
-                <a:solidFill>
-                  <a:srgbClr val="111827"/>
-                </a:solidFill>
-                <a:latin typeface="Century Schoolbook"/>
-              </a:rPr>
-              <a:t>23.6%</a:t>
-            </a:r>
-          </a:p>
-        </p:txBody>
-      </p:sp>
-      <p:sp>
-        <p:nvSpPr>
-          <p:cNvPr id="57" name="TextBox 56"/>
-          <p:cNvSpPr txBox="1"/>
-          <p:nvPr/>
-        </p:nvSpPr>
-        <p:spPr>
-          <a:xfrm>
-            <a:off x="6812279" y="2847441"/>
-            <a:ext cx="1508760" cy="118872"/>
-          </a:xfrm>
-          <a:prstGeom prst="rect">
-            <a:avLst/>
-          </a:prstGeom>
-          <a:noFill/>
-        </p:spPr>
-        <p:txBody>
-          <a:bodyPr wrap="square" lIns="0" rIns="0" tIns="0" bIns="0">
-            <a:spAutoFit/>
-          </a:bodyPr>
-          <a:lstStyle/>
-          <a:p>
-            <a:r>
-              <a:rPr sz="630" b="0" i="0">
-                <a:solidFill>
-                  <a:srgbClr val="111827"/>
-                </a:solidFill>
-                <a:latin typeface="Century Schoolbook"/>
-              </a:rPr>
-              <a:t>West</a:t>
-            </a:r>
-          </a:p>
-        </p:txBody>
-      </p:sp>
-      <p:sp>
-        <p:nvSpPr>
-          <p:cNvPr id="58" name="TextBox 57"/>
-          <p:cNvSpPr txBox="1"/>
-          <p:nvPr/>
-        </p:nvSpPr>
-        <p:spPr>
-          <a:xfrm>
-            <a:off x="8385047" y="2847441"/>
-            <a:ext cx="438912" cy="118872"/>
-          </a:xfrm>
-          <a:prstGeom prst="rect">
-            <a:avLst/>
-          </a:prstGeom>
-          <a:noFill/>
-        </p:spPr>
-        <p:txBody>
-          <a:bodyPr wrap="square" lIns="0" rIns="0" tIns="0" bIns="0">
-            <a:spAutoFit/>
-          </a:bodyPr>
-          <a:lstStyle/>
-          <a:p>
-            <a:pPr algn="r"/>
-            <a:r>
-              <a:rPr sz="630" b="1" i="0">
-                <a:solidFill>
-                  <a:srgbClr val="111827"/>
-                </a:solidFill>
-                <a:latin typeface="Century Schoolbook"/>
-              </a:rPr>
-              <a:t>20.6%</a:t>
-            </a:r>
-          </a:p>
-        </p:txBody>
-      </p:sp>
-      <p:sp>
-        <p:nvSpPr>
-          <p:cNvPr id="59" name="TextBox 58"/>
-          <p:cNvSpPr txBox="1"/>
-          <p:nvPr/>
-        </p:nvSpPr>
-        <p:spPr>
-          <a:xfrm>
-            <a:off x="6812279" y="2954426"/>
-            <a:ext cx="1508760" cy="118872"/>
-          </a:xfrm>
-          <a:prstGeom prst="rect">
-            <a:avLst/>
-          </a:prstGeom>
-          <a:noFill/>
-        </p:spPr>
-        <p:txBody>
-          <a:bodyPr wrap="square" lIns="0" rIns="0" tIns="0" bIns="0">
-            <a:spAutoFit/>
-          </a:bodyPr>
-          <a:lstStyle/>
-          <a:p>
-            <a:r>
-              <a:rPr sz="630" b="0" i="0">
-                <a:solidFill>
-                  <a:srgbClr val="111827"/>
-                </a:solidFill>
-                <a:latin typeface="Century Schoolbook"/>
-              </a:rPr>
-              <a:t>Northeast</a:t>
-            </a:r>
-          </a:p>
-        </p:txBody>
-      </p:sp>
-      <p:sp>
-        <p:nvSpPr>
-          <p:cNvPr id="60" name="TextBox 59"/>
-          <p:cNvSpPr txBox="1"/>
-          <p:nvPr/>
-        </p:nvSpPr>
-        <p:spPr>
-          <a:xfrm>
-            <a:off x="8385047" y="2954426"/>
-            <a:ext cx="438912" cy="118872"/>
-          </a:xfrm>
-          <a:prstGeom prst="rect">
-            <a:avLst/>
-          </a:prstGeom>
-          <a:noFill/>
-        </p:spPr>
-        <p:txBody>
-          <a:bodyPr wrap="square" lIns="0" rIns="0" tIns="0" bIns="0">
-            <a:spAutoFit/>
-          </a:bodyPr>
-          <a:lstStyle/>
-          <a:p>
-            <a:pPr algn="r"/>
-            <a:r>
-              <a:rPr sz="630" b="1" i="0">
-                <a:solidFill>
-                  <a:srgbClr val="111827"/>
-                </a:solidFill>
-                <a:latin typeface="Century Schoolbook"/>
-              </a:rPr>
-              <a:t>18.5%</a:t>
-            </a:r>
-          </a:p>
-        </p:txBody>
-      </p:sp>
-      <p:sp>
-        <p:nvSpPr>
-          <p:cNvPr id="61" name="Rectangle 60"/>
-          <p:cNvSpPr/>
-          <p:nvPr/>
-        </p:nvSpPr>
-        <p:spPr>
-          <a:xfrm>
-            <a:off x="320040" y="3291840"/>
-            <a:ext cx="8503920" cy="11430"/>
-          </a:xfrm>
-          <a:prstGeom prst="rect">
-            <a:avLst/>
-          </a:prstGeom>
-          <a:solidFill>
-            <a:srgbClr val="D9D8D3"/>
-          </a:solidFill>
-          <a:ln>
-            <a:noFill/>
-          </a:ln>
-          <a:effectLst/>
-        </p:spPr>
-        <p:style>
-          <a:lnRef idx="1">
-            <a:schemeClr val="accent1"/>
-          </a:lnRef>
-          <a:fillRef idx="3">
-            <a:schemeClr val="accent1"/>
-          </a:fillRef>
-          <a:effectRef idx="2">
-            <a:schemeClr val="accent1"/>
-          </a:effectRef>
-          <a:fontRef idx="minor">
-            <a:schemeClr val="lt1"/>
-          </a:fontRef>
-        </p:style>
-        <p:txBody>
-          <a:bodyPr rtlCol="0" anchor="ctr"/>
-          <a:lstStyle/>
-          <a:p>
-            <a:pPr algn="ctr"/>
-          </a:p>
-        </p:txBody>
-      </p:sp>
-      <p:sp>
-        <p:nvSpPr>
-          <p:cNvPr id="62" name="TextBox 61"/>
-          <p:cNvSpPr txBox="1"/>
-          <p:nvPr/>
-        </p:nvSpPr>
-        <p:spPr>
-          <a:xfrm>
-            <a:off x="320040" y="3364992"/>
-            <a:ext cx="5486400" cy="237744"/>
-          </a:xfrm>
-          <a:prstGeom prst="rect">
-            <a:avLst/>
-          </a:prstGeom>
-          <a:noFill/>
-        </p:spPr>
-        <p:txBody>
-          <a:bodyPr wrap="square" lIns="0" rIns="0" tIns="0" bIns="0">
-            <a:spAutoFit/>
-          </a:bodyPr>
-          <a:lstStyle/>
-          <a:p>
-            <a:r>
-              <a:rPr sz="1100" b="0" i="0">
-                <a:solidFill>
-                  <a:srgbClr val="111827"/>
-                </a:solidFill>
-                <a:latin typeface="Century Schoolbook"/>
-              </a:rPr>
-              <a:t>The same four questions, now for medical AI</a:t>
-            </a:r>
-          </a:p>
-        </p:txBody>
-      </p:sp>
-      <p:pic>
-        <p:nvPicPr>
-          <p:cNvPr id="63" name="Picture 62" descr="crop-ai-devices.png"/>
-          <p:cNvPicPr>
-            <a:picLocks noChangeAspect="1"/>
-          </p:cNvPicPr>
-          <p:nvPr/>
-        </p:nvPicPr>
-        <p:blipFill>
-          <a:blip r:embed="rId6"/>
-          <a:stretch>
-            <a:fillRect/>
-          </a:stretch>
-        </p:blipFill>
-        <p:spPr>
-          <a:xfrm>
-            <a:off x="320040" y="3657600"/>
-            <a:ext cx="4160520" cy="795528"/>
-          </a:xfrm>
-          <a:prstGeom prst="rect">
-            <a:avLst/>
-          </a:prstGeom>
-        </p:spPr>
-      </p:pic>
-      <p:sp>
-        <p:nvSpPr>
-          <p:cNvPr id="64" name="Rectangle 63"/>
-          <p:cNvSpPr/>
-          <p:nvPr/>
-        </p:nvSpPr>
-        <p:spPr>
-          <a:xfrm>
-            <a:off x="4754880" y="3639312"/>
-            <a:ext cx="11430" cy="932688"/>
-          </a:xfrm>
-          <a:prstGeom prst="rect">
-            <a:avLst/>
-          </a:prstGeom>
-          <a:solidFill>
-            <a:srgbClr val="D9D8D3"/>
-          </a:solidFill>
-          <a:ln>
-            <a:noFill/>
-          </a:ln>
-          <a:effectLst/>
-        </p:spPr>
-        <p:style>
-          <a:lnRef idx="1">
-            <a:schemeClr val="accent1"/>
-          </a:lnRef>
-          <a:fillRef idx="3">
-            <a:schemeClr val="accent1"/>
-          </a:fillRef>
-          <a:effectRef idx="2">
-            <a:schemeClr val="accent1"/>
-          </a:effectRef>
-          <a:fontRef idx="minor">
-            <a:schemeClr val="lt1"/>
-          </a:fontRef>
-        </p:style>
-        <p:txBody>
-          <a:bodyPr rtlCol="0" anchor="ctr"/>
-          <a:lstStyle/>
-          <a:p>
-            <a:pPr algn="ctr"/>
-          </a:p>
-        </p:txBody>
-      </p:sp>
-      <p:sp>
-        <p:nvSpPr>
-          <p:cNvPr id="65" name="TextBox 64"/>
           <p:cNvSpPr txBox="1"/>
           <p:nvPr/>
         </p:nvSpPr>
@@ -3077,7 +1509,7 @@
       </p:sp>
       <p:sp>
         <p:nvSpPr>
-          <p:cNvPr id="66" name="TextBox 65"/>
+          <p:cNvPr id="23" name="TextBox 22"/>
           <p:cNvSpPr txBox="1"/>
           <p:nvPr/>
         </p:nvSpPr>
@@ -3120,7 +1552,7 @@
       </p:sp>
       <p:sp>
         <p:nvSpPr>
-          <p:cNvPr id="67" name="TextBox 66"/>
+          <p:cNvPr id="24" name="TextBox 23"/>
           <p:cNvSpPr txBox="1"/>
           <p:nvPr/>
         </p:nvSpPr>
@@ -3147,7 +1579,7 @@
                 </a:solidFill>
                 <a:latin typeface="Century Schoolbook"/>
               </a:rPr>
-              <a:t>Dashboard: civicsample.com · trial figures from data/dashboard-summary.json (2026-07-26 snapshot, all study types) · geography shares are US Census regions · device figures from the FDA AI/ML-Enabled Device List</a:t>
+              <a:t>Dashboard: civicsample.com, all study types (79,297 trials) · slices under 3% are left unlabelled · geography shares are US Census regions · device figures from the FDA AI/ML-Enabled Device List</a:t>
             </a:r>
           </a:p>
         </p:txBody>

--- a/slides/Presentation_for_Anthropic_Healthcare_filled.pptx
+++ b/slides/Presentation_for_Anthropic_Healthcare_filled.pptx
@@ -3084,7 +3084,7 @@
                 </a:solidFill>
                 <a:latin typeface="Century Schoolbook"/>
               </a:rPr>
-              <a:t>Amortised over the 20 fields the schema returns, that is $0.0012 per field on Haiku and $0.0071 on Opus.</a:t>
+              <a:t>Amortized over the 20 fields the schema returns, that is $0.0012 per field on Haiku and $0.0071 on Opus.</a:t>
             </a:r>
           </a:p>
         </p:txBody>
@@ -3247,7 +3247,7 @@
         <p:spPr>
           <a:xfrm>
             <a:off x="320040" y="3364992"/>
-            <a:ext cx="5486400" cy="237744"/>
+            <a:ext cx="6858000" cy="237744"/>
           </a:xfrm>
           <a:prstGeom prst="rect">
             <a:avLst/>
@@ -3267,7 +3267,7 @@
                 </a:solidFill>
                 <a:latin typeface="Century Schoolbook"/>
               </a:rPr>
-              <a:t>Where feedback would help most</a:t>
+              <a:t>What we’d want your read on — and where this could be useful to you</a:t>
             </a:r>
           </a:p>
         </p:txBody>
@@ -3280,7 +3280,41 @@
         </p:nvSpPr>
         <p:spPr>
           <a:xfrm>
-            <a:off x="320040" y="3657600"/>
+            <a:off x="320040" y="3621024"/>
+            <a:ext cx="2011680" cy="109728"/>
+          </a:xfrm>
+          <a:prstGeom prst="rect">
+            <a:avLst/>
+          </a:prstGeom>
+          <a:noFill/>
+        </p:spPr>
+        <p:txBody>
+          <a:bodyPr wrap="square" lIns="0" rIns="0" tIns="0" bIns="0">
+            <a:spAutoFit/>
+          </a:bodyPr>
+          <a:lstStyle/>
+          <a:p>
+            <a:r>
+              <a:rPr sz="600" b="1" i="0">
+                <a:solidFill>
+                  <a:srgbClr val="B4483D"/>
+                </a:solidFill>
+                <a:latin typeface="Century Schoolbook"/>
+              </a:rPr>
+              <a:t>CLINICAL</a:t>
+            </a:r>
+          </a:p>
+        </p:txBody>
+      </p:sp>
+      <p:sp>
+        <p:nvSpPr>
+          <p:cNvPr id="43" name="TextBox 42"/>
+          <p:cNvSpPr txBox="1"/>
+          <p:nvPr/>
+        </p:nvSpPr>
+        <p:spPr>
+          <a:xfrm>
+            <a:off x="320040" y="3739896"/>
             <a:ext cx="146304" cy="118872"/>
           </a:xfrm>
           <a:prstGeom prst="rect">
@@ -3308,14 +3342,14 @@
       </p:sp>
       <p:sp>
         <p:nvSpPr>
-          <p:cNvPr id="43" name="TextBox 42"/>
-          <p:cNvSpPr txBox="1"/>
-          <p:nvPr/>
-        </p:nvSpPr>
-        <p:spPr>
-          <a:xfrm>
-            <a:off x="466344" y="3657600"/>
-            <a:ext cx="1865376" cy="155448"/>
+          <p:cNvPr id="44" name="TextBox 43"/>
+          <p:cNvSpPr txBox="1"/>
+          <p:nvPr/>
+        </p:nvSpPr>
+        <p:spPr>
+          <a:xfrm>
+            <a:off x="466344" y="3739896"/>
+            <a:ext cx="1865376" cy="237744"/>
           </a:xfrm>
           <a:prstGeom prst="rect">
             <a:avLst/>
@@ -3340,21 +3374,21 @@
                 </a:solidFill>
                 <a:latin typeface="Century Schoolbook"/>
               </a:rPr>
-              <a:t>All three models, or one?</a:t>
-            </a:r>
-          </a:p>
-        </p:txBody>
-      </p:sp>
-      <p:sp>
-        <p:nvSpPr>
-          <p:cNvPr id="44" name="TextBox 43"/>
-          <p:cNvSpPr txBox="1"/>
-          <p:nvPr/>
-        </p:nvSpPr>
-        <p:spPr>
-          <a:xfrm>
-            <a:off x="466344" y="3840480"/>
-            <a:ext cx="1865376" cy="777240"/>
+              <a:t>Representative against what?</a:t>
+            </a:r>
+          </a:p>
+        </p:txBody>
+      </p:sp>
+      <p:sp>
+        <p:nvSpPr>
+          <p:cNvPr id="45" name="TextBox 44"/>
+          <p:cNvSpPr txBox="1"/>
+          <p:nvPr/>
+        </p:nvSpPr>
+        <p:spPr>
+          <a:xfrm>
+            <a:off x="466344" y="4005072"/>
+            <a:ext cx="1865376" cy="731520"/>
           </a:xfrm>
           <a:prstGeom prst="rect">
             <a:avLst/>
@@ -3373,26 +3407,60 @@
               </a:lnSpc>
             </a:pPr>
             <a:r>
-              <a:rPr sz="650" b="0" i="0">
+              <a:rPr sz="640" b="0" i="0">
                 <a:solidFill>
                   <a:srgbClr val="6D6C66"/>
                 </a:solidFill>
                 <a:latin typeface="Century Schoolbook"/>
               </a:rPr>
-              <a:t>Agreement across Haiku, Sonnet and Opus is our reliability signal, but it makes every concept 3× more expensive to extract. Would one model plus an adversarial verification pass buy more confidence per dollar?</a:t>
-            </a:r>
-          </a:p>
-        </p:txBody>
-      </p:sp>
-      <p:sp>
-        <p:nvSpPr>
-          <p:cNvPr id="45" name="TextBox 44"/>
-          <p:cNvSpPr txBox="1"/>
-          <p:nvPr/>
-        </p:nvSpPr>
-        <p:spPr>
-          <a:xfrm>
-            <a:off x="2484120" y="3657600"/>
+              <a:t>We can report that a validation cohort was 84% White. We cannot say whether that is a problem. The benchmark could be the census, the condition’s own epidemiology, or the deploying hospital’s patient panel — and they disagree. Without an agreed denominator the dashboard describes composition but cannot flag risk.</a:t>
+            </a:r>
+          </a:p>
+        </p:txBody>
+      </p:sp>
+      <p:sp>
+        <p:nvSpPr>
+          <p:cNvPr id="46" name="TextBox 45"/>
+          <p:cNvSpPr txBox="1"/>
+          <p:nvPr/>
+        </p:nvSpPr>
+        <p:spPr>
+          <a:xfrm>
+            <a:off x="2484120" y="3621024"/>
+            <a:ext cx="2011680" cy="109728"/>
+          </a:xfrm>
+          <a:prstGeom prst="rect">
+            <a:avLst/>
+          </a:prstGeom>
+          <a:noFill/>
+        </p:spPr>
+        <p:txBody>
+          <a:bodyPr wrap="square" lIns="0" rIns="0" tIns="0" bIns="0">
+            <a:spAutoFit/>
+          </a:bodyPr>
+          <a:lstStyle/>
+          <a:p>
+            <a:r>
+              <a:rPr sz="600" b="1" i="0">
+                <a:solidFill>
+                  <a:srgbClr val="B4483D"/>
+                </a:solidFill>
+                <a:latin typeface="Century Schoolbook"/>
+              </a:rPr>
+              <a:t>CLINICAL</a:t>
+            </a:r>
+          </a:p>
+        </p:txBody>
+      </p:sp>
+      <p:sp>
+        <p:nvSpPr>
+          <p:cNvPr id="47" name="TextBox 46"/>
+          <p:cNvSpPr txBox="1"/>
+          <p:nvPr/>
+        </p:nvSpPr>
+        <p:spPr>
+          <a:xfrm>
+            <a:off x="2484120" y="3739896"/>
             <a:ext cx="146304" cy="118872"/>
           </a:xfrm>
           <a:prstGeom prst="rect">
@@ -3420,14 +3488,14 @@
       </p:sp>
       <p:sp>
         <p:nvSpPr>
-          <p:cNvPr id="46" name="TextBox 45"/>
-          <p:cNvSpPr txBox="1"/>
-          <p:nvPr/>
-        </p:nvSpPr>
-        <p:spPr>
-          <a:xfrm>
-            <a:off x="2630424" y="3657600"/>
-            <a:ext cx="1865376" cy="155448"/>
+          <p:cNvPr id="48" name="TextBox 47"/>
+          <p:cNvSpPr txBox="1"/>
+          <p:nvPr/>
+        </p:nvSpPr>
+        <p:spPr>
+          <a:xfrm>
+            <a:off x="2630424" y="3739896"/>
+            <a:ext cx="1865376" cy="237744"/>
           </a:xfrm>
           <a:prstGeom prst="rect">
             <a:avLst/>
@@ -3452,21 +3520,21 @@
                 </a:solidFill>
                 <a:latin typeface="Century Schoolbook"/>
               </a:rPr>
-              <a:t>Prompt caching may not reach us.</a:t>
-            </a:r>
-          </a:p>
-        </p:txBody>
-      </p:sp>
-      <p:sp>
-        <p:nvSpPr>
-          <p:cNvPr id="47" name="TextBox 46"/>
-          <p:cNvSpPr txBox="1"/>
-          <p:nvPr/>
-        </p:nvSpPr>
-        <p:spPr>
-          <a:xfrm>
-            <a:off x="2630424" y="3840480"/>
-            <a:ext cx="1865376" cy="777240"/>
+              <a:t>Which social factors change a deployment decision?</a:t>
+            </a:r>
+          </a:p>
+        </p:txBody>
+      </p:sp>
+      <p:sp>
+        <p:nvSpPr>
+          <p:cNvPr id="49" name="TextBox 48"/>
+          <p:cNvSpPr txBox="1"/>
+          <p:nvPr/>
+        </p:nvSpPr>
+        <p:spPr>
+          <a:xfrm>
+            <a:off x="2630424" y="4005072"/>
+            <a:ext cx="1865376" cy="731520"/>
           </a:xfrm>
           <a:prstGeom prst="rect">
             <a:avLst/>
@@ -3485,26 +3553,60 @@
               </a:lnSpc>
             </a:pPr>
             <a:r>
-              <a:rPr sz="650" b="0" i="0">
+              <a:rPr sz="640" b="0" i="0">
                 <a:solidFill>
                   <a:srgbClr val="6D6C66"/>
                 </a:solidFill>
                 <a:latin typeface="Century Schoolbook"/>
               </a:rPr>
-              <a:t>Our reusable prefix — system prompt plus tool schema — is only ~1,400 tokens. That clears Sonnet 4.6’s 1,024-token minimum but falls under Opus 4.7 (2,048) and Haiku 4.5 (4,096).</a:t>
-            </a:r>
-          </a:p>
-        </p:txBody>
-      </p:sp>
-      <p:sp>
-        <p:nvSpPr>
-          <p:cNvPr id="48" name="TextBox 47"/>
-          <p:cNvSpPr txBox="1"/>
-          <p:nvPr/>
-        </p:nvSpPr>
-        <p:spPr>
-          <a:xfrm>
-            <a:off x="4648200" y="3657600"/>
+              <a:t>The schema reserves fields for income, education, insurance and neighborhood, but each one costs tokens and curator review. Which of these would actually change whether a health system deploys a tool, and which are good to know but not decision-relevant?</a:t>
+            </a:r>
+          </a:p>
+        </p:txBody>
+      </p:sp>
+      <p:sp>
+        <p:nvSpPr>
+          <p:cNvPr id="50" name="TextBox 49"/>
+          <p:cNvSpPr txBox="1"/>
+          <p:nvPr/>
+        </p:nvSpPr>
+        <p:spPr>
+          <a:xfrm>
+            <a:off x="4648200" y="3621024"/>
+            <a:ext cx="2011680" cy="109728"/>
+          </a:xfrm>
+          <a:prstGeom prst="rect">
+            <a:avLst/>
+          </a:prstGeom>
+          <a:noFill/>
+        </p:spPr>
+        <p:txBody>
+          <a:bodyPr wrap="square" lIns="0" rIns="0" tIns="0" bIns="0">
+            <a:spAutoFit/>
+          </a:bodyPr>
+          <a:lstStyle/>
+          <a:p>
+            <a:r>
+              <a:rPr sz="600" b="1" i="0">
+                <a:solidFill>
+                  <a:srgbClr val="B4483D"/>
+                </a:solidFill>
+                <a:latin typeface="Century Schoolbook"/>
+              </a:rPr>
+              <a:t>TECHNICAL</a:t>
+            </a:r>
+          </a:p>
+        </p:txBody>
+      </p:sp>
+      <p:sp>
+        <p:nvSpPr>
+          <p:cNvPr id="51" name="TextBox 50"/>
+          <p:cNvSpPr txBox="1"/>
+          <p:nvPr/>
+        </p:nvSpPr>
+        <p:spPr>
+          <a:xfrm>
+            <a:off x="4648200" y="3739896"/>
             <a:ext cx="146304" cy="118872"/>
           </a:xfrm>
           <a:prstGeom prst="rect">
@@ -3532,14 +3634,14 @@
       </p:sp>
       <p:sp>
         <p:nvSpPr>
-          <p:cNvPr id="49" name="TextBox 48"/>
-          <p:cNvSpPr txBox="1"/>
-          <p:nvPr/>
-        </p:nvSpPr>
-        <p:spPr>
-          <a:xfrm>
-            <a:off x="4794504" y="3657600"/>
-            <a:ext cx="1865376" cy="155448"/>
+          <p:cNvPr id="52" name="TextBox 51"/>
+          <p:cNvSpPr txBox="1"/>
+          <p:nvPr/>
+        </p:nvSpPr>
+        <p:spPr>
+          <a:xfrm>
+            <a:off x="4794504" y="3739896"/>
+            <a:ext cx="1865376" cy="237744"/>
           </a:xfrm>
           <a:prstGeom prst="rect">
             <a:avLst/>
@@ -3564,21 +3666,21 @@
                 </a:solidFill>
                 <a:latin typeface="Century Schoolbook"/>
               </a:rPr>
-              <a:t>Batch API on offline runs.</a:t>
-            </a:r>
-          </a:p>
-        </p:txBody>
-      </p:sp>
-      <p:sp>
-        <p:nvSpPr>
-          <p:cNvPr id="50" name="TextBox 49"/>
-          <p:cNvSpPr txBox="1"/>
-          <p:nvPr/>
-        </p:nvSpPr>
-        <p:spPr>
-          <a:xfrm>
-            <a:off x="4794504" y="3840480"/>
-            <a:ext cx="1865376" cy="777240"/>
+              <a:t>Silence vs. a missed read.</a:t>
+            </a:r>
+          </a:p>
+        </p:txBody>
+      </p:sp>
+      <p:sp>
+        <p:nvSpPr>
+          <p:cNvPr id="53" name="TextBox 52"/>
+          <p:cNvSpPr txBox="1"/>
+          <p:nvPr/>
+        </p:nvSpPr>
+        <p:spPr>
+          <a:xfrm>
+            <a:off x="4794504" y="4005072"/>
+            <a:ext cx="1865376" cy="731520"/>
           </a:xfrm>
           <a:prstGeom prst="rect">
             <a:avLst/>
@@ -3597,26 +3699,60 @@
               </a:lnSpc>
             </a:pPr>
             <a:r>
-              <a:rPr sz="650" b="0" i="0">
+              <a:rPr sz="640" b="0" i="0">
                 <a:solidFill>
                   <a:srgbClr val="6D6C66"/>
                 </a:solidFill>
                 <a:latin typeface="Century Schoolbook"/>
               </a:rPr>
-              <a:t>Nothing here is latency-sensitive — GitHub Actions runs the pipeline nightly. That reads like half the per-concept cost, for free.</a:t>
-            </a:r>
-          </a:p>
-        </p:txBody>
-      </p:sp>
-      <p:sp>
-        <p:nvSpPr>
-          <p:cNvPr id="51" name="TextBox 50"/>
-          <p:cNvSpPr txBox="1"/>
-          <p:nvPr/>
-        </p:nvSpPr>
-        <p:spPr>
-          <a:xfrm>
-            <a:off x="6812279" y="3657600"/>
+              <a:t>Our headline finding is what is never reported, so a false “not reported” is the failure that matters most. Quoting evidence before committing a value makes a positive claim auditable, but a silent document and a skipped page look identical in the output. How would you prompt or verify to separate them?</a:t>
+            </a:r>
+          </a:p>
+        </p:txBody>
+      </p:sp>
+      <p:sp>
+        <p:nvSpPr>
+          <p:cNvPr id="54" name="TextBox 53"/>
+          <p:cNvSpPr txBox="1"/>
+          <p:nvPr/>
+        </p:nvSpPr>
+        <p:spPr>
+          <a:xfrm>
+            <a:off x="6812279" y="3621024"/>
+            <a:ext cx="2011680" cy="109728"/>
+          </a:xfrm>
+          <a:prstGeom prst="rect">
+            <a:avLst/>
+          </a:prstGeom>
+          <a:noFill/>
+        </p:spPr>
+        <p:txBody>
+          <a:bodyPr wrap="square" lIns="0" rIns="0" tIns="0" bIns="0">
+            <a:spAutoFit/>
+          </a:bodyPr>
+          <a:lstStyle/>
+          <a:p>
+            <a:r>
+              <a:rPr sz="600" b="1" i="0">
+                <a:solidFill>
+                  <a:srgbClr val="15803D"/>
+                </a:solidFill>
+                <a:latin typeface="Century Schoolbook"/>
+              </a:rPr>
+              <a:t>FOR ANTHROPIC</a:t>
+            </a:r>
+          </a:p>
+        </p:txBody>
+      </p:sp>
+      <p:sp>
+        <p:nvSpPr>
+          <p:cNvPr id="55" name="TextBox 54"/>
+          <p:cNvSpPr txBox="1"/>
+          <p:nvPr/>
+        </p:nvSpPr>
+        <p:spPr>
+          <a:xfrm>
+            <a:off x="6812279" y="3739896"/>
             <a:ext cx="146304" cy="118872"/>
           </a:xfrm>
           <a:prstGeom prst="rect">
@@ -3633,7 +3769,7 @@
             <a:r>
               <a:rPr sz="750" b="1" i="0">
                 <a:solidFill>
-                  <a:srgbClr val="B4483D"/>
+                  <a:srgbClr val="15803D"/>
                 </a:solidFill>
                 <a:latin typeface="Century Schoolbook"/>
               </a:rPr>
@@ -3644,14 +3780,14 @@
       </p:sp>
       <p:sp>
         <p:nvSpPr>
-          <p:cNvPr id="52" name="TextBox 51"/>
-          <p:cNvSpPr txBox="1"/>
-          <p:nvPr/>
-        </p:nvSpPr>
-        <p:spPr>
-          <a:xfrm>
-            <a:off x="6958583" y="3657600"/>
-            <a:ext cx="1865376" cy="155448"/>
+          <p:cNvPr id="56" name="TextBox 55"/>
+          <p:cNvSpPr txBox="1"/>
+          <p:nvPr/>
+        </p:nvSpPr>
+        <p:spPr>
+          <a:xfrm>
+            <a:off x="6958583" y="3739896"/>
+            <a:ext cx="1865376" cy="237744"/>
           </a:xfrm>
           <a:prstGeom prst="rect">
             <a:avLst/>
@@ -3676,21 +3812,21 @@
                 </a:solidFill>
                 <a:latin typeface="Century Schoolbook"/>
               </a:rPr>
-              <a:t>Haiku leaked markup into 4 values.</a:t>
-            </a:r>
-          </a:p>
-        </p:txBody>
-      </p:sp>
-      <p:sp>
-        <p:nvSpPr>
-          <p:cNvPr id="53" name="TextBox 52"/>
-          <p:cNvSpPr txBox="1"/>
-          <p:nvPr/>
-        </p:nvSpPr>
-        <p:spPr>
-          <a:xfrm>
-            <a:off x="6958583" y="3840480"/>
-            <a:ext cx="1865376" cy="777240"/>
+              <a:t>Where this could be useful to you.</a:t>
+            </a:r>
+          </a:p>
+        </p:txBody>
+      </p:sp>
+      <p:sp>
+        <p:nvSpPr>
+          <p:cNvPr id="57" name="TextBox 56"/>
+          <p:cNvSpPr txBox="1"/>
+          <p:nvPr/>
+        </p:nvSpPr>
+        <p:spPr>
+          <a:xfrm>
+            <a:off x="6958583" y="4005072"/>
+            <a:ext cx="1865376" cy="731520"/>
           </a:xfrm>
           <a:prstGeom prst="rect">
             <a:avLst/>
@@ -3709,20 +3845,20 @@
               </a:lnSpc>
             </a:pPr>
             <a:r>
-              <a:rPr sz="650" b="0" i="0">
+              <a:rPr sz="640" b="0" i="0">
                 <a:solidFill>
                   <a:srgbClr val="6D6C66"/>
                 </a:solidFill>
                 <a:latin typeface="Century Schoolbook"/>
               </a:rPr>
-              <a:t>Sonnet and Opus: zero. We are targeting &gt;95% precision and recall — is the paired evidence/value schema too deep for Haiku, or is this a prompt fix?</a:t>
-            </a:r>
-          </a:p>
-        </p:txBody>
-      </p:sp>
-      <p:sp>
-        <p:nvSpPr>
-          <p:cNvPr id="54" name="TextBox 53"/>
+              <a:t>This becomes a public, evidence-linked record of who was in the validation cohort behind every FDA-authorized AI/ML device, each value traceable to its source page. That is the question health systems raise in procurement and the gap in what 510(k) summaries disclose today. Useful in your healthcare and policy conversations — and if so, in what cut?</a:t>
+            </a:r>
+          </a:p>
+        </p:txBody>
+      </p:sp>
+      <p:sp>
+        <p:nvSpPr>
+          <p:cNvPr id="58" name="TextBox 57"/>
           <p:cNvSpPr txBox="1"/>
           <p:nvPr/>
         </p:nvSpPr>

--- a/slides/Presentation_for_Anthropic_Healthcare_filled.pptx
+++ b/slides/Presentation_for_Anthropic_Healthcare_filled.pptx
@@ -3202,7 +3202,7 @@
         </p:nvSpPr>
         <p:spPr>
           <a:xfrm>
-            <a:off x="320040" y="3291840"/>
+            <a:off x="320040" y="3255264"/>
             <a:ext cx="8503920" cy="11430"/>
           </a:xfrm>
           <a:prstGeom prst="rect">
@@ -3246,7 +3246,7 @@
         </p:nvSpPr>
         <p:spPr>
           <a:xfrm>
-            <a:off x="320040" y="3364992"/>
+            <a:off x="320040" y="3310128"/>
             <a:ext cx="6858000" cy="237744"/>
           </a:xfrm>
           <a:prstGeom prst="rect">
@@ -3280,7 +3280,7 @@
         </p:nvSpPr>
         <p:spPr>
           <a:xfrm>
-            <a:off x="320040" y="3621024"/>
+            <a:off x="320040" y="3547872"/>
             <a:ext cx="2011680" cy="109728"/>
           </a:xfrm>
           <a:prstGeom prst="rect">
@@ -3314,7 +3314,7 @@
         </p:nvSpPr>
         <p:spPr>
           <a:xfrm>
-            <a:off x="320040" y="3739896"/>
+            <a:off x="320040" y="3657600"/>
             <a:ext cx="146304" cy="118872"/>
           </a:xfrm>
           <a:prstGeom prst="rect">
@@ -3348,7 +3348,7 @@
         </p:nvSpPr>
         <p:spPr>
           <a:xfrm>
-            <a:off x="466344" y="3739896"/>
+            <a:off x="466344" y="3657600"/>
             <a:ext cx="1865376" cy="237744"/>
           </a:xfrm>
           <a:prstGeom prst="rect">
@@ -3387,8 +3387,8 @@
         </p:nvSpPr>
         <p:spPr>
           <a:xfrm>
-            <a:off x="466344" y="4005072"/>
-            <a:ext cx="1865376" cy="731520"/>
+            <a:off x="466344" y="3913632"/>
+            <a:ext cx="1865376" cy="566928"/>
           </a:xfrm>
           <a:prstGeom prst="rect">
             <a:avLst/>
@@ -3413,7 +3413,7 @@
                 </a:solidFill>
                 <a:latin typeface="Century Schoolbook"/>
               </a:rPr>
-              <a:t>We can report that a validation cohort was 84% White. We cannot say whether that is a problem. The benchmark could be the census, the condition’s own epidemiology, or the deploying hospital’s patient panel — and they disagree. Without an agreed denominator the dashboard describes composition but cannot flag risk.</a:t>
+              <a:t>We can report that a validation cohort was 84% White. We cannot say whether that is a problem. The census, the condition’s own epidemiology and the deploying hospital’s panel all give different answers.</a:t>
             </a:r>
           </a:p>
         </p:txBody>
@@ -3426,7 +3426,46 @@
         </p:nvSpPr>
         <p:spPr>
           <a:xfrm>
-            <a:off x="2484120" y="3621024"/>
+            <a:off x="466344" y="4517136"/>
+            <a:ext cx="1865376" cy="256032"/>
+          </a:xfrm>
+          <a:prstGeom prst="rect">
+            <a:avLst/>
+          </a:prstGeom>
+          <a:noFill/>
+        </p:spPr>
+        <p:txBody>
+          <a:bodyPr wrap="square" lIns="0" rIns="0" tIns="0" bIns="0">
+            <a:spAutoFit/>
+          </a:bodyPr>
+          <a:lstStyle/>
+          <a:p>
+            <a:pPr>
+              <a:lnSpc>
+                <a:spcPct val="98000"/>
+              </a:lnSpc>
+            </a:pPr>
+            <a:r>
+              <a:rPr sz="640" b="0" i="1">
+                <a:solidFill>
+                  <a:srgbClr val="111827"/>
+                </a:solidFill>
+                <a:latin typeface="Century Schoolbook"/>
+              </a:rPr>
+              <a:t>Until this is settled we can publish composition, but not a judgment about it.</a:t>
+            </a:r>
+          </a:p>
+        </p:txBody>
+      </p:sp>
+      <p:sp>
+        <p:nvSpPr>
+          <p:cNvPr id="47" name="TextBox 46"/>
+          <p:cNvSpPr txBox="1"/>
+          <p:nvPr/>
+        </p:nvSpPr>
+        <p:spPr>
+          <a:xfrm>
+            <a:off x="2484120" y="3547872"/>
             <a:ext cx="2011680" cy="109728"/>
           </a:xfrm>
           <a:prstGeom prst="rect">
@@ -3454,13 +3493,13 @@
       </p:sp>
       <p:sp>
         <p:nvSpPr>
-          <p:cNvPr id="47" name="TextBox 46"/>
-          <p:cNvSpPr txBox="1"/>
-          <p:nvPr/>
-        </p:nvSpPr>
-        <p:spPr>
-          <a:xfrm>
-            <a:off x="2484120" y="3739896"/>
+          <p:cNvPr id="48" name="TextBox 47"/>
+          <p:cNvSpPr txBox="1"/>
+          <p:nvPr/>
+        </p:nvSpPr>
+        <p:spPr>
+          <a:xfrm>
+            <a:off x="2484120" y="3657600"/>
             <a:ext cx="146304" cy="118872"/>
           </a:xfrm>
           <a:prstGeom prst="rect">
@@ -3488,13 +3527,13 @@
       </p:sp>
       <p:sp>
         <p:nvSpPr>
-          <p:cNvPr id="48" name="TextBox 47"/>
-          <p:cNvSpPr txBox="1"/>
-          <p:nvPr/>
-        </p:nvSpPr>
-        <p:spPr>
-          <a:xfrm>
-            <a:off x="2630424" y="3739896"/>
+          <p:cNvPr id="49" name="TextBox 48"/>
+          <p:cNvSpPr txBox="1"/>
+          <p:nvPr/>
+        </p:nvSpPr>
+        <p:spPr>
+          <a:xfrm>
+            <a:off x="2630424" y="3657600"/>
             <a:ext cx="1865376" cy="237744"/>
           </a:xfrm>
           <a:prstGeom prst="rect">
@@ -3527,14 +3566,14 @@
       </p:sp>
       <p:sp>
         <p:nvSpPr>
-          <p:cNvPr id="49" name="TextBox 48"/>
-          <p:cNvSpPr txBox="1"/>
-          <p:nvPr/>
-        </p:nvSpPr>
-        <p:spPr>
-          <a:xfrm>
-            <a:off x="2630424" y="4005072"/>
-            <a:ext cx="1865376" cy="731520"/>
+          <p:cNvPr id="50" name="TextBox 49"/>
+          <p:cNvSpPr txBox="1"/>
+          <p:nvPr/>
+        </p:nvSpPr>
+        <p:spPr>
+          <a:xfrm>
+            <a:off x="2630424" y="3913632"/>
+            <a:ext cx="1865376" cy="566928"/>
           </a:xfrm>
           <a:prstGeom prst="rect">
             <a:avLst/>
@@ -3559,20 +3598,59 @@
                 </a:solidFill>
                 <a:latin typeface="Century Schoolbook"/>
               </a:rPr>
-              <a:t>The schema reserves fields for income, education, insurance and neighborhood, but each one costs tokens and curator review. Which of these would actually change whether a health system deploys a tool, and which are good to know but not decision-relevant?</a:t>
-            </a:r>
-          </a:p>
-        </p:txBody>
-      </p:sp>
-      <p:sp>
-        <p:nvSpPr>
-          <p:cNvPr id="50" name="TextBox 49"/>
-          <p:cNvSpPr txBox="1"/>
-          <p:nvPr/>
-        </p:nvSpPr>
-        <p:spPr>
-          <a:xfrm>
-            <a:off x="4648200" y="3621024"/>
+              <a:t>The schema reserves fields for income, education, insurance and neighborhood, but each one costs tokens and curator review to keep.</a:t>
+            </a:r>
+          </a:p>
+        </p:txBody>
+      </p:sp>
+      <p:sp>
+        <p:nvSpPr>
+          <p:cNvPr id="51" name="TextBox 50"/>
+          <p:cNvSpPr txBox="1"/>
+          <p:nvPr/>
+        </p:nvSpPr>
+        <p:spPr>
+          <a:xfrm>
+            <a:off x="2630424" y="4517136"/>
+            <a:ext cx="1865376" cy="256032"/>
+          </a:xfrm>
+          <a:prstGeom prst="rect">
+            <a:avLst/>
+          </a:prstGeom>
+          <a:noFill/>
+        </p:spPr>
+        <p:txBody>
+          <a:bodyPr wrap="square" lIns="0" rIns="0" tIns="0" bIns="0">
+            <a:spAutoFit/>
+          </a:bodyPr>
+          <a:lstStyle/>
+          <a:p>
+            <a:pPr>
+              <a:lnSpc>
+                <a:spcPct val="98000"/>
+              </a:lnSpc>
+            </a:pPr>
+            <a:r>
+              <a:rPr sz="640" b="0" i="1">
+                <a:solidFill>
+                  <a:srgbClr val="111827"/>
+                </a:solidFill>
+                <a:latin typeface="Century Schoolbook"/>
+              </a:rPr>
+              <a:t>Your answer decides what the rest of the schema budget buys.</a:t>
+            </a:r>
+          </a:p>
+        </p:txBody>
+      </p:sp>
+      <p:sp>
+        <p:nvSpPr>
+          <p:cNvPr id="52" name="TextBox 51"/>
+          <p:cNvSpPr txBox="1"/>
+          <p:nvPr/>
+        </p:nvSpPr>
+        <p:spPr>
+          <a:xfrm>
+            <a:off x="4648200" y="3547872"/>
             <a:ext cx="2011680" cy="109728"/>
           </a:xfrm>
           <a:prstGeom prst="rect">
@@ -3600,13 +3678,13 @@
       </p:sp>
       <p:sp>
         <p:nvSpPr>
-          <p:cNvPr id="51" name="TextBox 50"/>
-          <p:cNvSpPr txBox="1"/>
-          <p:nvPr/>
-        </p:nvSpPr>
-        <p:spPr>
-          <a:xfrm>
-            <a:off x="4648200" y="3739896"/>
+          <p:cNvPr id="53" name="TextBox 52"/>
+          <p:cNvSpPr txBox="1"/>
+          <p:nvPr/>
+        </p:nvSpPr>
+        <p:spPr>
+          <a:xfrm>
+            <a:off x="4648200" y="3657600"/>
             <a:ext cx="146304" cy="118872"/>
           </a:xfrm>
           <a:prstGeom prst="rect">
@@ -3634,13 +3712,13 @@
       </p:sp>
       <p:sp>
         <p:nvSpPr>
-          <p:cNvPr id="52" name="TextBox 51"/>
-          <p:cNvSpPr txBox="1"/>
-          <p:nvPr/>
-        </p:nvSpPr>
-        <p:spPr>
-          <a:xfrm>
-            <a:off x="4794504" y="3739896"/>
+          <p:cNvPr id="54" name="TextBox 53"/>
+          <p:cNvSpPr txBox="1"/>
+          <p:nvPr/>
+        </p:nvSpPr>
+        <p:spPr>
+          <a:xfrm>
+            <a:off x="4794504" y="3657600"/>
             <a:ext cx="1865376" cy="237744"/>
           </a:xfrm>
           <a:prstGeom prst="rect">
@@ -3673,14 +3751,14 @@
       </p:sp>
       <p:sp>
         <p:nvSpPr>
-          <p:cNvPr id="53" name="TextBox 52"/>
-          <p:cNvSpPr txBox="1"/>
-          <p:nvPr/>
-        </p:nvSpPr>
-        <p:spPr>
-          <a:xfrm>
-            <a:off x="4794504" y="4005072"/>
-            <a:ext cx="1865376" cy="731520"/>
+          <p:cNvPr id="55" name="TextBox 54"/>
+          <p:cNvSpPr txBox="1"/>
+          <p:nvPr/>
+        </p:nvSpPr>
+        <p:spPr>
+          <a:xfrm>
+            <a:off x="4794504" y="3913632"/>
+            <a:ext cx="1865376" cy="566928"/>
           </a:xfrm>
           <a:prstGeom prst="rect">
             <a:avLst/>
@@ -3705,20 +3783,59 @@
                 </a:solidFill>
                 <a:latin typeface="Century Schoolbook"/>
               </a:rPr>
-              <a:t>Our headline finding is what is never reported, so a false “not reported” is the failure that matters most. Quoting evidence before committing a value makes a positive claim auditable, but a silent document and a skipped page look identical in the output. How would you prompt or verify to separate them?</a:t>
-            </a:r>
-          </a:p>
-        </p:txBody>
-      </p:sp>
-      <p:sp>
-        <p:nvSpPr>
-          <p:cNvPr id="54" name="TextBox 53"/>
-          <p:cNvSpPr txBox="1"/>
-          <p:nvPr/>
-        </p:nvSpPr>
-        <p:spPr>
-          <a:xfrm>
-            <a:off x="6812279" y="3621024"/>
+              <a:t>Quoting evidence before committing a value makes a positive claim auditable. But a document that is genuinely silent and a page the model skipped look identical in the output. How would you prompt or verify to tell them apart?</a:t>
+            </a:r>
+          </a:p>
+        </p:txBody>
+      </p:sp>
+      <p:sp>
+        <p:nvSpPr>
+          <p:cNvPr id="56" name="TextBox 55"/>
+          <p:cNvSpPr txBox="1"/>
+          <p:nvPr/>
+        </p:nvSpPr>
+        <p:spPr>
+          <a:xfrm>
+            <a:off x="4794504" y="4517136"/>
+            <a:ext cx="1865376" cy="256032"/>
+          </a:xfrm>
+          <a:prstGeom prst="rect">
+            <a:avLst/>
+          </a:prstGeom>
+          <a:noFill/>
+        </p:spPr>
+        <p:txBody>
+          <a:bodyPr wrap="square" lIns="0" rIns="0" tIns="0" bIns="0">
+            <a:spAutoFit/>
+          </a:bodyPr>
+          <a:lstStyle/>
+          <a:p>
+            <a:pPr>
+              <a:lnSpc>
+                <a:spcPct val="98000"/>
+              </a:lnSpc>
+            </a:pPr>
+            <a:r>
+              <a:rPr sz="640" b="0" i="1">
+                <a:solidFill>
+                  <a:srgbClr val="111827"/>
+                </a:solidFill>
+                <a:latin typeface="Century Schoolbook"/>
+              </a:rPr>
+              <a:t>Get this wrong and the central claim — that demographics are missing — is unsafe to make.</a:t>
+            </a:r>
+          </a:p>
+        </p:txBody>
+      </p:sp>
+      <p:sp>
+        <p:nvSpPr>
+          <p:cNvPr id="57" name="TextBox 56"/>
+          <p:cNvSpPr txBox="1"/>
+          <p:nvPr/>
+        </p:nvSpPr>
+        <p:spPr>
+          <a:xfrm>
+            <a:off x="6812279" y="3547872"/>
             <a:ext cx="2011680" cy="109728"/>
           </a:xfrm>
           <a:prstGeom prst="rect">
@@ -3746,13 +3863,13 @@
       </p:sp>
       <p:sp>
         <p:nvSpPr>
-          <p:cNvPr id="55" name="TextBox 54"/>
-          <p:cNvSpPr txBox="1"/>
-          <p:nvPr/>
-        </p:nvSpPr>
-        <p:spPr>
-          <a:xfrm>
-            <a:off x="6812279" y="3739896"/>
+          <p:cNvPr id="58" name="TextBox 57"/>
+          <p:cNvSpPr txBox="1"/>
+          <p:nvPr/>
+        </p:nvSpPr>
+        <p:spPr>
+          <a:xfrm>
+            <a:off x="6812279" y="3657600"/>
             <a:ext cx="146304" cy="118872"/>
           </a:xfrm>
           <a:prstGeom prst="rect">
@@ -3780,13 +3897,13 @@
       </p:sp>
       <p:sp>
         <p:nvSpPr>
-          <p:cNvPr id="56" name="TextBox 55"/>
-          <p:cNvSpPr txBox="1"/>
-          <p:nvPr/>
-        </p:nvSpPr>
-        <p:spPr>
-          <a:xfrm>
-            <a:off x="6958583" y="3739896"/>
+          <p:cNvPr id="59" name="TextBox 58"/>
+          <p:cNvSpPr txBox="1"/>
+          <p:nvPr/>
+        </p:nvSpPr>
+        <p:spPr>
+          <a:xfrm>
+            <a:off x="6958583" y="3657600"/>
             <a:ext cx="1865376" cy="237744"/>
           </a:xfrm>
           <a:prstGeom prst="rect">
@@ -3819,14 +3936,14 @@
       </p:sp>
       <p:sp>
         <p:nvSpPr>
-          <p:cNvPr id="57" name="TextBox 56"/>
-          <p:cNvSpPr txBox="1"/>
-          <p:nvPr/>
-        </p:nvSpPr>
-        <p:spPr>
-          <a:xfrm>
-            <a:off x="6958583" y="4005072"/>
-            <a:ext cx="1865376" cy="731520"/>
+          <p:cNvPr id="60" name="TextBox 59"/>
+          <p:cNvSpPr txBox="1"/>
+          <p:nvPr/>
+        </p:nvSpPr>
+        <p:spPr>
+          <a:xfrm>
+            <a:off x="6958583" y="3913632"/>
+            <a:ext cx="1865376" cy="566928"/>
           </a:xfrm>
           <a:prstGeom prst="rect">
             <a:avLst/>
@@ -3851,20 +3968,59 @@
                 </a:solidFill>
                 <a:latin typeface="Century Schoolbook"/>
               </a:rPr>
-              <a:t>This becomes a public, evidence-linked record of who was in the validation cohort behind every FDA-authorized AI/ML device, each value traceable to its source page. That is the question health systems raise in procurement and the gap in what 510(k) summaries disclose today. Useful in your healthcare and policy conversations — and if so, in what cut?</a:t>
-            </a:r>
-          </a:p>
-        </p:txBody>
-      </p:sp>
-      <p:sp>
-        <p:nvSpPr>
-          <p:cNvPr id="58" name="TextBox 57"/>
-          <p:cNvSpPr txBox="1"/>
-          <p:nvPr/>
-        </p:nvSpPr>
-        <p:spPr>
-          <a:xfrm>
-            <a:off x="320040" y="4809744"/>
+              <a:t>A public, evidence-linked record of who was in the validation cohort behind every FDA-authorized AI/ML device, each value traceable to its source page — the question health systems raise in procurement, on the gap 510(k) summaries leave open.</a:t>
+            </a:r>
+          </a:p>
+        </p:txBody>
+      </p:sp>
+      <p:sp>
+        <p:nvSpPr>
+          <p:cNvPr id="61" name="TextBox 60"/>
+          <p:cNvSpPr txBox="1"/>
+          <p:nvPr/>
+        </p:nvSpPr>
+        <p:spPr>
+          <a:xfrm>
+            <a:off x="6958583" y="4517136"/>
+            <a:ext cx="1865376" cy="256032"/>
+          </a:xfrm>
+          <a:prstGeom prst="rect">
+            <a:avLst/>
+          </a:prstGeom>
+          <a:noFill/>
+        </p:spPr>
+        <p:txBody>
+          <a:bodyPr wrap="square" lIns="0" rIns="0" tIns="0" bIns="0">
+            <a:spAutoFit/>
+          </a:bodyPr>
+          <a:lstStyle/>
+          <a:p>
+            <a:pPr>
+              <a:lnSpc>
+                <a:spcPct val="98000"/>
+              </a:lnSpc>
+            </a:pPr>
+            <a:r>
+              <a:rPr sz="640" b="0" i="1">
+                <a:solidFill>
+                  <a:srgbClr val="111827"/>
+                </a:solidFill>
+                <a:latin typeface="Century Schoolbook"/>
+              </a:rPr>
+              <a:t>Tells us which cut to build first, and who to build it with.</a:t>
+            </a:r>
+          </a:p>
+        </p:txBody>
+      </p:sp>
+      <p:sp>
+        <p:nvSpPr>
+          <p:cNvPr id="62" name="TextBox 61"/>
+          <p:cNvSpPr txBox="1"/>
+          <p:nvPr/>
+        </p:nvSpPr>
+        <p:spPr>
+          <a:xfrm>
+            <a:off x="320040" y="4846320"/>
             <a:ext cx="8503920" cy="201168"/>
           </a:xfrm>
           <a:prstGeom prst="rect">

--- a/slides/Presentation_for_Anthropic_Healthcare_filled.pptx
+++ b/slides/Presentation_for_Anthropic_Healthcare_filled.pptx
@@ -3929,7 +3929,7 @@
                 </a:solidFill>
                 <a:latin typeface="Century Schoolbook"/>
               </a:rPr>
-              <a:t>Where this could be useful to you.</a:t>
+              <a:t>What this could give your team.</a:t>
             </a:r>
           </a:p>
         </p:txBody>
@@ -3968,7 +3968,7 @@
                 </a:solidFill>
                 <a:latin typeface="Century Schoolbook"/>
               </a:rPr>
-              <a:t>A public, evidence-linked record of who was in the validation cohort behind every FDA-authorized AI/ML device, each value traceable to its source page — the question health systems raise in procurement, on the gap 510(k) summaries leave open.</a:t>
+              <a:t>Health systems ask whether a tool was validated on patients like theirs. The public record cannot answer that today. We are building the answer for all 1,451 authorized devices — independent of the vendor, each value traceable to its source page.</a:t>
             </a:r>
           </a:p>
         </p:txBody>
@@ -4007,7 +4007,7 @@
                 </a:solidFill>
                 <a:latin typeface="Century Schoolbook"/>
               </a:rPr>
-              <a:t>Tells us which cut to build first, and who to build it with.</a:t>
+              <a:t>If that is evidence your patient-safety or policy conversations need, tell us and we will shape the first release around it.</a:t>
             </a:r>
           </a:p>
         </p:txBody>
